--- a/system-design-101/vi/lessons/sd-10-025/slides/sd-10-025.pptx
+++ b/system-design-101/vi/lessons/sd-10-025/slides/sd-10-025.pptx
@@ -1724,7 +1724,7 @@
               <a:buNone/>
             </a:pPr>
             <a:r>
-              <a:rPr lang="en-US" sz="3000" dirty="0" spc="-47" kern="0">
+              <a:rPr lang="en-US" sz="3000" dirty="0" spc="-1" kern="0">
                 <a:solidFill>
                   <a:srgbClr val="C4C8D6"/>
                 </a:solidFill>
@@ -1732,7 +1732,18 @@
                 <a:ea typeface="Be Vietnam Pro" pitchFamily="34" charset="-122"/>
                 <a:cs typeface="Be Vietnam Pro" pitchFamily="34" charset="-120"/>
               </a:rPr>
-              <a:t>Xử</a:t>
+              <a:t>Bốn</a:t>
+            </a:r>
+            <a:r>
+              <a:rPr lang="en-US" sz="3000" dirty="0" spc="0" kern="0">
+                <a:solidFill>
+                  <a:srgbClr val="C4C8D6"/>
+                </a:solidFill>
+                <a:latin typeface="Be Vietnam Pro" pitchFamily="34" charset="0"/>
+                <a:ea typeface="Be Vietnam Pro" pitchFamily="34" charset="-122"/>
+                <a:cs typeface="Be Vietnam Pro" pitchFamily="34" charset="-120"/>
+              </a:rPr>
+              <a:t> việc</a:t>
             </a:r>
             <a:r>
               <a:rPr lang="en-US" sz="3000" dirty="0" spc="1" kern="0">
@@ -1743,7 +1754,18 @@
                 <a:ea typeface="Be Vietnam Pro" pitchFamily="34" charset="-122"/>
                 <a:cs typeface="Be Vietnam Pro" pitchFamily="34" charset="-120"/>
               </a:rPr>
-              <a:t> lý</a:t>
+              <a:t> chờ,</a:t>
+            </a:r>
+            <a:r>
+              <a:rPr lang="en-US" sz="3000" dirty="0" spc="-2" kern="0">
+                <a:solidFill>
+                  <a:srgbClr val="C4C8D6"/>
+                </a:solidFill>
+                <a:latin typeface="Be Vietnam Pro" pitchFamily="34" charset="0"/>
+                <a:ea typeface="Be Vietnam Pro" pitchFamily="34" charset="-122"/>
+                <a:cs typeface="Be Vietnam Pro" pitchFamily="34" charset="-120"/>
+              </a:rPr>
+              <a:t> bốn</a:t>
             </a:r>
             <a:r>
               <a:rPr lang="en-US" sz="3000" dirty="0" spc="0" kern="0">
@@ -1754,10 +1776,10 @@
                 <a:ea typeface="Be Vietnam Pro" pitchFamily="34" charset="-122"/>
                 <a:cs typeface="Be Vietnam Pro" pitchFamily="34" charset="-120"/>
               </a:rPr>
-              <a:t> nhiều việc cùng</a:t>
-            </a:r>
-            <a:r>
-              <a:rPr lang="en-US" sz="3000" dirty="0" spc="1" kern="0">
+              <a:t> việc</a:t>
+            </a:r>
+            <a:r>
+              <a:rPr lang="en-US" sz="3000" dirty="0" spc="-1" kern="0">
                 <a:solidFill>
                   <a:srgbClr val="C4C8D6"/>
                 </a:solidFill>
@@ -1765,10 +1787,10 @@
                 <a:ea typeface="Be Vietnam Pro" pitchFamily="34" charset="-122"/>
                 <a:cs typeface="Be Vietnam Pro" pitchFamily="34" charset="-120"/>
               </a:rPr>
-              <a:t> lúc</a:t>
-            </a:r>
-            <a:r>
-              <a:rPr lang="en-US" sz="3000" dirty="0" spc="3" kern="0">
+              <a:t> tính</a:t>
+            </a:r>
+            <a:r>
+              <a:rPr lang="en-US" sz="3000" dirty="0" spc="-15" kern="0">
                 <a:solidFill>
                   <a:srgbClr val="C4C8D6"/>
                 </a:solidFill>
@@ -1776,10 +1798,10 @@
                 <a:ea typeface="Be Vietnam Pro" pitchFamily="34" charset="-122"/>
                 <a:cs typeface="Be Vietnam Pro" pitchFamily="34" charset="-120"/>
               </a:rPr>
-              <a:t> có giống</a:t>
-            </a:r>
-            <a:r>
-              <a:rPr lang="en-US" sz="3000" dirty="0" spc="1" kern="0">
+              <a:t> toán:</a:t>
+            </a:r>
+            <a:r>
+              <a:rPr lang="en-US" sz="3000" dirty="0" spc="0" kern="0">
                 <a:solidFill>
                   <a:srgbClr val="C4C8D6"/>
                 </a:solidFill>
@@ -1787,10 +1809,10 @@
                 <a:ea typeface="Be Vietnam Pro" pitchFamily="34" charset="-122"/>
                 <a:cs typeface="Be Vietnam Pro" pitchFamily="34" charset="-120"/>
               </a:rPr>
-              <a:t> làm</a:t>
-            </a:r>
-            <a:r>
-              <a:rPr lang="en-US" sz="3000" dirty="0" spc="0" kern="0">
+              <a:t> cách</a:t>
+            </a:r>
+            <a:r>
+              <a:rPr lang="en-US" sz="3000" dirty="0" spc="-1" kern="0">
                 <a:solidFill>
                   <a:srgbClr val="C4C8D6"/>
                 </a:solidFill>
@@ -1798,10 +1820,10 @@
                 <a:ea typeface="Be Vietnam Pro" pitchFamily="34" charset="-122"/>
                 <a:cs typeface="Be Vietnam Pro" pitchFamily="34" charset="-120"/>
               </a:rPr>
-              <a:t> nhiều</a:t>
-            </a:r>
-            <a:r>
-              <a:rPr lang="en-US" sz="3000" dirty="0" spc="-1" kern="0">
+              <a:t> nào</a:t>
+            </a:r>
+            <a:r>
+              <a:rPr lang="en-US" sz="3000" dirty="0" spc="-2" kern="0">
                 <a:solidFill>
                   <a:srgbClr val="C4C8D6"/>
                 </a:solidFill>
@@ -1809,40 +1831,7 @@
                 <a:ea typeface="Be Vietnam Pro" pitchFamily="34" charset="-122"/>
                 <a:cs typeface="Be Vietnam Pro" pitchFamily="34" charset="-120"/>
               </a:rPr>
-              <a:t> việc</a:t>
-            </a:r>
-            <a:r>
-              <a:rPr lang="en-US" sz="3000" dirty="0" spc="0" kern="0">
-                <a:solidFill>
-                  <a:srgbClr val="C4C8D6"/>
-                </a:solidFill>
-                <a:latin typeface="Be Vietnam Pro" pitchFamily="34" charset="0"/>
-                <a:ea typeface="Be Vietnam Pro" pitchFamily="34" charset="-122"/>
-                <a:cs typeface="Be Vietnam Pro" pitchFamily="34" charset="-120"/>
-              </a:rPr>
-              <a:t> cùng</a:t>
-            </a:r>
-            <a:r>
-              <a:rPr lang="en-US" sz="3000" dirty="0" spc="2" kern="0">
-                <a:solidFill>
-                  <a:srgbClr val="C4C8D6"/>
-                </a:solidFill>
-                <a:latin typeface="Be Vietnam Pro" pitchFamily="34" charset="0"/>
-                <a:ea typeface="Be Vietnam Pro" pitchFamily="34" charset="-122"/>
-                <a:cs typeface="Be Vietnam Pro" pitchFamily="34" charset="-120"/>
-              </a:rPr>
-              <a:t> lúc</a:t>
-            </a:r>
-            <a:r>
-              <a:rPr lang="en-US" sz="3000" dirty="0" spc="0" kern="0">
-                <a:solidFill>
-                  <a:srgbClr val="C4C8D6"/>
-                </a:solidFill>
-                <a:latin typeface="Be Vietnam Pro" pitchFamily="34" charset="0"/>
-                <a:ea typeface="Be Vietnam Pro" pitchFamily="34" charset="-122"/>
-                <a:cs typeface="Be Vietnam Pro" pitchFamily="34" charset="-120"/>
-              </a:rPr>
-              <a:t> không?</a:t>
+              <a:t> nhanh hơn?</a:t>
             </a:r>
             <a:endParaRPr lang="en-US" sz="3000" dirty="0"/>
           </a:p>
@@ -2059,7 +2048,7 @@
               <a:buNone/>
             </a:pPr>
             <a:r>
-              <a:rPr lang="en-US" sz="1800" dirty="0" spc="-1" kern="0">
+              <a:rPr lang="en-US" sz="1800" dirty="0" spc="-3" kern="0">
                 <a:solidFill>
                   <a:srgbClr val="9AA0B5"/>
                 </a:solidFill>
@@ -2067,29 +2056,7 @@
                 <a:ea typeface="Be Vietnam Pro" pitchFamily="34" charset="-122"/>
                 <a:cs typeface="Be Vietnam Pro" pitchFamily="34" charset="-120"/>
               </a:rPr>
-              <a:t>câu nói</a:t>
-            </a:r>
-            <a:r>
-              <a:rPr lang="en-US" sz="1800" dirty="0" spc="-2" kern="0">
-                <a:solidFill>
-                  <a:srgbClr val="9AA0B5"/>
-                </a:solidFill>
-                <a:latin typeface="Be Vietnam Pro" pitchFamily="34" charset="0"/>
-                <a:ea typeface="Be Vietnam Pro" pitchFamily="34" charset="-122"/>
-                <a:cs typeface="Be Vietnam Pro" pitchFamily="34" charset="-120"/>
-              </a:rPr>
-              <a:t> mở</a:t>
-            </a:r>
-            <a:r>
-              <a:rPr lang="en-US" sz="1800" dirty="0" spc="9" kern="0">
-                <a:solidFill>
-                  <a:srgbClr val="9AA0B5"/>
-                </a:solidFill>
-                <a:latin typeface="Be Vietnam Pro" pitchFamily="34" charset="0"/>
-                <a:ea typeface="Be Vietnam Pro" pitchFamily="34" charset="-122"/>
-                <a:cs typeface="Be Vietnam Pro" pitchFamily="34" charset="-120"/>
-              </a:rPr>
-              <a:t> đầu</a:t>
+              <a:t>thí nghiệm</a:t>
             </a:r>
             <a:endParaRPr lang="en-US" sz="1800" dirty="0"/>
           </a:p>
@@ -2162,39 +2129,6 @@
                 <a:cs typeface="Be Vietnam Pro" pitchFamily="34" charset="-120"/>
               </a:rPr>
               <a:t> THỜI</a:t>
-            </a:r>
-            <a:r>
-              <a:rPr lang="en-US" sz="1800" b="1" spc="225" kern="0" dirty="0">
-                <a:solidFill>
-                  <a:srgbClr val="7C93FF"/>
-                </a:solidFill>
-                <a:latin typeface="Be Vietnam Pro" pitchFamily="34" charset="0"/>
-                <a:ea typeface="Be Vietnam Pro" pitchFamily="34" charset="-122"/>
-                <a:cs typeface="Be Vietnam Pro" pitchFamily="34" charset="-120"/>
-              </a:rPr>
-              <a:t> ·</a:t>
-            </a:r>
-            <a:r>
-              <a:rPr lang="en-US" sz="1800" b="1" spc="224" kern="0" dirty="0">
-                <a:solidFill>
-                  <a:srgbClr val="7C93FF"/>
-                </a:solidFill>
-                <a:latin typeface="Be Vietnam Pro" pitchFamily="34" charset="0"/>
-                <a:ea typeface="Be Vietnam Pro" pitchFamily="34" charset="-122"/>
-                <a:cs typeface="Be Vietnam Pro" pitchFamily="34" charset="-120"/>
-              </a:rPr>
-              <a:t> DEALING</a:t>
-            </a:r>
-            <a:r>
-              <a:rPr lang="en-US" sz="1800" b="1" spc="226" kern="0" dirty="0">
-                <a:solidFill>
-                  <a:srgbClr val="7C93FF"/>
-                </a:solidFill>
-                <a:latin typeface="Be Vietnam Pro" pitchFamily="34" charset="0"/>
-                <a:ea typeface="Be Vietnam Pro" pitchFamily="34" charset="-122"/>
-                <a:cs typeface="Be Vietnam Pro" pitchFamily="34" charset="-120"/>
-              </a:rPr>
-              <a:t> WITH</a:t>
             </a:r>
             <a:endParaRPr lang="en-US" sz="1800" dirty="0"/>
           </a:p>
@@ -2436,28 +2370,6 @@
                 <a:cs typeface="Be Vietnam Pro" pitchFamily="34" charset="-120"/>
               </a:rPr>
               <a:t> SONG</a:t>
-            </a:r>
-            <a:r>
-              <a:rPr lang="en-US" sz="1800" b="1" spc="224" kern="0" dirty="0">
-                <a:solidFill>
-                  <a:srgbClr val="3DD6A0"/>
-                </a:solidFill>
-                <a:latin typeface="Be Vietnam Pro" pitchFamily="34" charset="0"/>
-                <a:ea typeface="Be Vietnam Pro" pitchFamily="34" charset="-122"/>
-                <a:cs typeface="Be Vietnam Pro" pitchFamily="34" charset="-120"/>
-              </a:rPr>
-              <a:t> ·</a:t>
-            </a:r>
-            <a:r>
-              <a:rPr lang="en-US" sz="1800" b="1" spc="225" kern="0" dirty="0">
-                <a:solidFill>
-                  <a:srgbClr val="3DD6A0"/>
-                </a:solidFill>
-                <a:latin typeface="Be Vietnam Pro" pitchFamily="34" charset="0"/>
-                <a:ea typeface="Be Vietnam Pro" pitchFamily="34" charset="-122"/>
-                <a:cs typeface="Be Vietnam Pro" pitchFamily="34" charset="-120"/>
-              </a:rPr>
-              <a:t> DOING</a:t>
             </a:r>
             <a:endParaRPr lang="en-US" sz="1800" dirty="0"/>
           </a:p>
@@ -3493,7 +3405,7 @@
               <a:t>Một</a:t>
             </a:r>
             <a:r>
-              <a:rPr lang="en-US" sz="7200" dirty="0" spc="0" kern="0">
+              <a:rPr lang="en-US" sz="7200" dirty="0" spc="-2" kern="0">
                 <a:solidFill>
                   <a:srgbClr val="14161C"/>
                 </a:solidFill>
@@ -3501,10 +3413,10 @@
                 <a:ea typeface="Bricolage Grotesque ExtraBold" pitchFamily="34" charset="-122"/>
                 <a:cs typeface="Bricolage Grotesque ExtraBold" pitchFamily="34" charset="-120"/>
               </a:rPr>
-              <a:t> câu</a:t>
-            </a:r>
-            <a:r>
-              <a:rPr lang="en-US" sz="7200" dirty="0" spc="-5" kern="0">
+              <a:t> thí</a:t>
+            </a:r>
+            <a:r>
+              <a:rPr lang="en-US" sz="7200" dirty="0" spc="2" kern="0">
                 <a:solidFill>
                   <a:srgbClr val="14161C"/>
                 </a:solidFill>
@@ -3512,7 +3424,7 @@
                 <a:ea typeface="Bricolage Grotesque ExtraBold" pitchFamily="34" charset="-122"/>
                 <a:cs typeface="Bricolage Grotesque ExtraBold" pitchFamily="34" charset="-120"/>
               </a:rPr>
-              <a:t> nói,</a:t>
+              <a:t> nghiệm,</a:t>
             </a:r>
             <a:endParaRPr lang="en-US" sz="7200" dirty="0"/>
           </a:p>
@@ -3535,7 +3447,7 @@
               <a:t>hai</a:t>
             </a:r>
             <a:r>
-              <a:rPr lang="en-US" sz="7200" dirty="0" spc="3" kern="0">
+              <a:rPr lang="en-US" sz="7200" dirty="0" spc="-10" kern="0">
                 <a:solidFill>
                   <a:srgbClr val="14161C"/>
                 </a:solidFill>
@@ -3543,10 +3455,10 @@
                 <a:ea typeface="Bricolage Grotesque ExtraBold" pitchFamily="34" charset="-122"/>
                 <a:cs typeface="Bricolage Grotesque ExtraBold" pitchFamily="34" charset="-120"/>
               </a:rPr>
-              <a:t> ý</a:t>
-            </a:r>
-            <a:r>
-              <a:rPr lang="en-US" sz="7200" dirty="0" spc="0" kern="0">
+              <a:t> loại</a:t>
+            </a:r>
+            <a:r>
+              <a:rPr lang="en-US" sz="7200" dirty="0" spc="2" kern="0">
                 <a:solidFill>
                   <a:srgbClr val="14161C"/>
                 </a:solidFill>
@@ -3554,18 +3466,7 @@
                 <a:ea typeface="Bricolage Grotesque ExtraBold" pitchFamily="34" charset="-122"/>
                 <a:cs typeface="Bricolage Grotesque ExtraBold" pitchFamily="34" charset="-120"/>
               </a:rPr>
-              <a:t> khác</a:t>
-            </a:r>
-            <a:r>
-              <a:rPr lang="en-US" sz="7200" dirty="0" spc="-1" kern="0">
-                <a:solidFill>
-                  <a:srgbClr val="14161C"/>
-                </a:solidFill>
-                <a:latin typeface="Bricolage Grotesque ExtraBold" pitchFamily="34" charset="0"/>
-                <a:ea typeface="Bricolage Grotesque ExtraBold" pitchFamily="34" charset="-122"/>
-                <a:cs typeface="Bricolage Grotesque ExtraBold" pitchFamily="34" charset="-120"/>
-              </a:rPr>
-              <a:t> nhau</a:t>
+              <a:t> việc</a:t>
             </a:r>
             <a:endParaRPr lang="en-US" sz="7200" dirty="0"/>
           </a:p>
@@ -3602,15 +3503,15 @@
               <a:buNone/>
             </a:pPr>
             <a:r>
-              <a:rPr lang="en-US" sz="2850" dirty="0" spc="-1" kern="0">
-                <a:solidFill>
-                  <a:srgbClr val="14161C"/>
-                </a:solidFill>
-                <a:latin typeface="Be Vietnam Pro" pitchFamily="34" charset="0"/>
-                <a:ea typeface="Be Vietnam Pro" pitchFamily="34" charset="-122"/>
-                <a:cs typeface="Be Vietnam Pro" pitchFamily="34" charset="-120"/>
-              </a:rPr>
-              <a:t>Bài</a:t>
+              <a:rPr lang="en-US" sz="2850" dirty="0" spc="-4" kern="0">
+                <a:solidFill>
+                  <a:srgbClr val="14161C"/>
+                </a:solidFill>
+                <a:latin typeface="Be Vietnam Pro" pitchFamily="34" charset="0"/>
+                <a:ea typeface="Be Vietnam Pro" pitchFamily="34" charset="-122"/>
+                <a:cs typeface="Be Vietnam Pro" pitchFamily="34" charset="-120"/>
+              </a:rPr>
+              <a:t>Bốn</a:t>
             </a:r>
             <a:r>
               <a:rPr lang="en-US" sz="2850" dirty="0" spc="-2" kern="0">
@@ -3621,51 +3522,51 @@
                 <a:ea typeface="Be Vietnam Pro" pitchFamily="34" charset="-122"/>
                 <a:cs typeface="Be Vietnam Pro" pitchFamily="34" charset="-120"/>
               </a:rPr>
-              <a:t> nguồn</a:t>
-            </a:r>
-            <a:r>
-              <a:rPr lang="en-US" sz="2850" dirty="0" spc="10" kern="0">
-                <a:solidFill>
-                  <a:srgbClr val="14161C"/>
-                </a:solidFill>
-                <a:latin typeface="Be Vietnam Pro" pitchFamily="34" charset="0"/>
-                <a:ea typeface="Be Vietnam Pro" pitchFamily="34" charset="-122"/>
-                <a:cs typeface="Be Vietnam Pro" pitchFamily="34" charset="-120"/>
-              </a:rPr>
-              <a:t> trích</a:t>
-            </a:r>
-            <a:r>
-              <a:rPr lang="en-US" sz="2850" dirty="0" spc="1" kern="0">
-                <a:solidFill>
-                  <a:srgbClr val="14161C"/>
-                </a:solidFill>
-                <a:latin typeface="Be Vietnam Pro" pitchFamily="34" charset="0"/>
-                <a:ea typeface="Be Vietnam Pro" pitchFamily="34" charset="-122"/>
-                <a:cs typeface="Be Vietnam Pro" pitchFamily="34" charset="-120"/>
-              </a:rPr>
-              <a:t> lời</a:t>
-            </a:r>
-            <a:r>
-              <a:rPr lang="en-US" sz="2850" dirty="0" spc="-34" kern="0">
-                <a:solidFill>
-                  <a:srgbClr val="14161C"/>
-                </a:solidFill>
-                <a:latin typeface="Be Vietnam Pro" pitchFamily="34" charset="0"/>
-                <a:ea typeface="Be Vietnam Pro" pitchFamily="34" charset="-122"/>
-                <a:cs typeface="Be Vietnam Pro" pitchFamily="34" charset="-120"/>
-              </a:rPr>
-              <a:t> Rob</a:t>
-            </a:r>
-            <a:r>
-              <a:rPr lang="en-US" sz="2850" dirty="0" spc="-22" kern="0">
-                <a:solidFill>
-                  <a:srgbClr val="14161C"/>
-                </a:solidFill>
-                <a:latin typeface="Be Vietnam Pro" pitchFamily="34" charset="0"/>
-                <a:ea typeface="Be Vietnam Pro" pitchFamily="34" charset="-122"/>
-                <a:cs typeface="Be Vietnam Pro" pitchFamily="34" charset="-120"/>
-              </a:rPr>
-              <a:t> Pike.</a:t>
+              <a:t> việc</a:t>
+            </a:r>
+            <a:r>
+              <a:rPr lang="en-US" sz="2850" dirty="0" spc="0" kern="0">
+                <a:solidFill>
+                  <a:srgbClr val="14161C"/>
+                </a:solidFill>
+                <a:latin typeface="Be Vietnam Pro" pitchFamily="34" charset="0"/>
+                <a:ea typeface="Be Vietnam Pro" pitchFamily="34" charset="-122"/>
+                <a:cs typeface="Be Vietnam Pro" pitchFamily="34" charset="-120"/>
+              </a:rPr>
+              <a:t> chờ, mỗi</a:t>
+            </a:r>
+            <a:r>
+              <a:rPr lang="en-US" sz="2850" dirty="0" spc="-2" kern="0">
+                <a:solidFill>
+                  <a:srgbClr val="14161C"/>
+                </a:solidFill>
+                <a:latin typeface="Be Vietnam Pro" pitchFamily="34" charset="0"/>
+                <a:ea typeface="Be Vietnam Pro" pitchFamily="34" charset="-122"/>
+                <a:cs typeface="Be Vietnam Pro" pitchFamily="34" charset="-120"/>
+              </a:rPr>
+              <a:t> việc</a:t>
+            </a:r>
+            <a:r>
+              <a:rPr lang="en-US" sz="2850" dirty="0" spc="4" kern="0">
+                <a:solidFill>
+                  <a:srgbClr val="14161C"/>
+                </a:solidFill>
+                <a:latin typeface="Be Vietnam Pro" pitchFamily="34" charset="0"/>
+                <a:ea typeface="Be Vietnam Pro" pitchFamily="34" charset="-122"/>
+                <a:cs typeface="Be Vietnam Pro" pitchFamily="34" charset="-120"/>
+              </a:rPr>
+              <a:t> 0,5</a:t>
+            </a:r>
+            <a:r>
+              <a:rPr lang="en-US" sz="2850" dirty="0" spc="-7" kern="0">
+                <a:solidFill>
+                  <a:srgbClr val="14161C"/>
+                </a:solidFill>
+                <a:latin typeface="Be Vietnam Pro" pitchFamily="34" charset="0"/>
+                <a:ea typeface="Be Vietnam Pro" pitchFamily="34" charset="-122"/>
+                <a:cs typeface="Be Vietnam Pro" pitchFamily="34" charset="-120"/>
+              </a:rPr>
+              <a:t> giây.</a:t>
             </a:r>
             <a:endParaRPr lang="en-US" sz="2850" dirty="0"/>
           </a:p>
@@ -3680,68 +3581,48 @@
               <a:buNone/>
             </a:pPr>
             <a:r>
-              <a:rPr lang="en-US" sz="2850" b="1" dirty="0" spc="-7" kern="0">
-                <a:solidFill>
-                  <a:srgbClr val="1F3FD1"/>
-                </a:solidFill>
-                <a:latin typeface="Be Vietnam Pro" pitchFamily="34" charset="0"/>
-                <a:ea typeface="Be Vietnam Pro" pitchFamily="34" charset="-122"/>
-                <a:cs typeface="Be Vietnam Pro" pitchFamily="34" charset="-120"/>
-              </a:rPr>
-              <a:t>Đồng</a:t>
-            </a:r>
-            <a:r>
-              <a:rPr lang="en-US" sz="2850" b="1" dirty="0" spc="2" kern="0">
-                <a:solidFill>
-                  <a:srgbClr val="1F3FD1"/>
-                </a:solidFill>
-                <a:latin typeface="Be Vietnam Pro" pitchFamily="34" charset="0"/>
-                <a:ea typeface="Be Vietnam Pro" pitchFamily="34" charset="-122"/>
-                <a:cs typeface="Be Vietnam Pro" pitchFamily="34" charset="-120"/>
-              </a:rPr>
-              <a:t> thời</a:t>
-            </a:r>
-            <a:pPr algn="l" indent="0" marL="0">
-              <a:lnSpc>
-                <a:spcPts val="3990"/>
-              </a:lnSpc>
-              <a:spcAft>
-                <a:spcPts val="1050"/>
-              </a:spcAft>
-              <a:buNone/>
-            </a:pPr>
-            <a:r>
-              <a:rPr lang="en-US" sz="2850" dirty="0" spc="2" kern="0">
-                <a:solidFill>
-                  <a:srgbClr val="14161C"/>
-                </a:solidFill>
-                <a:latin typeface="Be Vietnam Pro" pitchFamily="34" charset="0"/>
-                <a:ea typeface="Be Vietnam Pro" pitchFamily="34" charset="-122"/>
-                <a:cs typeface="Be Vietnam Pro" pitchFamily="34" charset="-120"/>
-              </a:rPr>
-              <a:t> là</a:t>
-            </a:r>
-            <a:r>
-              <a:rPr lang="en-US" sz="2850" dirty="0" spc="3" kern="0">
-                <a:solidFill>
-                  <a:srgbClr val="14161C"/>
-                </a:solidFill>
-                <a:latin typeface="Be Vietnam Pro" pitchFamily="34" charset="0"/>
-                <a:ea typeface="Be Vietnam Pro" pitchFamily="34" charset="-122"/>
-                <a:cs typeface="Be Vietnam Pro" pitchFamily="34" charset="-120"/>
-              </a:rPr>
-              <a:t> xử</a:t>
-            </a:r>
-            <a:r>
-              <a:rPr lang="en-US" sz="2850" dirty="0" spc="2" kern="0">
-                <a:solidFill>
-                  <a:srgbClr val="14161C"/>
-                </a:solidFill>
-                <a:latin typeface="Be Vietnam Pro" pitchFamily="34" charset="0"/>
-                <a:ea typeface="Be Vietnam Pro" pitchFamily="34" charset="-122"/>
-                <a:cs typeface="Be Vietnam Pro" pitchFamily="34" charset="-120"/>
-              </a:rPr>
-              <a:t> lý</a:t>
+              <a:rPr lang="en-US" sz="2850" dirty="0" spc="-4" kern="0">
+                <a:solidFill>
+                  <a:srgbClr val="14161C"/>
+                </a:solidFill>
+                <a:latin typeface="Be Vietnam Pro" pitchFamily="34" charset="0"/>
+                <a:ea typeface="Be Vietnam Pro" pitchFamily="34" charset="-122"/>
+                <a:cs typeface="Be Vietnam Pro" pitchFamily="34" charset="-120"/>
+              </a:rPr>
+              <a:t>Bốn</a:t>
+            </a:r>
+            <a:r>
+              <a:rPr lang="en-US" sz="2850" dirty="0" spc="-2" kern="0">
+                <a:solidFill>
+                  <a:srgbClr val="14161C"/>
+                </a:solidFill>
+                <a:latin typeface="Be Vietnam Pro" pitchFamily="34" charset="0"/>
+                <a:ea typeface="Be Vietnam Pro" pitchFamily="34" charset="-122"/>
+                <a:cs typeface="Be Vietnam Pro" pitchFamily="34" charset="-120"/>
+              </a:rPr>
+              <a:t> việc</a:t>
+            </a:r>
+            <a:r>
+              <a:rPr lang="en-US" sz="2850" dirty="0" spc="-1" kern="0">
+                <a:solidFill>
+                  <a:srgbClr val="14161C"/>
+                </a:solidFill>
+                <a:latin typeface="Be Vietnam Pro" pitchFamily="34" charset="0"/>
+                <a:ea typeface="Be Vietnam Pro" pitchFamily="34" charset="-122"/>
+                <a:cs typeface="Be Vietnam Pro" pitchFamily="34" charset="-120"/>
+              </a:rPr>
+              <a:t> tính</a:t>
+            </a:r>
+            <a:r>
+              <a:rPr lang="en-US" sz="2850" dirty="0" spc="-12" kern="0">
+                <a:solidFill>
+                  <a:srgbClr val="14161C"/>
+                </a:solidFill>
+                <a:latin typeface="Be Vietnam Pro" pitchFamily="34" charset="0"/>
+                <a:ea typeface="Be Vietnam Pro" pitchFamily="34" charset="-122"/>
+                <a:cs typeface="Be Vietnam Pro" pitchFamily="34" charset="-120"/>
+              </a:rPr>
+              <a:t> toán,</a:t>
             </a:r>
             <a:r>
               <a:rPr lang="en-US" sz="2850" dirty="0" spc="0" kern="0">
@@ -3752,7 +3633,7 @@
                 <a:ea typeface="Be Vietnam Pro" pitchFamily="34" charset="-122"/>
                 <a:cs typeface="Be Vietnam Pro" pitchFamily="34" charset="-120"/>
               </a:rPr>
-              <a:t> nhiều</a:t>
+              <a:t> mỗi</a:t>
             </a:r>
             <a:r>
               <a:rPr lang="en-US" sz="2850" dirty="0" spc="-1" kern="0">
@@ -3766,26 +3647,37 @@
               <a:t> việc</a:t>
             </a:r>
             <a:r>
-              <a:rPr lang="en-US" sz="2850" dirty="0" spc="-2" kern="0">
-                <a:solidFill>
-                  <a:srgbClr val="14161C"/>
-                </a:solidFill>
-                <a:latin typeface="Be Vietnam Pro" pitchFamily="34" charset="0"/>
-                <a:ea typeface="Be Vietnam Pro" pitchFamily="34" charset="-122"/>
-                <a:cs typeface="Be Vietnam Pro" pitchFamily="34" charset="-120"/>
-              </a:rPr>
-              <a:t> cùng</a:t>
-            </a:r>
-            <a:r>
-              <a:rPr lang="en-US" sz="2850" dirty="0" spc="0" kern="0">
-                <a:solidFill>
-                  <a:srgbClr val="14161C"/>
-                </a:solidFill>
-                <a:latin typeface="Be Vietnam Pro" pitchFamily="34" charset="0"/>
-                <a:ea typeface="Be Vietnam Pro" pitchFamily="34" charset="-122"/>
-                <a:cs typeface="Be Vietnam Pro" pitchFamily="34" charset="-120"/>
-              </a:rPr>
-              <a:t> lúc.</a:t>
+              <a:rPr lang="en-US" sz="2850" dirty="0" spc="-10" kern="0">
+                <a:solidFill>
+                  <a:srgbClr val="14161C"/>
+                </a:solidFill>
+                <a:latin typeface="Be Vietnam Pro" pitchFamily="34" charset="0"/>
+                <a:ea typeface="Be Vietnam Pro" pitchFamily="34" charset="-122"/>
+                <a:cs typeface="Be Vietnam Pro" pitchFamily="34" charset="-120"/>
+              </a:rPr>
+              <a:t> một</a:t>
+            </a:r>
+            <a:r>
+              <a:rPr lang="en-US" sz="2850" dirty="0" spc="-12" kern="0">
+                <a:solidFill>
+                  <a:srgbClr val="14161C"/>
+                </a:solidFill>
+                <a:latin typeface="Be Vietnam Pro" pitchFamily="34" charset="0"/>
+                <a:ea typeface="Be Vietnam Pro" pitchFamily="34" charset="-122"/>
+                <a:cs typeface="Be Vietnam Pro" pitchFamily="34" charset="-120"/>
+              </a:rPr>
+              <a:t> vòng</a:t>
+            </a:r>
+            <a:r>
+              <a:rPr lang="en-US" sz="2850" dirty="0" spc="1" kern="0">
+                <a:solidFill>
+                  <a:srgbClr val="14161C"/>
+                </a:solidFill>
+                <a:latin typeface="Be Vietnam Pro" pitchFamily="34" charset="0"/>
+                <a:ea typeface="Be Vietnam Pro" pitchFamily="34" charset="-122"/>
+                <a:cs typeface="Be Vietnam Pro" pitchFamily="34" charset="-120"/>
+              </a:rPr>
+              <a:t> lặp.</a:t>
             </a:r>
             <a:endParaRPr lang="en-US" sz="2850" dirty="0"/>
           </a:p>
@@ -3797,43 +3689,15 @@
               <a:buNone/>
             </a:pPr>
             <a:r>
-              <a:rPr lang="en-US" sz="2850" b="1" dirty="0" spc="-7" kern="0">
-                <a:solidFill>
-                  <a:srgbClr val="0F766E"/>
-                </a:solidFill>
-                <a:latin typeface="Be Vietnam Pro" pitchFamily="34" charset="0"/>
-                <a:ea typeface="Be Vietnam Pro" pitchFamily="34" charset="-122"/>
-                <a:cs typeface="Be Vietnam Pro" pitchFamily="34" charset="-120"/>
-              </a:rPr>
-              <a:t>Song</a:t>
-            </a:r>
-            <a:r>
-              <a:rPr lang="en-US" sz="2850" b="1" dirty="0" spc="-5" kern="0">
-                <a:solidFill>
-                  <a:srgbClr val="0F766E"/>
-                </a:solidFill>
-                <a:latin typeface="Be Vietnam Pro" pitchFamily="34" charset="0"/>
-                <a:ea typeface="Be Vietnam Pro" pitchFamily="34" charset="-122"/>
-                <a:cs typeface="Be Vietnam Pro" pitchFamily="34" charset="-120"/>
-              </a:rPr>
-              <a:t> song</a:t>
-            </a:r>
-            <a:pPr algn="l" indent="0" marL="0">
-              <a:lnSpc>
-                <a:spcPts val="3990"/>
-              </a:lnSpc>
-              <a:buNone/>
-            </a:pPr>
-            <a:r>
-              <a:rPr lang="en-US" sz="2850" dirty="0" spc="2" kern="0">
-                <a:solidFill>
-                  <a:srgbClr val="14161C"/>
-                </a:solidFill>
-                <a:latin typeface="Be Vietnam Pro" pitchFamily="34" charset="0"/>
-                <a:ea typeface="Be Vietnam Pro" pitchFamily="34" charset="-122"/>
-                <a:cs typeface="Be Vietnam Pro" pitchFamily="34" charset="-120"/>
-              </a:rPr>
-              <a:t> là</a:t>
+              <a:rPr lang="en-US" sz="2850" dirty="0" spc="-12" kern="0">
+                <a:solidFill>
+                  <a:srgbClr val="14161C"/>
+                </a:solidFill>
+                <a:latin typeface="Be Vietnam Pro" pitchFamily="34" charset="0"/>
+                <a:ea typeface="Be Vietnam Pro" pitchFamily="34" charset="-122"/>
+                <a:cs typeface="Be Vietnam Pro" pitchFamily="34" charset="-120"/>
+              </a:rPr>
+              <a:t>Chạy</a:t>
             </a:r>
             <a:r>
               <a:rPr lang="en-US" sz="2850" dirty="0" spc="0" kern="0">
@@ -3844,7 +3708,29 @@
                 <a:ea typeface="Be Vietnam Pro" pitchFamily="34" charset="-122"/>
                 <a:cs typeface="Be Vietnam Pro" pitchFamily="34" charset="-120"/>
               </a:rPr>
-              <a:t> làm nhiều</a:t>
+              <a:t> lần</a:t>
+            </a:r>
+            <a:r>
+              <a:rPr lang="en-US" sz="2850" dirty="0" spc="8" kern="0">
+                <a:solidFill>
+                  <a:srgbClr val="14161C"/>
+                </a:solidFill>
+                <a:latin typeface="Be Vietnam Pro" pitchFamily="34" charset="0"/>
+                <a:ea typeface="Be Vietnam Pro" pitchFamily="34" charset="-122"/>
+                <a:cs typeface="Be Vietnam Pro" pitchFamily="34" charset="-120"/>
+              </a:rPr>
+              <a:t> lượt,</a:t>
+            </a:r>
+            <a:r>
+              <a:rPr lang="en-US" sz="2850" dirty="0" spc="-5" kern="0">
+                <a:solidFill>
+                  <a:srgbClr val="14161C"/>
+                </a:solidFill>
+                <a:latin typeface="Be Vietnam Pro" pitchFamily="34" charset="0"/>
+                <a:ea typeface="Be Vietnam Pro" pitchFamily="34" charset="-122"/>
+                <a:cs typeface="Be Vietnam Pro" pitchFamily="34" charset="-120"/>
+              </a:rPr>
+              <a:t> bằng</a:t>
             </a:r>
             <a:r>
               <a:rPr lang="en-US" sz="2850" dirty="0" spc="-1" kern="0">
@@ -3855,29 +3741,40 @@
                 <a:ea typeface="Be Vietnam Pro" pitchFamily="34" charset="-122"/>
                 <a:cs typeface="Be Vietnam Pro" pitchFamily="34" charset="-120"/>
               </a:rPr>
-              <a:t> việc</a:t>
-            </a:r>
-            <a:r>
-              <a:rPr lang="en-US" sz="2850" dirty="0" spc="-2" kern="0">
-                <a:solidFill>
-                  <a:srgbClr val="14161C"/>
-                </a:solidFill>
-                <a:latin typeface="Be Vietnam Pro" pitchFamily="34" charset="0"/>
-                <a:ea typeface="Be Vietnam Pro" pitchFamily="34" charset="-122"/>
-                <a:cs typeface="Be Vietnam Pro" pitchFamily="34" charset="-120"/>
-              </a:rPr>
-              <a:t> cùng</a:t>
-            </a:r>
-            <a:r>
-              <a:rPr lang="en-US" sz="2850" dirty="0" spc="1" kern="0">
-                <a:solidFill>
-                  <a:srgbClr val="14161C"/>
-                </a:solidFill>
-                <a:latin typeface="Be Vietnam Pro" pitchFamily="34" charset="0"/>
-                <a:ea typeface="Be Vietnam Pro" pitchFamily="34" charset="-122"/>
-                <a:cs typeface="Be Vietnam Pro" pitchFamily="34" charset="-120"/>
-              </a:rPr>
-              <a:t> lúc.</a:t>
+              <a:t> luồng,</a:t>
+            </a:r>
+            <a:r>
+              <a:rPr lang="en-US" sz="2850" dirty="0" spc="-5" kern="0">
+                <a:solidFill>
+                  <a:srgbClr val="14161C"/>
+                </a:solidFill>
+                <a:latin typeface="Be Vietnam Pro" pitchFamily="34" charset="0"/>
+                <a:ea typeface="Be Vietnam Pro" pitchFamily="34" charset="-122"/>
+                <a:cs typeface="Be Vietnam Pro" pitchFamily="34" charset="-120"/>
+              </a:rPr>
+              <a:t> bằng</a:t>
+            </a:r>
+            <a:r>
+              <a:rPr lang="en-US" sz="2850" dirty="0" spc="0" kern="0">
+                <a:solidFill>
+                  <a:srgbClr val="14161C"/>
+                </a:solidFill>
+                <a:latin typeface="Be Vietnam Pro" pitchFamily="34" charset="0"/>
+                <a:ea typeface="Be Vietnam Pro" pitchFamily="34" charset="-122"/>
+                <a:cs typeface="Be Vietnam Pro" pitchFamily="34" charset="-120"/>
+              </a:rPr>
+              <a:t> tiến</a:t>
+            </a:r>
+            <a:r>
+              <a:rPr lang="en-US" sz="2850" dirty="0" spc="8" kern="0">
+                <a:solidFill>
+                  <a:srgbClr val="14161C"/>
+                </a:solidFill>
+                <a:latin typeface="Be Vietnam Pro" pitchFamily="34" charset="0"/>
+                <a:ea typeface="Be Vietnam Pro" pitchFamily="34" charset="-122"/>
+                <a:cs typeface="Be Vietnam Pro" pitchFamily="34" charset="-120"/>
+              </a:rPr>
+              <a:t> trình.</a:t>
             </a:r>
             <a:endParaRPr lang="en-US" sz="2850" dirty="0"/>
           </a:p>
@@ -3994,15 +3891,15 @@
               <a:t>Đọc</a:t>
             </a:r>
             <a:r>
-              <a:rPr lang="en-US" sz="2678" dirty="0" spc="19" kern="0">
-                <a:solidFill>
-                  <a:srgbClr val="14161C"/>
-                </a:solidFill>
-                <a:latin typeface="Be Vietnam Pro" pitchFamily="34" charset="0"/>
-                <a:ea typeface="Be Vietnam Pro" pitchFamily="34" charset="-122"/>
-                <a:cs typeface="Be Vietnam Pro" pitchFamily="34" charset="-120"/>
-              </a:rPr>
-              <a:t> từng</a:t>
+              <a:rPr lang="en-US" sz="2678" dirty="0" spc="-36" kern="0">
+                <a:solidFill>
+                  <a:srgbClr val="14161C"/>
+                </a:solidFill>
+                <a:latin typeface="Be Vietnam Pro" pitchFamily="34" charset="0"/>
+                <a:ea typeface="Be Vietnam Pro" pitchFamily="34" charset="-122"/>
+                <a:cs typeface="Be Vietnam Pro" pitchFamily="34" charset="-120"/>
+              </a:rPr>
+              <a:t> kết</a:t>
             </a:r>
             <a:r>
               <a:rPr lang="en-US" sz="2678" dirty="0" spc="1" kern="0">
@@ -4013,51 +3910,18 @@
                 <a:ea typeface="Be Vietnam Pro" pitchFamily="34" charset="-122"/>
                 <a:cs typeface="Be Vietnam Pro" pitchFamily="34" charset="-120"/>
               </a:rPr>
-              <a:t> ý,</a:t>
-            </a:r>
-            <a:r>
-              <a:rPr lang="en-US" sz="2678" dirty="0" spc="-29" kern="0">
-                <a:solidFill>
-                  <a:srgbClr val="14161C"/>
-                </a:solidFill>
-                <a:latin typeface="Be Vietnam Pro" pitchFamily="34" charset="0"/>
-                <a:ea typeface="Be Vietnam Pro" pitchFamily="34" charset="-122"/>
-                <a:cs typeface="Be Vietnam Pro" pitchFamily="34" charset="-120"/>
-              </a:rPr>
-              <a:t> rồi</a:t>
-            </a:r>
-            <a:r>
-              <a:rPr lang="en-US" sz="2678" dirty="0" spc="12" kern="0">
-                <a:solidFill>
-                  <a:srgbClr val="14161C"/>
-                </a:solidFill>
-                <a:latin typeface="Be Vietnam Pro" pitchFamily="34" charset="0"/>
-                <a:ea typeface="Be Vietnam Pro" pitchFamily="34" charset="-122"/>
-                <a:cs typeface="Be Vietnam Pro" pitchFamily="34" charset="-120"/>
-              </a:rPr>
-              <a:t> đối</a:t>
-            </a:r>
-            <a:r>
-              <a:rPr lang="en-US" sz="2678" dirty="0" spc="1" kern="0">
-                <a:solidFill>
-                  <a:srgbClr val="14161C"/>
-                </a:solidFill>
-                <a:latin typeface="Be Vietnam Pro" pitchFamily="34" charset="0"/>
-                <a:ea typeface="Be Vietnam Pro" pitchFamily="34" charset="-122"/>
-                <a:cs typeface="Be Vietnam Pro" pitchFamily="34" charset="-120"/>
-              </a:rPr>
-              <a:t> chiếu</a:t>
-            </a:r>
-            <a:r>
-              <a:rPr lang="en-US" sz="2678" dirty="0" spc="-13" kern="0">
-                <a:solidFill>
-                  <a:srgbClr val="14161C"/>
-                </a:solidFill>
-                <a:latin typeface="Be Vietnam Pro" pitchFamily="34" charset="0"/>
-                <a:ea typeface="Be Vietnam Pro" pitchFamily="34" charset="-122"/>
-                <a:cs typeface="Be Vietnam Pro" pitchFamily="34" charset="-120"/>
-              </a:rPr>
-              <a:t> với</a:t>
+              <a:t> quả</a:t>
+            </a:r>
+            <a:r>
+              <a:rPr lang="en-US" sz="2678" dirty="0" spc="-1" kern="0">
+                <a:solidFill>
+                  <a:srgbClr val="14161C"/>
+                </a:solidFill>
+                <a:latin typeface="Be Vietnam Pro" pitchFamily="34" charset="0"/>
+                <a:ea typeface="Be Vietnam Pro" pitchFamily="34" charset="-122"/>
+                <a:cs typeface="Be Vietnam Pro" pitchFamily="34" charset="-120"/>
+              </a:rPr>
+              <a:t> cùng</a:t>
             </a:r>
             <a:r>
               <a:rPr lang="en-US" sz="2678" dirty="0" spc="-15" kern="0">
@@ -4170,7 +4034,7 @@
               <a:buNone/>
             </a:pPr>
             <a:r>
-              <a:rPr lang="en-US" sz="1800" b="1" spc="202" kern="0" dirty="0">
+              <a:rPr lang="en-US" sz="1800" b="1" spc="225" kern="0" dirty="0">
                 <a:solidFill>
                   <a:srgbClr val="6B6A66"/>
                 </a:solidFill>
@@ -4178,10 +4042,10 @@
                 <a:ea typeface="Be Vietnam Pro" pitchFamily="34" charset="-122"/>
                 <a:cs typeface="Be Vietnam Pro" pitchFamily="34" charset="-120"/>
               </a:rPr>
-              <a:t>CÂU</a:t>
-            </a:r>
-            <a:r>
-              <a:rPr lang="en-US" sz="1800" b="1" spc="225" kern="0" dirty="0">
+              <a:t>HAI</a:t>
+            </a:r>
+            <a:r>
+              <a:rPr lang="en-US" sz="1800" b="1" spc="192" kern="0" dirty="0">
                 <a:solidFill>
                   <a:srgbClr val="6B6A66"/>
                 </a:solidFill>
@@ -4189,10 +4053,10 @@
                 <a:ea typeface="Be Vietnam Pro" pitchFamily="34" charset="-122"/>
                 <a:cs typeface="Be Vietnam Pro" pitchFamily="34" charset="-120"/>
               </a:rPr>
-              <a:t> NÓI</a:t>
-            </a:r>
-            <a:r>
-              <a:rPr lang="en-US" sz="1800" b="1" spc="226" kern="0" dirty="0">
+              <a:t> LOẠI</a:t>
+            </a:r>
+            <a:r>
+              <a:rPr lang="en-US" sz="1800" b="1" spc="222" kern="0" dirty="0">
                 <a:solidFill>
                   <a:srgbClr val="6B6A66"/>
                 </a:solidFill>
@@ -4200,18 +4064,7 @@
                 <a:ea typeface="Be Vietnam Pro" pitchFamily="34" charset="-122"/>
                 <a:cs typeface="Be Vietnam Pro" pitchFamily="34" charset="-120"/>
               </a:rPr>
-              <a:t> MỞ</a:t>
-            </a:r>
-            <a:r>
-              <a:rPr lang="en-US" sz="1800" b="1" spc="207" kern="0" dirty="0">
-                <a:solidFill>
-                  <a:srgbClr val="6B6A66"/>
-                </a:solidFill>
-                <a:latin typeface="Be Vietnam Pro" pitchFamily="34" charset="0"/>
-                <a:ea typeface="Be Vietnam Pro" pitchFamily="34" charset="-122"/>
-                <a:cs typeface="Be Vietnam Pro" pitchFamily="34" charset="-120"/>
-              </a:rPr>
-              <a:t> ĐẦU</a:t>
+              <a:t> VIỆC</a:t>
             </a:r>
             <a:endParaRPr lang="en-US" sz="1800" dirty="0"/>
           </a:p>
@@ -4314,7 +4167,7 @@
               <a:buNone/>
             </a:pPr>
             <a:r>
-              <a:rPr lang="en-US" sz="6600" dirty="0" spc="-3" kern="0">
+              <a:rPr lang="en-US" sz="6600" dirty="0" spc="-5" kern="0">
                 <a:solidFill>
                   <a:srgbClr val="1F3FD1"/>
                 </a:solidFill>
@@ -4322,7 +4175,7 @@
                 <a:ea typeface="Bricolage Grotesque ExtraBold" pitchFamily="34" charset="-122"/>
                 <a:cs typeface="Bricolage Grotesque ExtraBold" pitchFamily="34" charset="-120"/>
               </a:rPr>
-              <a:t>dealing</a:t>
+              <a:t>việc</a:t>
             </a:r>
             <a:r>
               <a:rPr lang="en-US" sz="6600" dirty="0" spc="-1" kern="0">
@@ -4333,7 +4186,7 @@
                 <a:ea typeface="Bricolage Grotesque ExtraBold" pitchFamily="34" charset="-122"/>
                 <a:cs typeface="Bricolage Grotesque ExtraBold" pitchFamily="34" charset="-120"/>
               </a:rPr>
-              <a:t> with</a:t>
+              <a:t> chờ</a:t>
             </a:r>
             <a:endParaRPr lang="en-US" sz="6600" dirty="0"/>
           </a:p>
@@ -4364,7 +4217,7 @@
               <a:buNone/>
             </a:pPr>
             <a:r>
-              <a:rPr lang="en-US" sz="2700" dirty="0" spc="-1" kern="0">
+              <a:rPr lang="en-US" sz="2700" dirty="0" spc="1" kern="0">
                 <a:solidFill>
                   <a:srgbClr val="14161C"/>
                 </a:solidFill>
@@ -4372,10 +4225,10 @@
                 <a:ea typeface="Be Vietnam Pro SemiBold" pitchFamily="34" charset="-122"/>
                 <a:cs typeface="Be Vietnam Pro SemiBold" pitchFamily="34" charset="-120"/>
               </a:rPr>
-              <a:t>xử</a:t>
-            </a:r>
-            <a:r>
-              <a:rPr lang="en-US" sz="2700" dirty="0" spc="-3" kern="0">
+              <a:t>2,00</a:t>
+            </a:r>
+            <a:r>
+              <a:rPr lang="en-US" sz="2700" dirty="0" spc="-10" kern="0">
                 <a:solidFill>
                   <a:srgbClr val="14161C"/>
                 </a:solidFill>
@@ -4383,10 +4236,10 @@
                 <a:ea typeface="Be Vietnam Pro SemiBold" pitchFamily="34" charset="-122"/>
                 <a:cs typeface="Be Vietnam Pro SemiBold" pitchFamily="34" charset="-120"/>
               </a:rPr>
-              <a:t> lý</a:t>
-            </a:r>
-            <a:r>
-              <a:rPr lang="en-US" sz="2700" dirty="0" spc="-1" kern="0">
+              <a:t> giây</a:t>
+            </a:r>
+            <a:r>
+              <a:rPr lang="en-US" sz="2700" dirty="0" spc="-3" kern="0">
                 <a:solidFill>
                   <a:srgbClr val="14161C"/>
                 </a:solidFill>
@@ -4394,10 +4247,10 @@
                 <a:ea typeface="Be Vietnam Pro SemiBold" pitchFamily="34" charset="-122"/>
                 <a:cs typeface="Be Vietnam Pro SemiBold" pitchFamily="34" charset="-120"/>
               </a:rPr>
-              <a:t> nhiều</a:t>
-            </a:r>
-            <a:r>
-              <a:rPr lang="en-US" sz="2700" dirty="0" spc="-5" kern="0">
+              <a:t> xuống</a:t>
+            </a:r>
+            <a:r>
+              <a:rPr lang="en-US" sz="2700" dirty="0" spc="0" kern="0">
                 <a:solidFill>
                   <a:srgbClr val="14161C"/>
                 </a:solidFill>
@@ -4405,10 +4258,10 @@
                 <a:ea typeface="Be Vietnam Pro SemiBold" pitchFamily="34" charset="-122"/>
                 <a:cs typeface="Be Vietnam Pro SemiBold" pitchFamily="34" charset="-120"/>
               </a:rPr>
-              <a:t> việc</a:t>
-            </a:r>
-            <a:r>
-              <a:rPr lang="en-US" sz="2700" dirty="0" spc="-1" kern="0">
+              <a:t> 0,50</a:t>
+            </a:r>
+            <a:r>
+              <a:rPr lang="en-US" sz="2700" dirty="0" spc="-10" kern="0">
                 <a:solidFill>
                   <a:srgbClr val="14161C"/>
                 </a:solidFill>
@@ -4416,18 +4269,7 @@
                 <a:ea typeface="Be Vietnam Pro SemiBold" pitchFamily="34" charset="-122"/>
                 <a:cs typeface="Be Vietnam Pro SemiBold" pitchFamily="34" charset="-120"/>
               </a:rPr>
-              <a:t> cùng</a:t>
-            </a:r>
-            <a:r>
-              <a:rPr lang="en-US" sz="2700" dirty="0" spc="-2" kern="0">
-                <a:solidFill>
-                  <a:srgbClr val="14161C"/>
-                </a:solidFill>
-                <a:latin typeface="Be Vietnam Pro SemiBold" pitchFamily="34" charset="0"/>
-                <a:ea typeface="Be Vietnam Pro SemiBold" pitchFamily="34" charset="-122"/>
-                <a:cs typeface="Be Vietnam Pro SemiBold" pitchFamily="34" charset="-120"/>
-              </a:rPr>
-              <a:t> lúc</a:t>
+              <a:t> giây</a:t>
             </a:r>
             <a:endParaRPr lang="en-US" sz="2700" dirty="0"/>
           </a:p>
@@ -4530,7 +4372,7 @@
               <a:buNone/>
             </a:pPr>
             <a:r>
-              <a:rPr lang="en-US" sz="6600" dirty="0" spc="-1" kern="0">
+              <a:rPr lang="en-US" sz="6600" dirty="0" spc="-2" kern="0">
                 <a:solidFill>
                   <a:srgbClr val="0F766E"/>
                 </a:solidFill>
@@ -4538,7 +4380,18 @@
                 <a:ea typeface="Bricolage Grotesque ExtraBold" pitchFamily="34" charset="-122"/>
                 <a:cs typeface="Bricolage Grotesque ExtraBold" pitchFamily="34" charset="-120"/>
               </a:rPr>
-              <a:t>doing</a:t>
+              <a:t>tính</a:t>
+            </a:r>
+            <a:r>
+              <a:rPr lang="en-US" sz="6600" dirty="0" spc="-30" kern="0">
+                <a:solidFill>
+                  <a:srgbClr val="0F766E"/>
+                </a:solidFill>
+                <a:latin typeface="Bricolage Grotesque ExtraBold" pitchFamily="34" charset="0"/>
+                <a:ea typeface="Bricolage Grotesque ExtraBold" pitchFamily="34" charset="-122"/>
+                <a:cs typeface="Bricolage Grotesque ExtraBold" pitchFamily="34" charset="-120"/>
+              </a:rPr>
+              <a:t> toán</a:t>
             </a:r>
             <a:endParaRPr lang="en-US" sz="6600" dirty="0"/>
           </a:p>
@@ -4569,7 +4422,7 @@
               <a:buNone/>
             </a:pPr>
             <a:r>
-              <a:rPr lang="en-US" sz="2700" dirty="0" spc="-3" kern="0">
+              <a:rPr lang="en-US" sz="2700" dirty="0" spc="-1" kern="0">
                 <a:solidFill>
                   <a:srgbClr val="14161C"/>
                 </a:solidFill>
@@ -4577,10 +4430,10 @@
                 <a:ea typeface="Be Vietnam Pro SemiBold" pitchFamily="34" charset="-122"/>
                 <a:cs typeface="Be Vietnam Pro SemiBold" pitchFamily="34" charset="-120"/>
               </a:rPr>
-              <a:t>làm</a:t>
-            </a:r>
-            <a:r>
-              <a:rPr lang="en-US" sz="2700" dirty="0" spc="-1" kern="0">
+              <a:t>0,6</a:t>
+            </a:r>
+            <a:r>
+              <a:rPr lang="en-US" sz="2700" dirty="0" spc="-9" kern="0">
                 <a:solidFill>
                   <a:srgbClr val="14161C"/>
                 </a:solidFill>
@@ -4588,10 +4441,10 @@
                 <a:ea typeface="Be Vietnam Pro SemiBold" pitchFamily="34" charset="-122"/>
                 <a:cs typeface="Be Vietnam Pro SemiBold" pitchFamily="34" charset="-120"/>
               </a:rPr>
-              <a:t> nhiều</a:t>
-            </a:r>
-            <a:r>
-              <a:rPr lang="en-US" sz="2700" dirty="0" spc="-5" kern="0">
+              <a:t> giây</a:t>
+            </a:r>
+            <a:r>
+              <a:rPr lang="en-US" sz="2700" dirty="0" spc="-3" kern="0">
                 <a:solidFill>
                   <a:srgbClr val="14161C"/>
                 </a:solidFill>
@@ -4599,7 +4452,7 @@
                 <a:ea typeface="Be Vietnam Pro SemiBold" pitchFamily="34" charset="-122"/>
                 <a:cs typeface="Be Vietnam Pro SemiBold" pitchFamily="34" charset="-120"/>
               </a:rPr>
-              <a:t> việc</a:t>
+              <a:t> xuống</a:t>
             </a:r>
             <a:r>
               <a:rPr lang="en-US" sz="2700" dirty="0" spc="-2" kern="0">
@@ -4610,10 +4463,10 @@
                 <a:ea typeface="Be Vietnam Pro SemiBold" pitchFamily="34" charset="-122"/>
                 <a:cs typeface="Be Vietnam Pro SemiBold" pitchFamily="34" charset="-120"/>
               </a:rPr>
-              <a:t> cùng</a:t>
-            </a:r>
-            <a:r>
-              <a:rPr lang="en-US" sz="2700" dirty="0" spc="-1" kern="0">
+              <a:t> 0,2</a:t>
+            </a:r>
+            <a:r>
+              <a:rPr lang="en-US" sz="2700" dirty="0" spc="6" kern="0">
                 <a:solidFill>
                   <a:srgbClr val="14161C"/>
                 </a:solidFill>
@@ -4621,7 +4474,18 @@
                 <a:ea typeface="Be Vietnam Pro SemiBold" pitchFamily="34" charset="-122"/>
                 <a:cs typeface="Be Vietnam Pro SemiBold" pitchFamily="34" charset="-120"/>
               </a:rPr>
-              <a:t> lúc</a:t>
+              <a:t> đến</a:t>
+            </a:r>
+            <a:r>
+              <a:rPr lang="en-US" sz="2700" dirty="0" spc="-2" kern="0">
+                <a:solidFill>
+                  <a:srgbClr val="14161C"/>
+                </a:solidFill>
+                <a:latin typeface="Be Vietnam Pro SemiBold" pitchFamily="34" charset="0"/>
+                <a:ea typeface="Be Vietnam Pro SemiBold" pitchFamily="34" charset="-122"/>
+                <a:cs typeface="Be Vietnam Pro SemiBold" pitchFamily="34" charset="-120"/>
+              </a:rPr>
+              <a:t> 0,3</a:t>
             </a:r>
             <a:endParaRPr lang="en-US" sz="2700" dirty="0"/>
           </a:p>
@@ -4652,7 +4516,7 @@
               <a:buNone/>
             </a:pPr>
             <a:r>
-              <a:rPr lang="en-US" sz="2100" dirty="0" spc="1" kern="0">
+              <a:rPr lang="en-US" sz="2100" dirty="0" spc="-5" kern="0">
                 <a:solidFill>
                   <a:srgbClr val="6B6A66"/>
                 </a:solidFill>
@@ -4660,7 +4524,29 @@
                 <a:ea typeface="Be Vietnam Pro" pitchFamily="34" charset="-122"/>
                 <a:cs typeface="Be Vietnam Pro" pitchFamily="34" charset="-120"/>
               </a:rPr>
-              <a:t>Chung</a:t>
+              <a:t>Số</a:t>
+            </a:r>
+            <a:r>
+              <a:rPr lang="en-US" sz="2100" dirty="0" spc="13" kern="0">
+                <a:solidFill>
+                  <a:srgbClr val="6B6A66"/>
+                </a:solidFill>
+                <a:latin typeface="Be Vietnam Pro" pitchFamily="34" charset="0"/>
+                <a:ea typeface="Be Vietnam Pro" pitchFamily="34" charset="-122"/>
+                <a:cs typeface="Be Vietnam Pro" pitchFamily="34" charset="-120"/>
+              </a:rPr>
+              <a:t> đo</a:t>
+            </a:r>
+            <a:r>
+              <a:rPr lang="en-US" sz="2100" dirty="0" spc="-1" kern="0">
+                <a:solidFill>
+                  <a:srgbClr val="6B6A66"/>
+                </a:solidFill>
+                <a:latin typeface="Be Vietnam Pro" pitchFamily="34" charset="0"/>
+                <a:ea typeface="Be Vietnam Pro" pitchFamily="34" charset="-122"/>
+                <a:cs typeface="Be Vietnam Pro" pitchFamily="34" charset="-120"/>
+              </a:rPr>
+              <a:t> của</a:t>
             </a:r>
             <a:r>
               <a:rPr lang="en-US" sz="2100" dirty="0" spc="-8" kern="0">
@@ -4674,7 +4560,7 @@
               <a:t> một</a:t>
             </a:r>
             <a:r>
-              <a:rPr lang="en-US" sz="2100" dirty="0" spc="-11" kern="0">
+              <a:rPr lang="en-US" sz="2100" dirty="0" spc="-10" kern="0">
                 <a:solidFill>
                   <a:srgbClr val="6B6A66"/>
                 </a:solidFill>
@@ -4682,10 +4568,10 @@
                 <a:ea typeface="Be Vietnam Pro" pitchFamily="34" charset="-122"/>
                 <a:cs typeface="Be Vietnam Pro" pitchFamily="34" charset="-120"/>
               </a:rPr>
-              <a:t> vế:</a:t>
-            </a:r>
-            <a:r>
-              <a:rPr lang="en-US" sz="2100" dirty="0" spc="-5" kern="0">
+              <a:t> máy</a:t>
+            </a:r>
+            <a:r>
+              <a:rPr lang="en-US" sz="2100" dirty="0" spc="-6" kern="0">
                 <a:solidFill>
                   <a:srgbClr val="6B6A66"/>
                 </a:solidFill>
@@ -4693,10 +4579,10 @@
                 <a:ea typeface="Be Vietnam Pro" pitchFamily="34" charset="-122"/>
                 <a:cs typeface="Be Vietnam Pro" pitchFamily="34" charset="-120"/>
               </a:rPr>
-              <a:t> lots</a:t>
-            </a:r>
-            <a:r>
-              <a:rPr lang="en-US" sz="2100" dirty="0" spc="-3" kern="0">
+              <a:t> bốn</a:t>
+            </a:r>
+            <a:r>
+              <a:rPr lang="en-US" sz="2100" dirty="0" spc="-2" kern="0">
                 <a:solidFill>
                   <a:srgbClr val="6B6A66"/>
                 </a:solidFill>
@@ -4704,40 +4590,7 @@
                 <a:ea typeface="Be Vietnam Pro" pitchFamily="34" charset="-122"/>
                 <a:cs typeface="Be Vietnam Pro" pitchFamily="34" charset="-120"/>
               </a:rPr>
-              <a:t> of</a:t>
-            </a:r>
-            <a:r>
-              <a:rPr lang="en-US" sz="2100" dirty="0" spc="1" kern="0">
-                <a:solidFill>
-                  <a:srgbClr val="6B6A66"/>
-                </a:solidFill>
-                <a:latin typeface="Be Vietnam Pro" pitchFamily="34" charset="0"/>
-                <a:ea typeface="Be Vietnam Pro" pitchFamily="34" charset="-122"/>
-                <a:cs typeface="Be Vietnam Pro" pitchFamily="34" charset="-120"/>
-              </a:rPr>
-              <a:t> things</a:t>
-            </a:r>
-            <a:r>
-              <a:rPr lang="en-US" sz="2100" dirty="0" spc="-17" kern="0">
-                <a:solidFill>
-                  <a:srgbClr val="6B6A66"/>
-                </a:solidFill>
-                <a:latin typeface="Be Vietnam Pro" pitchFamily="34" charset="0"/>
-                <a:ea typeface="Be Vietnam Pro" pitchFamily="34" charset="-122"/>
-                <a:cs typeface="Be Vietnam Pro" pitchFamily="34" charset="-120"/>
-              </a:rPr>
-              <a:t> at</a:t>
-            </a:r>
-            <a:r>
-              <a:rPr lang="en-US" sz="2100" dirty="0" spc="-1" kern="0">
-                <a:solidFill>
-                  <a:srgbClr val="6B6A66"/>
-                </a:solidFill>
-                <a:latin typeface="Be Vietnam Pro" pitchFamily="34" charset="0"/>
-                <a:ea typeface="Be Vietnam Pro" pitchFamily="34" charset="-122"/>
-                <a:cs typeface="Be Vietnam Pro" pitchFamily="34" charset="-120"/>
-              </a:rPr>
-              <a:t> once</a:t>
+              <a:t> lõi</a:t>
             </a:r>
             <a:endParaRPr lang="en-US" sz="2100" dirty="0"/>
           </a:p>
@@ -5240,7 +5093,7 @@
                 <a:ea typeface="Be Vietnam Pro" pitchFamily="34" charset="-122"/>
                 <a:cs typeface="Be Vietnam Pro" pitchFamily="34" charset="-120"/>
               </a:rPr>
-              <a:t> DEALING WITH</a:t>
+              <a:t> ĐỒNG THỜI</a:t>
             </a:r>
             <a:endParaRPr lang="en-US" sz="1950" dirty="0"/>
           </a:p>
@@ -5385,26 +5238,15 @@
               <a:buNone/>
             </a:pPr>
             <a:r>
-              <a:rPr lang="en-US" sz="2850" dirty="0" spc="-2" kern="0">
-                <a:solidFill>
-                  <a:srgbClr val="F3EEE3"/>
-                </a:solidFill>
-                <a:latin typeface="Be Vietnam Pro" pitchFamily="34" charset="0"/>
-                <a:ea typeface="Be Vietnam Pro" pitchFamily="34" charset="-122"/>
-                <a:cs typeface="Be Vietnam Pro" pitchFamily="34" charset="-120"/>
-              </a:rPr>
-              <a:t>Cấu</a:t>
-            </a:r>
-            <a:r>
-              <a:rPr lang="en-US" sz="2850" dirty="0" spc="0" kern="0">
-                <a:solidFill>
-                  <a:srgbClr val="F3EEE3"/>
-                </a:solidFill>
-                <a:latin typeface="Be Vietnam Pro" pitchFamily="34" charset="0"/>
-                <a:ea typeface="Be Vietnam Pro" pitchFamily="34" charset="-122"/>
-                <a:cs typeface="Be Vietnam Pro" pitchFamily="34" charset="-120"/>
-              </a:rPr>
-              <a:t> trúc</a:t>
+              <a:rPr lang="en-US" sz="2850" dirty="0" spc="25" kern="0">
+                <a:solidFill>
+                  <a:srgbClr val="F3EEE3"/>
+                </a:solidFill>
+                <a:latin typeface="Be Vietnam Pro" pitchFamily="34" charset="0"/>
+                <a:ea typeface="Be Vietnam Pro" pitchFamily="34" charset="-122"/>
+                <a:cs typeface="Be Vietnam Pro" pitchFamily="34" charset="-120"/>
+              </a:rPr>
+              <a:t>Dựng</a:t>
             </a:r>
             <a:r>
               <a:rPr lang="en-US" sz="2850" dirty="0" spc="6" kern="0">
@@ -5429,50 +5271,6 @@
               <a:t> trình</a:t>
             </a:r>
             <a:r>
-              <a:rPr lang="en-US" sz="2850" dirty="0" spc="19" kern="0">
-                <a:solidFill>
-                  <a:srgbClr val="F3EEE3"/>
-                </a:solidFill>
-                <a:latin typeface="Be Vietnam Pro" pitchFamily="34" charset="0"/>
-                <a:ea typeface="Be Vietnam Pro" pitchFamily="34" charset="-122"/>
-                <a:cs typeface="Be Vietnam Pro" pitchFamily="34" charset="-120"/>
-              </a:rPr>
-              <a:t> để</a:t>
-            </a:r>
-            <a:r>
-              <a:rPr lang="en-US" sz="2850" dirty="0" spc="3" kern="0">
-                <a:solidFill>
-                  <a:srgbClr val="F3EEE3"/>
-                </a:solidFill>
-                <a:latin typeface="Be Vietnam Pro" pitchFamily="34" charset="0"/>
-                <a:ea typeface="Be Vietnam Pro" pitchFamily="34" charset="-122"/>
-                <a:cs typeface="Be Vietnam Pro" pitchFamily="34" charset="-120"/>
-              </a:rPr>
-              <a:t> xử</a:t>
-            </a:r>
-            <a:r>
-              <a:rPr lang="en-US" sz="2850" dirty="0" spc="2" kern="0">
-                <a:solidFill>
-                  <a:srgbClr val="F3EEE3"/>
-                </a:solidFill>
-                <a:latin typeface="Be Vietnam Pro" pitchFamily="34" charset="0"/>
-                <a:ea typeface="Be Vietnam Pro" pitchFamily="34" charset="-122"/>
-                <a:cs typeface="Be Vietnam Pro" pitchFamily="34" charset="-120"/>
-              </a:rPr>
-              <a:t> lý</a:t>
-            </a:r>
-            <a:r>
-              <a:rPr lang="en-US" sz="2850" dirty="0" spc="0" kern="0">
-                <a:solidFill>
-                  <a:srgbClr val="F3EEE3"/>
-                </a:solidFill>
-                <a:latin typeface="Be Vietnam Pro" pitchFamily="34" charset="0"/>
-                <a:ea typeface="Be Vietnam Pro" pitchFamily="34" charset="-122"/>
-                <a:cs typeface="Be Vietnam Pro" pitchFamily="34" charset="-120"/>
-              </a:rPr>
-              <a:t> nhiều</a:t>
-            </a:r>
-            <a:r>
               <a:rPr lang="en-US" sz="2850" dirty="0" spc="-1" kern="0">
                 <a:solidFill>
                   <a:srgbClr val="F3EEE3"/>
@@ -5481,10 +5279,10 @@
                 <a:ea typeface="Be Vietnam Pro" pitchFamily="34" charset="-122"/>
                 <a:cs typeface="Be Vietnam Pro" pitchFamily="34" charset="-120"/>
               </a:rPr>
-              <a:t> việc,</a:t>
-            </a:r>
-            <a:r>
-              <a:rPr lang="en-US" sz="2850" dirty="0" spc="-8" kern="0">
+              <a:t> từ các thành phần</a:t>
+            </a:r>
+            <a:r>
+              <a:rPr lang="en-US" sz="2850" dirty="0" spc="-9" kern="0">
                 <a:solidFill>
                   <a:srgbClr val="F3EEE3"/>
                 </a:solidFill>
@@ -5495,26 +5293,15 @@
               <a:t> chạy</a:t>
             </a:r>
             <a:r>
-              <a:rPr lang="en-US" sz="2850" dirty="0" spc="-2" kern="0">
-                <a:solidFill>
-                  <a:srgbClr val="F3EEE3"/>
-                </a:solidFill>
-                <a:latin typeface="Be Vietnam Pro" pitchFamily="34" charset="0"/>
-                <a:ea typeface="Be Vietnam Pro" pitchFamily="34" charset="-122"/>
-                <a:cs typeface="Be Vietnam Pro" pitchFamily="34" charset="-120"/>
-              </a:rPr>
-              <a:t> chồng</a:t>
-            </a:r>
-            <a:r>
-              <a:rPr lang="en-US" sz="2850" dirty="0" spc="-1" kern="0">
-                <a:solidFill>
-                  <a:srgbClr val="F3EEE3"/>
-                </a:solidFill>
-                <a:latin typeface="Be Vietnam Pro" pitchFamily="34" charset="0"/>
-                <a:ea typeface="Be Vietnam Pro" pitchFamily="34" charset="-122"/>
-                <a:cs typeface="Be Vietnam Pro" pitchFamily="34" charset="-120"/>
-              </a:rPr>
-              <a:t> thời</a:t>
+              <a:rPr lang="en-US" sz="2850" dirty="0" spc="10" kern="0">
+                <a:solidFill>
+                  <a:srgbClr val="F3EEE3"/>
+                </a:solidFill>
+                <a:latin typeface="Be Vietnam Pro" pitchFamily="34" charset="0"/>
+                <a:ea typeface="Be Vietnam Pro" pitchFamily="34" charset="-122"/>
+                <a:cs typeface="Be Vietnam Pro" pitchFamily="34" charset="-120"/>
+              </a:rPr>
+              <a:t> độc</a:t>
             </a:r>
             <a:r>
               <a:rPr lang="en-US" sz="2850" dirty="0" spc="1" kern="0">
@@ -5525,7 +5312,7 @@
                 <a:ea typeface="Be Vietnam Pro" pitchFamily="34" charset="-122"/>
                 <a:cs typeface="Be Vietnam Pro" pitchFamily="34" charset="-120"/>
               </a:rPr>
-              <a:t> gian nhau.</a:t>
+              <a:t> lập.</a:t>
             </a:r>
             <a:endParaRPr lang="en-US" sz="2850" dirty="0"/>
           </a:p>
@@ -5718,37 +5505,26 @@
               <a:buNone/>
             </a:pPr>
             <a:r>
-              <a:rPr lang="en-US" sz="2550" dirty="0" spc="-9" kern="0">
-                <a:solidFill>
-                  <a:srgbClr val="F3EEE3"/>
-                </a:solidFill>
-                <a:latin typeface="Be Vietnam Pro" pitchFamily="34" charset="0"/>
-                <a:ea typeface="Be Vietnam Pro" pitchFamily="34" charset="-122"/>
-                <a:cs typeface="Be Vietnam Pro" pitchFamily="34" charset="-120"/>
-              </a:rPr>
-              <a:t>Chạy</a:t>
-            </a:r>
-            <a:r>
-              <a:rPr lang="en-US" sz="2550" dirty="0" spc="0" kern="0">
-                <a:solidFill>
-                  <a:srgbClr val="F3EEE3"/>
-                </a:solidFill>
-                <a:latin typeface="Be Vietnam Pro" pitchFamily="34" charset="0"/>
-                <a:ea typeface="Be Vietnam Pro" pitchFamily="34" charset="-122"/>
-                <a:cs typeface="Be Vietnam Pro" pitchFamily="34" charset="-120"/>
-              </a:rPr>
-              <a:t> chồng thời</a:t>
-            </a:r>
-            <a:r>
-              <a:rPr lang="en-US" sz="2550" dirty="0" spc="-1" kern="0">
-                <a:solidFill>
-                  <a:srgbClr val="F3EEE3"/>
-                </a:solidFill>
-                <a:latin typeface="Be Vietnam Pro" pitchFamily="34" charset="0"/>
-                <a:ea typeface="Be Vietnam Pro" pitchFamily="34" charset="-122"/>
-                <a:cs typeface="Be Vietnam Pro" pitchFamily="34" charset="-120"/>
-              </a:rPr>
-              <a:t> gian,</a:t>
+              <a:rPr lang="en-US" sz="2550" dirty="0" spc="2" kern="0">
+                <a:solidFill>
+                  <a:srgbClr val="F3EEE3"/>
+                </a:solidFill>
+                <a:latin typeface="Be Vietnam Pro" pitchFamily="34" charset="0"/>
+                <a:ea typeface="Be Vietnam Pro" pitchFamily="34" charset="-122"/>
+                <a:cs typeface="Be Vietnam Pro" pitchFamily="34" charset="-120"/>
+              </a:rPr>
+              <a:t>Bốn</a:t>
+            </a:r>
+            <a:r>
+              <a:rPr lang="en-US" sz="2550" dirty="0" spc="-4" kern="0">
+                <a:solidFill>
+                  <a:srgbClr val="F3EEE3"/>
+                </a:solidFill>
+                <a:latin typeface="Be Vietnam Pro" pitchFamily="34" charset="0"/>
+                <a:ea typeface="Be Vietnam Pro" pitchFamily="34" charset="-122"/>
+                <a:cs typeface="Be Vietnam Pro" pitchFamily="34" charset="-120"/>
+              </a:rPr>
+              <a:t> việc</a:t>
             </a:r>
             <a:r>
               <a:rPr lang="en-US" sz="2550" dirty="0" spc="1" kern="0">
@@ -5759,51 +5535,7 @@
                 <a:ea typeface="Be Vietnam Pro" pitchFamily="34" charset="-122"/>
                 <a:cs typeface="Be Vietnam Pro" pitchFamily="34" charset="-120"/>
               </a:rPr>
-              <a:t> không</a:t>
-            </a:r>
-            <a:r>
-              <a:rPr lang="en-US" sz="2550" dirty="0" spc="-10" kern="0">
-                <a:solidFill>
-                  <a:srgbClr val="F3EEE3"/>
-                </a:solidFill>
-                <a:latin typeface="Be Vietnam Pro" pitchFamily="34" charset="0"/>
-                <a:ea typeface="Be Vietnam Pro" pitchFamily="34" charset="-122"/>
-                <a:cs typeface="Be Vietnam Pro" pitchFamily="34" charset="-120"/>
-              </a:rPr>
-              <a:t> nhất</a:t>
-            </a:r>
-            <a:r>
-              <a:rPr lang="en-US" sz="2550" dirty="0" spc="-3" kern="0">
-                <a:solidFill>
-                  <a:srgbClr val="F3EEE3"/>
-                </a:solidFill>
-                <a:latin typeface="Be Vietnam Pro" pitchFamily="34" charset="0"/>
-                <a:ea typeface="Be Vietnam Pro" pitchFamily="34" charset="-122"/>
-                <a:cs typeface="Be Vietnam Pro" pitchFamily="34" charset="-120"/>
-              </a:rPr>
-              <a:t> thiết</a:t>
-            </a:r>
-            <a:r>
-              <a:rPr lang="en-US" sz="2550" dirty="0" spc="-1" kern="0">
-                <a:solidFill>
-                  <a:srgbClr val="F3EEE3"/>
-                </a:solidFill>
-                <a:latin typeface="Be Vietnam Pro" pitchFamily="34" charset="0"/>
-                <a:ea typeface="Be Vietnam Pro" pitchFamily="34" charset="-122"/>
-                <a:cs typeface="Be Vietnam Pro" pitchFamily="34" charset="-120"/>
-              </a:rPr>
-              <a:t> cùng</a:t>
-            </a:r>
-            <a:r>
-              <a:rPr lang="en-US" sz="2550" dirty="0" spc="-5" kern="0">
-                <a:solidFill>
-                  <a:srgbClr val="F3EEE3"/>
-                </a:solidFill>
-                <a:latin typeface="Be Vietnam Pro" pitchFamily="34" charset="0"/>
-                <a:ea typeface="Be Vietnam Pro" pitchFamily="34" charset="-122"/>
-                <a:cs typeface="Be Vietnam Pro" pitchFamily="34" charset="-120"/>
-              </a:rPr>
-              <a:t> một</a:t>
+              <a:t> chờ:</a:t>
             </a:r>
             <a:r>
               <a:rPr lang="en-US" sz="2550" dirty="0" spc="-2" kern="0">
@@ -5814,18 +5546,51 @@
                 <a:ea typeface="Be Vietnam Pro" pitchFamily="34" charset="-122"/>
                 <a:cs typeface="Be Vietnam Pro" pitchFamily="34" charset="-120"/>
               </a:rPr>
-              <a:t> khoảnh</a:t>
-            </a:r>
-            <a:r>
-              <a:rPr lang="en-US" sz="2550" dirty="0" spc="2" kern="0">
-                <a:solidFill>
-                  <a:srgbClr val="F3EEE3"/>
-                </a:solidFill>
-                <a:latin typeface="Be Vietnam Pro" pitchFamily="34" charset="0"/>
-                <a:ea typeface="Be Vietnam Pro" pitchFamily="34" charset="-122"/>
-                <a:cs typeface="Be Vietnam Pro" pitchFamily="34" charset="-120"/>
-              </a:rPr>
-              <a:t> khắc.</a:t>
+              <a:t> 2,00</a:t>
+            </a:r>
+            <a:r>
+              <a:rPr lang="en-US" sz="2550" dirty="0" spc="-7" kern="0">
+                <a:solidFill>
+                  <a:srgbClr val="F3EEE3"/>
+                </a:solidFill>
+                <a:latin typeface="Be Vietnam Pro" pitchFamily="34" charset="0"/>
+                <a:ea typeface="Be Vietnam Pro" pitchFamily="34" charset="-122"/>
+                <a:cs typeface="Be Vietnam Pro" pitchFamily="34" charset="-120"/>
+              </a:rPr>
+              <a:t> giây</a:t>
+            </a:r>
+            <a:r>
+              <a:rPr lang="en-US" sz="2550" dirty="0" spc="1" kern="0">
+                <a:solidFill>
+                  <a:srgbClr val="F3EEE3"/>
+                </a:solidFill>
+                <a:latin typeface="Be Vietnam Pro" pitchFamily="34" charset="0"/>
+                <a:ea typeface="Be Vietnam Pro" pitchFamily="34" charset="-122"/>
+                <a:cs typeface="Be Vietnam Pro" pitchFamily="34" charset="-120"/>
+              </a:rPr>
+              <a:t> xuống</a:t>
+            </a:r>
+            <a:r>
+              <a:rPr lang="en-US" sz="2550" dirty="0" spc="-2" kern="0">
+                <a:solidFill>
+                  <a:srgbClr val="F3EEE3"/>
+                </a:solidFill>
+                <a:latin typeface="Be Vietnam Pro" pitchFamily="34" charset="0"/>
+                <a:ea typeface="Be Vietnam Pro" pitchFamily="34" charset="-122"/>
+                <a:cs typeface="Be Vietnam Pro" pitchFamily="34" charset="-120"/>
+              </a:rPr>
+              <a:t> 0,50</a:t>
+            </a:r>
+            <a:r>
+              <a:rPr lang="en-US" sz="2550" dirty="0" spc="-6" kern="0">
+                <a:solidFill>
+                  <a:srgbClr val="F3EEE3"/>
+                </a:solidFill>
+                <a:latin typeface="Be Vietnam Pro" pitchFamily="34" charset="0"/>
+                <a:ea typeface="Be Vietnam Pro" pitchFamily="34" charset="-122"/>
+                <a:cs typeface="Be Vietnam Pro" pitchFamily="34" charset="-120"/>
+              </a:rPr>
+              <a:t> giây.</a:t>
             </a:r>
             <a:endParaRPr lang="en-US" sz="2550" dirty="0"/>
           </a:p>
@@ -7471,7 +7236,7 @@
               <a:t> ·</a:t>
             </a:r>
             <a:r>
-              <a:rPr lang="en-US" sz="1950" b="1" spc="226" kern="0" dirty="0">
+              <a:rPr lang="en-US" sz="1950" b="1" spc="230" kern="0" dirty="0">
                 <a:solidFill>
                   <a:srgbClr val="0F766E"/>
                 </a:solidFill>
@@ -7479,7 +7244,7 @@
                 <a:ea typeface="Be Vietnam Pro" pitchFamily="34" charset="-122"/>
                 <a:cs typeface="Be Vietnam Pro" pitchFamily="34" charset="-120"/>
               </a:rPr>
-              <a:t> DOING</a:t>
+              <a:t> SONG SONG</a:t>
             </a:r>
             <a:endParaRPr lang="en-US" sz="1950" dirty="0"/>
           </a:p>
@@ -7624,15 +7389,48 @@
               <a:buNone/>
             </a:pPr>
             <a:r>
-              <a:rPr lang="en-US" sz="2850" dirty="0" spc="-12" kern="0">
-                <a:solidFill>
-                  <a:srgbClr val="14161C"/>
-                </a:solidFill>
-                <a:latin typeface="Be Vietnam Pro" pitchFamily="34" charset="0"/>
-                <a:ea typeface="Be Vietnam Pro" pitchFamily="34" charset="-122"/>
-                <a:cs typeface="Be Vietnam Pro" pitchFamily="34" charset="-120"/>
-              </a:rPr>
-              <a:t>Chạy</a:t>
+              <a:rPr lang="en-US" sz="2850" dirty="0" spc="-1" kern="0">
+                <a:solidFill>
+                  <a:srgbClr val="14161C"/>
+                </a:solidFill>
+                <a:latin typeface="Be Vietnam Pro" pitchFamily="34" charset="0"/>
+                <a:ea typeface="Be Vietnam Pro" pitchFamily="34" charset="-122"/>
+                <a:cs typeface="Be Vietnam Pro" pitchFamily="34" charset="-120"/>
+              </a:rPr>
+              <a:t>Tính</a:t>
+            </a:r>
+            <a:r>
+              <a:rPr lang="en-US" sz="2850" dirty="0" spc="-14" kern="0">
+                <a:solidFill>
+                  <a:srgbClr val="14161C"/>
+                </a:solidFill>
+                <a:latin typeface="Be Vietnam Pro" pitchFamily="34" charset="0"/>
+                <a:ea typeface="Be Vietnam Pro" pitchFamily="34" charset="-122"/>
+                <a:cs typeface="Be Vietnam Pro" pitchFamily="34" charset="-120"/>
+              </a:rPr>
+              <a:t> toán</a:t>
+            </a:r>
+            <a:r>
+              <a:rPr lang="en-US" sz="2850" dirty="0" spc="-6" kern="0">
+                <a:solidFill>
+                  <a:srgbClr val="14161C"/>
+                </a:solidFill>
+                <a:latin typeface="Be Vietnam Pro" pitchFamily="34" charset="0"/>
+                <a:ea typeface="Be Vietnam Pro" pitchFamily="34" charset="-122"/>
+                <a:cs typeface="Be Vietnam Pro" pitchFamily="34" charset="-120"/>
+              </a:rPr>
+              <a:t> song song</a:t>
+            </a:r>
+            <a:r>
+              <a:rPr lang="en-US" sz="2850" dirty="0" spc="-23" kern="0">
+                <a:solidFill>
+                  <a:srgbClr val="14161C"/>
+                </a:solidFill>
+                <a:latin typeface="Be Vietnam Pro" pitchFamily="34" charset="0"/>
+                <a:ea typeface="Be Vietnam Pro" pitchFamily="34" charset="-122"/>
+                <a:cs typeface="Be Vietnam Pro" pitchFamily="34" charset="-120"/>
+              </a:rPr>
+              <a:t> trên</a:t>
             </a:r>
             <a:r>
               <a:rPr lang="en-US" sz="2850" dirty="0" spc="0" kern="0">
@@ -7646,61 +7444,6 @@
               <a:t> nhiều</a:t>
             </a:r>
             <a:r>
-              <a:rPr lang="en-US" sz="2850" dirty="0" spc="-1" kern="0">
-                <a:solidFill>
-                  <a:srgbClr val="14161C"/>
-                </a:solidFill>
-                <a:latin typeface="Be Vietnam Pro" pitchFamily="34" charset="0"/>
-                <a:ea typeface="Be Vietnam Pro" pitchFamily="34" charset="-122"/>
-                <a:cs typeface="Be Vietnam Pro" pitchFamily="34" charset="-120"/>
-              </a:rPr>
-              <a:t> phép tính</a:t>
-            </a:r>
-            <a:r>
-              <a:rPr lang="en-US" sz="2850" dirty="0" spc="-2" kern="0">
-                <a:solidFill>
-                  <a:srgbClr val="14161C"/>
-                </a:solidFill>
-                <a:latin typeface="Be Vietnam Pro" pitchFamily="34" charset="0"/>
-                <a:ea typeface="Be Vietnam Pro" pitchFamily="34" charset="-122"/>
-                <a:cs typeface="Be Vietnam Pro" pitchFamily="34" charset="-120"/>
-              </a:rPr>
-              <a:t> cùng</a:t>
-            </a:r>
-            <a:r>
-              <a:rPr lang="en-US" sz="2850" dirty="0" spc="-10" kern="0">
-                <a:solidFill>
-                  <a:srgbClr val="14161C"/>
-                </a:solidFill>
-                <a:latin typeface="Be Vietnam Pro" pitchFamily="34" charset="0"/>
-                <a:ea typeface="Be Vietnam Pro" pitchFamily="34" charset="-122"/>
-                <a:cs typeface="Be Vietnam Pro" pitchFamily="34" charset="-120"/>
-              </a:rPr>
-              <a:t> một</a:t>
-            </a:r>
-            <a:r>
-              <a:rPr lang="en-US" sz="2850" dirty="0" spc="0" kern="0">
-                <a:solidFill>
-                  <a:srgbClr val="14161C"/>
-                </a:solidFill>
-                <a:latin typeface="Be Vietnam Pro" pitchFamily="34" charset="0"/>
-                <a:ea typeface="Be Vietnam Pro" pitchFamily="34" charset="-122"/>
-                <a:cs typeface="Be Vietnam Pro" pitchFamily="34" charset="-120"/>
-              </a:rPr>
-              <a:t> lúc,</a:t>
-            </a:r>
-            <a:r>
-              <a:rPr lang="en-US" sz="2850" dirty="0" spc="-23" kern="0">
-                <a:solidFill>
-                  <a:srgbClr val="14161C"/>
-                </a:solidFill>
-                <a:latin typeface="Be Vietnam Pro" pitchFamily="34" charset="0"/>
-                <a:ea typeface="Be Vietnam Pro" pitchFamily="34" charset="-122"/>
-                <a:cs typeface="Be Vietnam Pro" pitchFamily="34" charset="-120"/>
-              </a:rPr>
-              <a:t> trên</a:t>
-            </a:r>
-            <a:r>
               <a:rPr lang="en-US" sz="2850" dirty="0" spc="1" kern="0">
                 <a:solidFill>
                   <a:srgbClr val="14161C"/>
@@ -7709,40 +7452,29 @@
                 <a:ea typeface="Be Vietnam Pro" pitchFamily="34" charset="-122"/>
                 <a:cs typeface="Be Vietnam Pro" pitchFamily="34" charset="-120"/>
               </a:rPr>
-              <a:t> nhiều</a:t>
-            </a:r>
-            <a:r>
-              <a:rPr lang="en-US" sz="2850" dirty="0" spc="-7" kern="0">
-                <a:solidFill>
-                  <a:srgbClr val="14161C"/>
-                </a:solidFill>
-                <a:latin typeface="Be Vietnam Pro" pitchFamily="34" charset="0"/>
-                <a:ea typeface="Be Vietnam Pro" pitchFamily="34" charset="-122"/>
-                <a:cs typeface="Be Vietnam Pro" pitchFamily="34" charset="-120"/>
-              </a:rPr>
-              <a:t> bộ</a:t>
-            </a:r>
-            <a:r>
-              <a:rPr lang="en-US" sz="2850" dirty="0" spc="3" kern="0">
-                <a:solidFill>
-                  <a:srgbClr val="14161C"/>
-                </a:solidFill>
-                <a:latin typeface="Be Vietnam Pro" pitchFamily="34" charset="0"/>
-                <a:ea typeface="Be Vietnam Pro" pitchFamily="34" charset="-122"/>
-                <a:cs typeface="Be Vietnam Pro" pitchFamily="34" charset="-120"/>
-              </a:rPr>
-              <a:t> xử</a:t>
-            </a:r>
-            <a:r>
-              <a:rPr lang="en-US" sz="2850" dirty="0" spc="2" kern="0">
-                <a:solidFill>
-                  <a:srgbClr val="14161C"/>
-                </a:solidFill>
-                <a:latin typeface="Be Vietnam Pro" pitchFamily="34" charset="0"/>
-                <a:ea typeface="Be Vietnam Pro" pitchFamily="34" charset="-122"/>
-                <a:cs typeface="Be Vietnam Pro" pitchFamily="34" charset="-120"/>
-              </a:rPr>
-              <a:t> lý.</a:t>
+              <a:t> CPU</a:t>
+            </a:r>
+            <a:r>
+              <a:rPr lang="en-US" sz="2850" dirty="0" spc="19" kern="0">
+                <a:solidFill>
+                  <a:srgbClr val="14161C"/>
+                </a:solidFill>
+                <a:latin typeface="Be Vietnam Pro" pitchFamily="34" charset="0"/>
+                <a:ea typeface="Be Vietnam Pro" pitchFamily="34" charset="-122"/>
+                <a:cs typeface="Be Vietnam Pro" pitchFamily="34" charset="-120"/>
+              </a:rPr>
+              <a:t> để</a:t>
+            </a:r>
+            <a:r>
+              <a:rPr lang="en-US" sz="2850" dirty="0" spc="1" kern="0">
+                <a:solidFill>
+                  <a:srgbClr val="14161C"/>
+                </a:solidFill>
+                <a:latin typeface="Be Vietnam Pro" pitchFamily="34" charset="0"/>
+                <a:ea typeface="Be Vietnam Pro" pitchFamily="34" charset="-122"/>
+                <a:cs typeface="Be Vietnam Pro" pitchFamily="34" charset="-120"/>
+              </a:rPr>
+              <a:t> hiệu quả hơn.</a:t>
             </a:r>
             <a:endParaRPr lang="en-US" sz="2850" dirty="0"/>
           </a:p>
@@ -7946,15 +7678,15 @@
               <a:buNone/>
             </a:pPr>
             <a:r>
-              <a:rPr lang="en-US" sz="2550" dirty="0" spc="1" kern="0">
-                <a:solidFill>
-                  <a:srgbClr val="14161C"/>
-                </a:solidFill>
-                <a:latin typeface="Be Vietnam Pro" pitchFamily="34" charset="0"/>
-                <a:ea typeface="Be Vietnam Pro" pitchFamily="34" charset="-122"/>
-                <a:cs typeface="Be Vietnam Pro" pitchFamily="34" charset="-120"/>
-              </a:rPr>
-              <a:t>Cần</a:t>
+              <a:rPr lang="en-US" sz="2550" dirty="0" spc="2" kern="0">
+                <a:solidFill>
+                  <a:srgbClr val="14161C"/>
+                </a:solidFill>
+                <a:latin typeface="Be Vietnam Pro" pitchFamily="34" charset="0"/>
+                <a:ea typeface="Be Vietnam Pro" pitchFamily="34" charset="-122"/>
+                <a:cs typeface="Be Vietnam Pro" pitchFamily="34" charset="-120"/>
+              </a:rPr>
+              <a:t>Bốn</a:t>
             </a:r>
             <a:r>
               <a:rPr lang="en-US" sz="2550" dirty="0" spc="0" kern="0">
@@ -7965,51 +7697,84 @@
                 <a:ea typeface="Be Vietnam Pro" pitchFamily="34" charset="-122"/>
                 <a:cs typeface="Be Vietnam Pro" pitchFamily="34" charset="-120"/>
               </a:rPr>
-              <a:t> phần</a:t>
-            </a:r>
-            <a:r>
-              <a:rPr lang="en-US" sz="2550" dirty="0" spc="19" kern="0">
-                <a:solidFill>
-                  <a:srgbClr val="14161C"/>
-                </a:solidFill>
-                <a:latin typeface="Be Vietnam Pro" pitchFamily="34" charset="0"/>
-                <a:ea typeface="Be Vietnam Pro" pitchFamily="34" charset="-122"/>
-                <a:cs typeface="Be Vietnam Pro" pitchFamily="34" charset="-120"/>
-              </a:rPr>
-              <a:t> cứng</a:t>
-            </a:r>
-            <a:r>
-              <a:rPr lang="en-US" sz="2550" dirty="0" spc="0" kern="0">
-                <a:solidFill>
-                  <a:srgbClr val="14161C"/>
-                </a:solidFill>
-                <a:latin typeface="Be Vietnam Pro" pitchFamily="34" charset="0"/>
-                <a:ea typeface="Be Vietnam Pro" pitchFamily="34" charset="-122"/>
-                <a:cs typeface="Be Vietnam Pro" pitchFamily="34" charset="-120"/>
-              </a:rPr>
-              <a:t> có</a:t>
-            </a:r>
-            <a:r>
-              <a:rPr lang="en-US" sz="2550" dirty="0" spc="1" kern="0">
-                <a:solidFill>
-                  <a:srgbClr val="14161C"/>
-                </a:solidFill>
-                <a:latin typeface="Be Vietnam Pro" pitchFamily="34" charset="0"/>
-                <a:ea typeface="Be Vietnam Pro" pitchFamily="34" charset="-122"/>
-                <a:cs typeface="Be Vietnam Pro" pitchFamily="34" charset="-120"/>
-              </a:rPr>
-              <a:t> nhiều</a:t>
-            </a:r>
-            <a:r>
-              <a:rPr lang="en-US" sz="2550" dirty="0" spc="12" kern="0">
-                <a:solidFill>
-                  <a:srgbClr val="14161C"/>
-                </a:solidFill>
-                <a:latin typeface="Be Vietnam Pro" pitchFamily="34" charset="0"/>
-                <a:ea typeface="Be Vietnam Pro" pitchFamily="34" charset="-122"/>
-                <a:cs typeface="Be Vietnam Pro" pitchFamily="34" charset="-120"/>
-              </a:rPr>
-              <a:t> đơn</a:t>
+              <a:t> tiến</a:t>
+            </a:r>
+            <a:r>
+              <a:rPr lang="en-US" sz="2550" dirty="0" spc="9" kern="0">
+                <a:solidFill>
+                  <a:srgbClr val="14161C"/>
+                </a:solidFill>
+                <a:latin typeface="Be Vietnam Pro" pitchFamily="34" charset="0"/>
+                <a:ea typeface="Be Vietnam Pro" pitchFamily="34" charset="-122"/>
+                <a:cs typeface="Be Vietnam Pro" pitchFamily="34" charset="-120"/>
+              </a:rPr>
+              <a:t> trình:</a:t>
+            </a:r>
+            <a:r>
+              <a:rPr lang="en-US" sz="2550" dirty="0" spc="-2" kern="0">
+                <a:solidFill>
+                  <a:srgbClr val="14161C"/>
+                </a:solidFill>
+                <a:latin typeface="Be Vietnam Pro" pitchFamily="34" charset="0"/>
+                <a:ea typeface="Be Vietnam Pro" pitchFamily="34" charset="-122"/>
+                <a:cs typeface="Be Vietnam Pro" pitchFamily="34" charset="-120"/>
+              </a:rPr>
+              <a:t> 0,2</a:t>
+            </a:r>
+            <a:r>
+              <a:rPr lang="en-US" sz="2550" dirty="0" spc="13" kern="0">
+                <a:solidFill>
+                  <a:srgbClr val="14161C"/>
+                </a:solidFill>
+                <a:latin typeface="Be Vietnam Pro" pitchFamily="34" charset="0"/>
+                <a:ea typeface="Be Vietnam Pro" pitchFamily="34" charset="-122"/>
+                <a:cs typeface="Be Vietnam Pro" pitchFamily="34" charset="-120"/>
+              </a:rPr>
+              <a:t> đến</a:t>
+            </a:r>
+            <a:r>
+              <a:rPr lang="en-US" sz="2550" dirty="0" spc="-2" kern="0">
+                <a:solidFill>
+                  <a:srgbClr val="14161C"/>
+                </a:solidFill>
+                <a:latin typeface="Be Vietnam Pro" pitchFamily="34" charset="0"/>
+                <a:ea typeface="Be Vietnam Pro" pitchFamily="34" charset="-122"/>
+                <a:cs typeface="Be Vietnam Pro" pitchFamily="34" charset="-120"/>
+              </a:rPr>
+              <a:t> 0,3</a:t>
+            </a:r>
+            <a:r>
+              <a:rPr lang="en-US" sz="2550" dirty="0" spc="-8" kern="0">
+                <a:solidFill>
+                  <a:srgbClr val="14161C"/>
+                </a:solidFill>
+                <a:latin typeface="Be Vietnam Pro" pitchFamily="34" charset="0"/>
+                <a:ea typeface="Be Vietnam Pro" pitchFamily="34" charset="-122"/>
+                <a:cs typeface="Be Vietnam Pro" pitchFamily="34" charset="-120"/>
+              </a:rPr>
+              <a:t> giây</a:t>
+            </a:r>
+            <a:r>
+              <a:rPr lang="en-US" sz="2550" dirty="0" spc="-10" kern="0">
+                <a:solidFill>
+                  <a:srgbClr val="14161C"/>
+                </a:solidFill>
+                <a:latin typeface="Be Vietnam Pro" pitchFamily="34" charset="0"/>
+                <a:ea typeface="Be Vietnam Pro" pitchFamily="34" charset="-122"/>
+                <a:cs typeface="Be Vietnam Pro" pitchFamily="34" charset="-120"/>
+              </a:rPr>
+              <a:t> so</a:t>
+            </a:r>
+            <a:r>
+              <a:rPr lang="en-US" sz="2550" dirty="0" spc="-15" kern="0">
+                <a:solidFill>
+                  <a:srgbClr val="14161C"/>
+                </a:solidFill>
+                <a:latin typeface="Be Vietnam Pro" pitchFamily="34" charset="0"/>
+                <a:ea typeface="Be Vietnam Pro" pitchFamily="34" charset="-122"/>
+                <a:cs typeface="Be Vietnam Pro" pitchFamily="34" charset="-120"/>
+              </a:rPr>
+              <a:t> với</a:t>
             </a:r>
             <a:r>
               <a:rPr lang="en-US" sz="2550" dirty="0" spc="-1" kern="0">
@@ -8020,95 +7785,7 @@
                 <a:ea typeface="Be Vietnam Pro" pitchFamily="34" charset="-122"/>
                 <a:cs typeface="Be Vietnam Pro" pitchFamily="34" charset="-120"/>
               </a:rPr>
-              <a:t> vị</a:t>
-            </a:r>
-            <a:r>
-              <a:rPr lang="en-US" sz="2550" dirty="0" spc="-2" kern="0">
-                <a:solidFill>
-                  <a:srgbClr val="14161C"/>
-                </a:solidFill>
-                <a:latin typeface="Be Vietnam Pro" pitchFamily="34" charset="0"/>
-                <a:ea typeface="Be Vietnam Pro" pitchFamily="34" charset="-122"/>
-                <a:cs typeface="Be Vietnam Pro" pitchFamily="34" charset="-120"/>
-              </a:rPr>
-              <a:t> xử</a:t>
-            </a:r>
-            <a:r>
-              <a:rPr lang="en-US" sz="2550" dirty="0" spc="-1" kern="0">
-                <a:solidFill>
-                  <a:srgbClr val="14161C"/>
-                </a:solidFill>
-                <a:latin typeface="Be Vietnam Pro" pitchFamily="34" charset="0"/>
-                <a:ea typeface="Be Vietnam Pro" pitchFamily="34" charset="-122"/>
-                <a:cs typeface="Be Vietnam Pro" pitchFamily="34" charset="-120"/>
-              </a:rPr>
-              <a:t> lý,</a:t>
-            </a:r>
-            <a:r>
-              <a:rPr lang="en-US" sz="2550" dirty="0" spc="18" kern="0">
-                <a:solidFill>
-                  <a:srgbClr val="14161C"/>
-                </a:solidFill>
-                <a:latin typeface="Be Vietnam Pro" pitchFamily="34" charset="0"/>
-                <a:ea typeface="Be Vietnam Pro" pitchFamily="34" charset="-122"/>
-                <a:cs typeface="Be Vietnam Pro" pitchFamily="34" charset="-120"/>
-              </a:rPr>
-              <a:t> để</a:t>
-            </a:r>
-            <a:r>
-              <a:rPr lang="en-US" sz="2550" dirty="0" spc="-9" kern="0">
-                <a:solidFill>
-                  <a:srgbClr val="14161C"/>
-                </a:solidFill>
-                <a:latin typeface="Be Vietnam Pro" pitchFamily="34" charset="0"/>
-                <a:ea typeface="Be Vietnam Pro" pitchFamily="34" charset="-122"/>
-                <a:cs typeface="Be Vietnam Pro" pitchFamily="34" charset="-120"/>
-              </a:rPr>
-              <a:t> tăng</a:t>
-            </a:r>
-            <a:r>
-              <a:rPr lang="en-US" sz="2550" dirty="0" spc="-15" kern="0">
-                <a:solidFill>
-                  <a:srgbClr val="14161C"/>
-                </a:solidFill>
-                <a:latin typeface="Be Vietnam Pro" pitchFamily="34" charset="0"/>
-                <a:ea typeface="Be Vietnam Pro" pitchFamily="34" charset="-122"/>
-                <a:cs typeface="Be Vietnam Pro" pitchFamily="34" charset="-120"/>
-              </a:rPr>
-              <a:t> tốc</a:t>
-            </a:r>
-            <a:r>
-              <a:rPr lang="en-US" sz="2550" dirty="0" spc="17" kern="0">
-                <a:solidFill>
-                  <a:srgbClr val="14161C"/>
-                </a:solidFill>
-                <a:latin typeface="Be Vietnam Pro" pitchFamily="34" charset="0"/>
-                <a:ea typeface="Be Vietnam Pro" pitchFamily="34" charset="-122"/>
-                <a:cs typeface="Be Vietnam Pro" pitchFamily="34" charset="-120"/>
-              </a:rPr>
-              <a:t> độ</a:t>
-            </a:r>
-            <a:r>
-              <a:rPr lang="en-US" sz="2550" dirty="0" spc="1" kern="0">
-                <a:solidFill>
-                  <a:srgbClr val="14161C"/>
-                </a:solidFill>
-                <a:latin typeface="Be Vietnam Pro" pitchFamily="34" charset="0"/>
-                <a:ea typeface="Be Vietnam Pro" pitchFamily="34" charset="-122"/>
-                <a:cs typeface="Be Vietnam Pro" pitchFamily="34" charset="-120"/>
-              </a:rPr>
-              <a:t> tính</a:t>
-            </a:r>
-            <a:r>
-              <a:rPr lang="en-US" sz="2550" dirty="0" spc="-10" kern="0">
-                <a:solidFill>
-                  <a:srgbClr val="14161C"/>
-                </a:solidFill>
-                <a:latin typeface="Be Vietnam Pro" pitchFamily="34" charset="0"/>
-                <a:ea typeface="Be Vietnam Pro" pitchFamily="34" charset="-122"/>
-                <a:cs typeface="Be Vietnam Pro" pitchFamily="34" charset="-120"/>
-              </a:rPr>
-              <a:t> toán.</a:t>
+              <a:t> 0,6.</a:t>
             </a:r>
             <a:endParaRPr lang="en-US" sz="2550" dirty="0"/>
           </a:p>
@@ -9643,20 +9320,42 @@
               <a:buNone/>
             </a:pPr>
             <a:r>
-              <a:rPr lang="en-US" sz="2850" b="1" dirty="0" spc="-7" kern="0">
-                <a:solidFill>
-                  <a:srgbClr val="7C93FF"/>
-                </a:solidFill>
-                <a:latin typeface="Be Vietnam Pro" pitchFamily="34" charset="0"/>
-                <a:ea typeface="Be Vietnam Pro" pitchFamily="34" charset="-122"/>
-                <a:cs typeface="Be Vietnam Pro" pitchFamily="34" charset="-120"/>
-              </a:rPr>
-              <a:t>Đồng</a:t>
-            </a:r>
-            <a:r>
-              <a:rPr lang="en-US" sz="2850" b="1" dirty="0" spc="2" kern="0">
-                <a:solidFill>
-                  <a:srgbClr val="7C93FF"/>
+              <a:rPr lang="en-US" sz="2850" dirty="0" spc="-4" kern="0">
+                <a:solidFill>
+                  <a:srgbClr val="F3EEE3"/>
+                </a:solidFill>
+                <a:latin typeface="Be Vietnam Pro" pitchFamily="34" charset="0"/>
+                <a:ea typeface="Be Vietnam Pro" pitchFamily="34" charset="-122"/>
+                <a:cs typeface="Be Vietnam Pro" pitchFamily="34" charset="-120"/>
+              </a:rPr>
+              <a:t>Việc</a:t>
+            </a:r>
+            <a:r>
+              <a:rPr lang="en-US" sz="2850" dirty="0" spc="0" kern="0">
+                <a:solidFill>
+                  <a:srgbClr val="F3EEE3"/>
+                </a:solidFill>
+                <a:latin typeface="Be Vietnam Pro" pitchFamily="34" charset="0"/>
+                <a:ea typeface="Be Vietnam Pro" pitchFamily="34" charset="-122"/>
+                <a:cs typeface="Be Vietnam Pro" pitchFamily="34" charset="-120"/>
+              </a:rPr>
+              <a:t> chờ:</a:t>
+            </a:r>
+            <a:r>
+              <a:rPr lang="en-US" sz="2850" dirty="0" spc="9" kern="0">
+                <a:solidFill>
+                  <a:srgbClr val="F3EEE3"/>
+                </a:solidFill>
+                <a:latin typeface="Be Vietnam Pro" pitchFamily="34" charset="0"/>
+                <a:ea typeface="Be Vietnam Pro" pitchFamily="34" charset="-122"/>
+                <a:cs typeface="Be Vietnam Pro" pitchFamily="34" charset="-120"/>
+              </a:rPr>
+              <a:t> đồng</a:t>
+            </a:r>
+            <a:r>
+              <a:rPr lang="en-US" sz="2850" dirty="0" spc="0" kern="0">
+                <a:solidFill>
+                  <a:srgbClr val="F3EEE3"/>
                 </a:solidFill>
                 <a:latin typeface="Be Vietnam Pro" pitchFamily="34" charset="0"/>
                 <a:ea typeface="Be Vietnam Pro" pitchFamily="34" charset="-122"/>
@@ -9664,58 +9363,27 @@
               </a:rPr>
               <a:t> thời</a:t>
             </a:r>
-            <a:pPr algn="l" indent="0" marL="0">
-              <a:lnSpc>
-                <a:spcPts val="3990"/>
-              </a:lnSpc>
-              <a:spcAft>
-                <a:spcPts val="1050"/>
-              </a:spcAft>
-              <a:buNone/>
-            </a:pPr>
-            <a:r>
-              <a:rPr lang="en-US" sz="2850" dirty="0" spc="-1" kern="0">
-                <a:solidFill>
-                  <a:srgbClr val="F3EEE3"/>
-                </a:solidFill>
-                <a:latin typeface="Be Vietnam Pro" pitchFamily="34" charset="0"/>
-                <a:ea typeface="Be Vietnam Pro" pitchFamily="34" charset="-122"/>
-                <a:cs typeface="Be Vietnam Pro" pitchFamily="34" charset="-120"/>
-              </a:rPr>
-              <a:t> hợp</a:t>
-            </a:r>
-            <a:r>
-              <a:rPr lang="en-US" sz="2850" dirty="0" spc="-12" kern="0">
-                <a:solidFill>
-                  <a:srgbClr val="F3EEE3"/>
-                </a:solidFill>
-                <a:latin typeface="Be Vietnam Pro" pitchFamily="34" charset="0"/>
-                <a:ea typeface="Be Vietnam Pro" pitchFamily="34" charset="-122"/>
-                <a:cs typeface="Be Vietnam Pro" pitchFamily="34" charset="-120"/>
-              </a:rPr>
-              <a:t> với</a:t>
-            </a:r>
-            <a:r>
-              <a:rPr lang="en-US" sz="2850" dirty="0" spc="-2" kern="0">
-                <a:solidFill>
-                  <a:srgbClr val="F3EEE3"/>
-                </a:solidFill>
-                <a:latin typeface="Be Vietnam Pro" pitchFamily="34" charset="0"/>
-                <a:ea typeface="Be Vietnam Pro" pitchFamily="34" charset="-122"/>
-                <a:cs typeface="Be Vietnam Pro" pitchFamily="34" charset="-120"/>
-              </a:rPr>
-              <a:t> việc</a:t>
-            </a:r>
-            <a:r>
-              <a:rPr lang="en-US" sz="2850" dirty="0" spc="0" kern="0">
-                <a:solidFill>
-                  <a:srgbClr val="F3EEE3"/>
-                </a:solidFill>
-                <a:latin typeface="Be Vietnam Pro" pitchFamily="34" charset="0"/>
-                <a:ea typeface="Be Vietnam Pro" pitchFamily="34" charset="-122"/>
-                <a:cs typeface="Be Vietnam Pro" pitchFamily="34" charset="-120"/>
-              </a:rPr>
-              <a:t> chờ.</a:t>
+            <a:r>
+              <a:rPr lang="en-US" sz="2850" dirty="0" spc="2" kern="0">
+                <a:solidFill>
+                  <a:srgbClr val="F3EEE3"/>
+                </a:solidFill>
+                <a:latin typeface="Be Vietnam Pro" pitchFamily="34" charset="0"/>
+                <a:ea typeface="Be Vietnam Pro" pitchFamily="34" charset="-122"/>
+                <a:cs typeface="Be Vietnam Pro" pitchFamily="34" charset="-120"/>
+              </a:rPr>
+              <a:t> là</a:t>
+            </a:r>
+            <a:r>
+              <a:rPr lang="en-US" sz="2850" dirty="0" spc="1" kern="0">
+                <a:solidFill>
+                  <a:srgbClr val="F3EEE3"/>
+                </a:solidFill>
+                <a:latin typeface="Be Vietnam Pro" pitchFamily="34" charset="0"/>
+                <a:ea typeface="Be Vietnam Pro" pitchFamily="34" charset="-122"/>
+                <a:cs typeface="Be Vietnam Pro" pitchFamily="34" charset="-120"/>
+              </a:rPr>
+              <a:t> đủ.</a:t>
             </a:r>
             <a:endParaRPr lang="en-US" sz="2850" dirty="0"/>
           </a:p>
@@ -9727,20 +9395,53 @@
               <a:buNone/>
             </a:pPr>
             <a:r>
-              <a:rPr lang="en-US" sz="2850" b="1" dirty="0" spc="-7" kern="0">
-                <a:solidFill>
-                  <a:srgbClr val="3DD6A0"/>
-                </a:solidFill>
-                <a:latin typeface="Be Vietnam Pro" pitchFamily="34" charset="0"/>
-                <a:ea typeface="Be Vietnam Pro" pitchFamily="34" charset="-122"/>
-                <a:cs typeface="Be Vietnam Pro" pitchFamily="34" charset="-120"/>
-              </a:rPr>
-              <a:t>Song</a:t>
-            </a:r>
-            <a:r>
-              <a:rPr lang="en-US" sz="2850" b="1" dirty="0" spc="-5" kern="0">
-                <a:solidFill>
-                  <a:srgbClr val="3DD6A0"/>
+              <a:rPr lang="en-US" sz="2850" dirty="0" spc="-4" kern="0">
+                <a:solidFill>
+                  <a:srgbClr val="F3EEE3"/>
+                </a:solidFill>
+                <a:latin typeface="Be Vietnam Pro" pitchFamily="34" charset="0"/>
+                <a:ea typeface="Be Vietnam Pro" pitchFamily="34" charset="-122"/>
+                <a:cs typeface="Be Vietnam Pro" pitchFamily="34" charset="-120"/>
+              </a:rPr>
+              <a:t>Việc</a:t>
+            </a:r>
+            <a:r>
+              <a:rPr lang="en-US" sz="2850" dirty="0" spc="-1" kern="0">
+                <a:solidFill>
+                  <a:srgbClr val="F3EEE3"/>
+                </a:solidFill>
+                <a:latin typeface="Be Vietnam Pro" pitchFamily="34" charset="0"/>
+                <a:ea typeface="Be Vietnam Pro" pitchFamily="34" charset="-122"/>
+                <a:cs typeface="Be Vietnam Pro" pitchFamily="34" charset="-120"/>
+              </a:rPr>
+              <a:t> tính</a:t>
+            </a:r>
+            <a:r>
+              <a:rPr lang="en-US" sz="2850" dirty="0" spc="-12" kern="0">
+                <a:solidFill>
+                  <a:srgbClr val="F3EEE3"/>
+                </a:solidFill>
+                <a:latin typeface="Be Vietnam Pro" pitchFamily="34" charset="0"/>
+                <a:ea typeface="Be Vietnam Pro" pitchFamily="34" charset="-122"/>
+                <a:cs typeface="Be Vietnam Pro" pitchFamily="34" charset="-120"/>
+              </a:rPr>
+              <a:t> toán:</a:t>
+            </a:r>
+            <a:r>
+              <a:rPr lang="en-US" sz="2850" dirty="0" spc="-1" kern="0">
+                <a:solidFill>
+                  <a:srgbClr val="F3EEE3"/>
+                </a:solidFill>
+                <a:latin typeface="Be Vietnam Pro" pitchFamily="34" charset="0"/>
+                <a:ea typeface="Be Vietnam Pro" pitchFamily="34" charset="-122"/>
+                <a:cs typeface="Be Vietnam Pro" pitchFamily="34" charset="-120"/>
+              </a:rPr>
+              <a:t> cần</a:t>
+            </a:r>
+            <a:r>
+              <a:rPr lang="en-US" sz="2850" dirty="0" spc="-6" kern="0">
+                <a:solidFill>
+                  <a:srgbClr val="F3EEE3"/>
                 </a:solidFill>
                 <a:latin typeface="Be Vietnam Pro" pitchFamily="34" charset="0"/>
                 <a:ea typeface="Be Vietnam Pro" pitchFamily="34" charset="-122"/>
@@ -9748,66 +9449,16 @@
               </a:rPr>
               <a:t> song</a:t>
             </a:r>
-            <a:pPr algn="l" indent="0" marL="0">
-              <a:lnSpc>
-                <a:spcPts val="3990"/>
-              </a:lnSpc>
-              <a:buNone/>
-            </a:pPr>
-            <a:r>
-              <a:rPr lang="en-US" sz="2850" dirty="0" spc="-1" kern="0">
-                <a:solidFill>
-                  <a:srgbClr val="F3EEE3"/>
-                </a:solidFill>
-                <a:latin typeface="Be Vietnam Pro" pitchFamily="34" charset="0"/>
-                <a:ea typeface="Be Vietnam Pro" pitchFamily="34" charset="-122"/>
-                <a:cs typeface="Be Vietnam Pro" pitchFamily="34" charset="-120"/>
-              </a:rPr>
-              <a:t> hợp</a:t>
-            </a:r>
-            <a:r>
-              <a:rPr lang="en-US" sz="2850" dirty="0" spc="-12" kern="0">
-                <a:solidFill>
-                  <a:srgbClr val="F3EEE3"/>
-                </a:solidFill>
-                <a:latin typeface="Be Vietnam Pro" pitchFamily="34" charset="0"/>
-                <a:ea typeface="Be Vietnam Pro" pitchFamily="34" charset="-122"/>
-                <a:cs typeface="Be Vietnam Pro" pitchFamily="34" charset="-120"/>
-              </a:rPr>
-              <a:t> với</a:t>
-            </a:r>
-            <a:r>
-              <a:rPr lang="en-US" sz="2850" dirty="0" spc="-2" kern="0">
-                <a:solidFill>
-                  <a:srgbClr val="F3EEE3"/>
-                </a:solidFill>
-                <a:latin typeface="Be Vietnam Pro" pitchFamily="34" charset="0"/>
-                <a:ea typeface="Be Vietnam Pro" pitchFamily="34" charset="-122"/>
-                <a:cs typeface="Be Vietnam Pro" pitchFamily="34" charset="-120"/>
-              </a:rPr>
-              <a:t> việc nặng</a:t>
-            </a:r>
-            <a:r>
-              <a:rPr lang="en-US" sz="2850" dirty="0" spc="-1" kern="0">
-                <a:solidFill>
-                  <a:srgbClr val="F3EEE3"/>
-                </a:solidFill>
-                <a:latin typeface="Be Vietnam Pro" pitchFamily="34" charset="0"/>
-                <a:ea typeface="Be Vietnam Pro" pitchFamily="34" charset="-122"/>
-                <a:cs typeface="Be Vietnam Pro" pitchFamily="34" charset="-120"/>
-              </a:rPr>
-              <a:t> tính</a:t>
-            </a:r>
-            <a:r>
-              <a:rPr lang="en-US" sz="2850" dirty="0" spc="-11" kern="0">
-                <a:solidFill>
-                  <a:srgbClr val="F3EEE3"/>
-                </a:solidFill>
-                <a:latin typeface="Be Vietnam Pro" pitchFamily="34" charset="0"/>
-                <a:ea typeface="Be Vietnam Pro" pitchFamily="34" charset="-122"/>
-                <a:cs typeface="Be Vietnam Pro" pitchFamily="34" charset="-120"/>
-              </a:rPr>
-              <a:t> toán.</a:t>
+            <a:r>
+              <a:rPr lang="en-US" sz="2850" dirty="0" spc="-4" kern="0">
+                <a:solidFill>
+                  <a:srgbClr val="F3EEE3"/>
+                </a:solidFill>
+                <a:latin typeface="Be Vietnam Pro" pitchFamily="34" charset="0"/>
+                <a:ea typeface="Be Vietnam Pro" pitchFamily="34" charset="-122"/>
+                <a:cs typeface="Be Vietnam Pro" pitchFamily="34" charset="-120"/>
+              </a:rPr>
+              <a:t> song.</a:t>
             </a:r>
             <a:endParaRPr lang="en-US" sz="2850" dirty="0"/>
           </a:p>
@@ -9913,26 +9564,70 @@
               <a:buNone/>
             </a:pPr>
             <a:r>
-              <a:rPr lang="en-US" sz="2550" dirty="0" spc="2" kern="0">
-                <a:solidFill>
-                  <a:srgbClr val="F3EEE3"/>
-                </a:solidFill>
-                <a:latin typeface="Be Vietnam Pro" pitchFamily="34" charset="0"/>
-                <a:ea typeface="Be Vietnam Pro" pitchFamily="34" charset="-122"/>
-                <a:cs typeface="Be Vietnam Pro" pitchFamily="34" charset="-120"/>
-              </a:rPr>
-              <a:t>Nguồn</a:t>
-            </a:r>
-            <a:r>
-              <a:rPr lang="en-US" sz="2550" dirty="0" spc="1" kern="0">
-                <a:solidFill>
-                  <a:srgbClr val="F3EEE3"/>
-                </a:solidFill>
-                <a:latin typeface="Be Vietnam Pro" pitchFamily="34" charset="0"/>
-                <a:ea typeface="Be Vietnam Pro" pitchFamily="34" charset="-122"/>
-                <a:cs typeface="Be Vietnam Pro" pitchFamily="34" charset="-120"/>
-              </a:rPr>
-              <a:t> chỉ nêu</a:t>
+              <a:rPr lang="en-US" sz="2550" dirty="0" spc="-3" kern="0">
+                <a:solidFill>
+                  <a:srgbClr val="F3EEE3"/>
+                </a:solidFill>
+                <a:latin typeface="Be Vietnam Pro" pitchFamily="34" charset="0"/>
+                <a:ea typeface="Be Vietnam Pro" pitchFamily="34" charset="-122"/>
+                <a:cs typeface="Be Vietnam Pro" pitchFamily="34" charset="-120"/>
+              </a:rPr>
+              <a:t>Số</a:t>
+            </a:r>
+            <a:r>
+              <a:rPr lang="en-US" sz="2550" dirty="0" spc="17" kern="0">
+                <a:solidFill>
+                  <a:srgbClr val="F3EEE3"/>
+                </a:solidFill>
+                <a:latin typeface="Be Vietnam Pro" pitchFamily="34" charset="0"/>
+                <a:ea typeface="Be Vietnam Pro" pitchFamily="34" charset="-122"/>
+                <a:cs typeface="Be Vietnam Pro" pitchFamily="34" charset="-120"/>
+              </a:rPr>
+              <a:t> đo</a:t>
+            </a:r>
+            <a:r>
+              <a:rPr lang="en-US" sz="2550" dirty="0" spc="-2" kern="0">
+                <a:solidFill>
+                  <a:srgbClr val="F3EEE3"/>
+                </a:solidFill>
+                <a:latin typeface="Be Vietnam Pro" pitchFamily="34" charset="0"/>
+                <a:ea typeface="Be Vietnam Pro" pitchFamily="34" charset="-122"/>
+                <a:cs typeface="Be Vietnam Pro" pitchFamily="34" charset="-120"/>
+              </a:rPr>
+              <a:t> của</a:t>
+            </a:r>
+            <a:r>
+              <a:rPr lang="en-US" sz="2550" dirty="0" spc="-5" kern="0">
+                <a:solidFill>
+                  <a:srgbClr val="F3EEE3"/>
+                </a:solidFill>
+                <a:latin typeface="Be Vietnam Pro" pitchFamily="34" charset="0"/>
+                <a:ea typeface="Be Vietnam Pro" pitchFamily="34" charset="-122"/>
+                <a:cs typeface="Be Vietnam Pro" pitchFamily="34" charset="-120"/>
+              </a:rPr>
+              <a:t> một</a:t>
+            </a:r>
+            <a:r>
+              <a:rPr lang="en-US" sz="2550" dirty="0" spc="-9" kern="0">
+                <a:solidFill>
+                  <a:srgbClr val="F3EEE3"/>
+                </a:solidFill>
+                <a:latin typeface="Be Vietnam Pro" pitchFamily="34" charset="0"/>
+                <a:ea typeface="Be Vietnam Pro" pitchFamily="34" charset="-122"/>
+                <a:cs typeface="Be Vietnam Pro" pitchFamily="34" charset="-120"/>
+              </a:rPr>
+              <a:t> máy</a:t>
+            </a:r>
+            <a:r>
+              <a:rPr lang="en-US" sz="2550" dirty="0" spc="-3" kern="0">
+                <a:solidFill>
+                  <a:srgbClr val="F3EEE3"/>
+                </a:solidFill>
+                <a:latin typeface="Be Vietnam Pro" pitchFamily="34" charset="0"/>
+                <a:ea typeface="Be Vietnam Pro" pitchFamily="34" charset="-122"/>
+                <a:cs typeface="Be Vietnam Pro" pitchFamily="34" charset="-120"/>
+              </a:rPr>
+              <a:t> bốn</a:t>
             </a:r>
             <a:r>
               <a:rPr lang="en-US" sz="2550" dirty="0" spc="-1" kern="0">
@@ -9943,18 +9638,18 @@
                 <a:ea typeface="Be Vietnam Pro" pitchFamily="34" charset="-122"/>
                 <a:cs typeface="Be Vietnam Pro" pitchFamily="34" charset="-120"/>
               </a:rPr>
-              <a:t> hai</a:t>
-            </a:r>
-            <a:r>
-              <a:rPr lang="en-US" sz="2550" dirty="0" spc="0" kern="0">
-                <a:solidFill>
-                  <a:srgbClr val="F3EEE3"/>
-                </a:solidFill>
-                <a:latin typeface="Be Vietnam Pro" pitchFamily="34" charset="0"/>
-                <a:ea typeface="Be Vietnam Pro" pitchFamily="34" charset="-122"/>
-                <a:cs typeface="Be Vietnam Pro" pitchFamily="34" charset="-120"/>
-              </a:rPr>
-              <a:t> nhóm</a:t>
+              <a:t> lõi,</a:t>
+            </a:r>
+            <a:r>
+              <a:rPr lang="en-US" sz="2550" dirty="0" spc="8" kern="0">
+                <a:solidFill>
+                  <a:srgbClr val="F3EEE3"/>
+                </a:solidFill>
+                <a:latin typeface="Be Vietnam Pro" pitchFamily="34" charset="0"/>
+                <a:ea typeface="Be Vietnam Pro" pitchFamily="34" charset="-122"/>
+                <a:cs typeface="Be Vietnam Pro" pitchFamily="34" charset="-120"/>
+              </a:rPr>
+              <a:t> Python</a:t>
             </a:r>
             <a:r>
               <a:rPr lang="en-US" sz="2550" dirty="0" spc="-2" kern="0">
@@ -9965,73 +9660,7 @@
                 <a:ea typeface="Be Vietnam Pro" pitchFamily="34" charset="-122"/>
                 <a:cs typeface="Be Vietnam Pro" pitchFamily="34" charset="-120"/>
               </a:rPr>
-              <a:t> việc:</a:t>
-            </a:r>
-            <a:r>
-              <a:rPr lang="en-US" sz="2550" dirty="0" spc="-1" kern="0">
-                <a:solidFill>
-                  <a:srgbClr val="F3EEE3"/>
-                </a:solidFill>
-                <a:latin typeface="Be Vietnam Pro" pitchFamily="34" charset="0"/>
-                <a:ea typeface="Be Vietnam Pro" pitchFamily="34" charset="-122"/>
-                <a:cs typeface="Be Vietnam Pro" pitchFamily="34" charset="-120"/>
-              </a:rPr>
-              <a:t> chờ</a:t>
-            </a:r>
-            <a:r>
-              <a:rPr lang="en-US" sz="2550" dirty="0" spc="13" kern="0">
-                <a:solidFill>
-                  <a:srgbClr val="F3EEE3"/>
-                </a:solidFill>
-                <a:latin typeface="Be Vietnam Pro" pitchFamily="34" charset="0"/>
-                <a:ea typeface="Be Vietnam Pro" pitchFamily="34" charset="-122"/>
-                <a:cs typeface="Be Vietnam Pro" pitchFamily="34" charset="-120"/>
-              </a:rPr>
-              <a:t> đợi</a:t>
-            </a:r>
-            <a:r>
-              <a:rPr lang="en-US" sz="2550" dirty="0" spc="-19" kern="0">
-                <a:solidFill>
-                  <a:srgbClr val="F3EEE3"/>
-                </a:solidFill>
-                <a:latin typeface="Be Vietnam Pro" pitchFamily="34" charset="0"/>
-                <a:ea typeface="Be Vietnam Pro" pitchFamily="34" charset="-122"/>
-                <a:cs typeface="Be Vietnam Pro" pitchFamily="34" charset="-120"/>
-              </a:rPr>
-              <a:t> và</a:t>
-            </a:r>
-            <a:r>
-              <a:rPr lang="en-US" sz="2550" dirty="0" spc="1" kern="0">
-                <a:solidFill>
-                  <a:srgbClr val="F3EEE3"/>
-                </a:solidFill>
-                <a:latin typeface="Be Vietnam Pro" pitchFamily="34" charset="0"/>
-                <a:ea typeface="Be Vietnam Pro" pitchFamily="34" charset="-122"/>
-                <a:cs typeface="Be Vietnam Pro" pitchFamily="34" charset="-120"/>
-              </a:rPr>
-              <a:t> tính</a:t>
-            </a:r>
-            <a:r>
-              <a:rPr lang="en-US" sz="2550" dirty="0" spc="-12" kern="0">
-                <a:solidFill>
-                  <a:srgbClr val="F3EEE3"/>
-                </a:solidFill>
-                <a:latin typeface="Be Vietnam Pro" pitchFamily="34" charset="0"/>
-                <a:ea typeface="Be Vietnam Pro" pitchFamily="34" charset="-122"/>
-                <a:cs typeface="Be Vietnam Pro" pitchFamily="34" charset="-120"/>
-              </a:rPr>
-              <a:t> toán</a:t>
-            </a:r>
-            <a:r>
-              <a:rPr lang="en-US" sz="2550" dirty="0" spc="1" kern="0">
-                <a:solidFill>
-                  <a:srgbClr val="F3EEE3"/>
-                </a:solidFill>
-                <a:latin typeface="Be Vietnam Pro" pitchFamily="34" charset="0"/>
-                <a:ea typeface="Be Vietnam Pro" pitchFamily="34" charset="-122"/>
-                <a:cs typeface="Be Vietnam Pro" pitchFamily="34" charset="-120"/>
-              </a:rPr>
-              <a:t> nặng.</a:t>
+              <a:t> 3.13.</a:t>
             </a:r>
             <a:endParaRPr lang="en-US" sz="2550" dirty="0"/>
           </a:p>
@@ -10447,6 +10076,28 @@
               <a:buNone/>
             </a:pPr>
             <a:r>
+              <a:rPr lang="en-US" sz="2550" dirty="0" spc="2" kern="0">
+                <a:solidFill>
+                  <a:srgbClr val="F3EEE3"/>
+                </a:solidFill>
+                <a:latin typeface="Be Vietnam Pro" pitchFamily="34" charset="0"/>
+                <a:ea typeface="Be Vietnam Pro" pitchFamily="34" charset="-122"/>
+                <a:cs typeface="Be Vietnam Pro" pitchFamily="34" charset="-120"/>
+              </a:rPr>
+              <a:t>Bốn</a:t>
+            </a:r>
+            <a:r>
+              <a:rPr lang="en-US" sz="2550" dirty="0" spc="-4" kern="0">
+                <a:solidFill>
+                  <a:srgbClr val="F3EEE3"/>
+                </a:solidFill>
+                <a:latin typeface="Be Vietnam Pro" pitchFamily="34" charset="0"/>
+                <a:ea typeface="Be Vietnam Pro" pitchFamily="34" charset="-122"/>
+                <a:cs typeface="Be Vietnam Pro" pitchFamily="34" charset="-120"/>
+              </a:rPr>
+              <a:t> việc</a:t>
+            </a:r>
+            <a:r>
               <a:rPr lang="en-US" sz="2550" dirty="0" spc="0" kern="0">
                 <a:solidFill>
                   <a:srgbClr val="F3EEE3"/>
@@ -10455,51 +10106,29 @@
                 <a:ea typeface="Be Vietnam Pro" pitchFamily="34" charset="-122"/>
                 <a:cs typeface="Be Vietnam Pro" pitchFamily="34" charset="-120"/>
               </a:rPr>
-              <a:t>Chờ</a:t>
-            </a:r>
-            <a:r>
-              <a:rPr lang="en-US" sz="2550" dirty="0" spc="-9" kern="0">
-                <a:solidFill>
-                  <a:srgbClr val="F3EEE3"/>
-                </a:solidFill>
-                <a:latin typeface="Be Vietnam Pro" pitchFamily="34" charset="0"/>
-                <a:ea typeface="Be Vietnam Pro" pitchFamily="34" charset="-122"/>
-                <a:cs typeface="Be Vietnam Pro" pitchFamily="34" charset="-120"/>
-              </a:rPr>
-              <a:t> tệp,</a:t>
-            </a:r>
-            <a:r>
-              <a:rPr lang="en-US" sz="2550" dirty="0" spc="0" kern="0">
-                <a:solidFill>
-                  <a:srgbClr val="F3EEE3"/>
-                </a:solidFill>
-                <a:latin typeface="Be Vietnam Pro" pitchFamily="34" charset="0"/>
-                <a:ea typeface="Be Vietnam Pro" pitchFamily="34" charset="-122"/>
-                <a:cs typeface="Be Vietnam Pro" pitchFamily="34" charset="-120"/>
-              </a:rPr>
-              <a:t> mạng,</a:t>
-            </a:r>
-            <a:r>
-              <a:rPr lang="en-US" sz="2550" dirty="0" spc="5" kern="0">
-                <a:solidFill>
-                  <a:srgbClr val="F3EEE3"/>
-                </a:solidFill>
-                <a:latin typeface="Be Vietnam Pro" pitchFamily="34" charset="0"/>
-                <a:ea typeface="Be Vietnam Pro" pitchFamily="34" charset="-122"/>
-                <a:cs typeface="Be Vietnam Pro" pitchFamily="34" charset="-120"/>
-              </a:rPr>
-              <a:t> người</a:t>
-            </a:r>
-            <a:r>
-              <a:rPr lang="en-US" sz="2550" dirty="0" spc="-1" kern="0">
-                <a:solidFill>
-                  <a:srgbClr val="F3EEE3"/>
-                </a:solidFill>
-                <a:latin typeface="Be Vietnam Pro" pitchFamily="34" charset="0"/>
-                <a:ea typeface="Be Vietnam Pro" pitchFamily="34" charset="-122"/>
-                <a:cs typeface="Be Vietnam Pro" pitchFamily="34" charset="-120"/>
-              </a:rPr>
-              <a:t> dùng</a:t>
+              <a:t> chờ</a:t>
+            </a:r>
+            <a:r>
+              <a:rPr lang="en-US" sz="2550" dirty="0" spc="7" kern="0">
+                <a:solidFill>
+                  <a:srgbClr val="F3EEE3"/>
+                </a:solidFill>
+                <a:latin typeface="Be Vietnam Pro" pitchFamily="34" charset="0"/>
+                <a:ea typeface="Be Vietnam Pro" pitchFamily="34" charset="-122"/>
+                <a:cs typeface="Be Vietnam Pro" pitchFamily="34" charset="-120"/>
+              </a:rPr>
+              <a:t> nửa</a:t>
+            </a:r>
+            <a:r>
+              <a:rPr lang="en-US" sz="2550" dirty="0" spc="-7" kern="0">
+                <a:solidFill>
+                  <a:srgbClr val="F3EEE3"/>
+                </a:solidFill>
+                <a:latin typeface="Be Vietnam Pro" pitchFamily="34" charset="0"/>
+                <a:ea typeface="Be Vietnam Pro" pitchFamily="34" charset="-122"/>
+                <a:cs typeface="Be Vietnam Pro" pitchFamily="34" charset="-120"/>
+              </a:rPr>
+              <a:t> giây</a:t>
             </a:r>
             <a:endParaRPr lang="en-US" sz="2550" dirty="0"/>
           </a:p>
@@ -10594,6 +10223,28 @@
               <a:buNone/>
             </a:pPr>
             <a:r>
+              <a:rPr lang="en-US" sz="2550" dirty="0" spc="2" kern="0">
+                <a:solidFill>
+                  <a:srgbClr val="F3EEE3"/>
+                </a:solidFill>
+                <a:latin typeface="Be Vietnam Pro" pitchFamily="34" charset="0"/>
+                <a:ea typeface="Be Vietnam Pro" pitchFamily="34" charset="-122"/>
+                <a:cs typeface="Be Vietnam Pro" pitchFamily="34" charset="-120"/>
+              </a:rPr>
+              <a:t>Bốn</a:t>
+            </a:r>
+            <a:r>
+              <a:rPr lang="en-US" sz="2550" dirty="0" spc="-12" kern="0">
+                <a:solidFill>
+                  <a:srgbClr val="F3EEE3"/>
+                </a:solidFill>
+                <a:latin typeface="Be Vietnam Pro" pitchFamily="34" charset="0"/>
+                <a:ea typeface="Be Vietnam Pro" pitchFamily="34" charset="-122"/>
+                <a:cs typeface="Be Vietnam Pro" pitchFamily="34" charset="-120"/>
+              </a:rPr>
+              <a:t> vòng</a:t>
+            </a:r>
+            <a:r>
               <a:rPr lang="en-US" sz="2550" dirty="0" spc="1" kern="0">
                 <a:solidFill>
                   <a:srgbClr val="F3EEE3"/>
@@ -10602,62 +10253,18 @@
                 <a:ea typeface="Be Vietnam Pro" pitchFamily="34" charset="-122"/>
                 <a:cs typeface="Be Vietnam Pro" pitchFamily="34" charset="-120"/>
               </a:rPr>
-              <a:t>Phân</a:t>
-            </a:r>
-            <a:r>
-              <a:rPr lang="en-US" sz="2550" dirty="0" spc="2" kern="0">
-                <a:solidFill>
-                  <a:srgbClr val="F3EEE3"/>
-                </a:solidFill>
-                <a:latin typeface="Be Vietnam Pro" pitchFamily="34" charset="0"/>
-                <a:ea typeface="Be Vietnam Pro" pitchFamily="34" charset="-122"/>
-                <a:cs typeface="Be Vietnam Pro" pitchFamily="34" charset="-120"/>
-              </a:rPr>
-              <a:t> tích</a:t>
-            </a:r>
-            <a:r>
-              <a:rPr lang="en-US" sz="2550" dirty="0" spc="-3" kern="0">
-                <a:solidFill>
-                  <a:srgbClr val="F3EEE3"/>
-                </a:solidFill>
-                <a:latin typeface="Be Vietnam Pro" pitchFamily="34" charset="0"/>
-                <a:ea typeface="Be Vietnam Pro" pitchFamily="34" charset="-122"/>
-                <a:cs typeface="Be Vietnam Pro" pitchFamily="34" charset="-120"/>
-              </a:rPr>
-              <a:t> dữ</a:t>
-            </a:r>
-            <a:r>
-              <a:rPr lang="en-US" sz="2550" dirty="0" spc="1" kern="0">
-                <a:solidFill>
-                  <a:srgbClr val="F3EEE3"/>
-                </a:solidFill>
-                <a:latin typeface="Be Vietnam Pro" pitchFamily="34" charset="0"/>
-                <a:ea typeface="Be Vietnam Pro" pitchFamily="34" charset="-122"/>
-                <a:cs typeface="Be Vietnam Pro" pitchFamily="34" charset="-120"/>
-              </a:rPr>
-              <a:t> liệu,</a:t>
-            </a:r>
-            <a:r>
-              <a:rPr lang="en-US" sz="2550" dirty="0" spc="-3" kern="0">
-                <a:solidFill>
-                  <a:srgbClr val="F3EEE3"/>
-                </a:solidFill>
-                <a:latin typeface="Be Vietnam Pro" pitchFamily="34" charset="0"/>
-                <a:ea typeface="Be Vietnam Pro" pitchFamily="34" charset="-122"/>
-                <a:cs typeface="Be Vietnam Pro" pitchFamily="34" charset="-120"/>
-              </a:rPr>
-              <a:t> xử</a:t>
-            </a:r>
-            <a:r>
-              <a:rPr lang="en-US" sz="2550" dirty="0" spc="0" kern="0">
-                <a:solidFill>
-                  <a:srgbClr val="F3EEE3"/>
-                </a:solidFill>
-                <a:latin typeface="Be Vietnam Pro" pitchFamily="34" charset="0"/>
-                <a:ea typeface="Be Vietnam Pro" pitchFamily="34" charset="-122"/>
-                <a:cs typeface="Be Vietnam Pro" pitchFamily="34" charset="-120"/>
-              </a:rPr>
-              <a:t> lý ảnh</a:t>
+              <a:t> lặp tính</a:t>
+            </a:r>
+            <a:r>
+              <a:rPr lang="en-US" sz="2550" dirty="0" spc="-12" kern="0">
+                <a:solidFill>
+                  <a:srgbClr val="F3EEE3"/>
+                </a:solidFill>
+                <a:latin typeface="Be Vietnam Pro" pitchFamily="34" charset="0"/>
+                <a:ea typeface="Be Vietnam Pro" pitchFamily="34" charset="-122"/>
+                <a:cs typeface="Be Vietnam Pro" pitchFamily="34" charset="-120"/>
+              </a:rPr>
+              <a:t> toán</a:t>
             </a:r>
             <a:endParaRPr lang="en-US" sz="2550" dirty="0"/>
           </a:p>
@@ -10763,48 +10370,15 @@
               <a:buNone/>
             </a:pPr>
             <a:r>
-              <a:rPr lang="en-US" sz="2550" dirty="0" spc="-37" kern="0">
-                <a:solidFill>
-                  <a:srgbClr val="F3EEE3"/>
-                </a:solidFill>
-                <a:latin typeface="Be Vietnam Pro" pitchFamily="34" charset="0"/>
-                <a:ea typeface="Be Vietnam Pro" pitchFamily="34" charset="-122"/>
-                <a:cs typeface="Be Vietnam Pro" pitchFamily="34" charset="-120"/>
-              </a:rPr>
-              <a:t>Vào</a:t>
-            </a:r>
-            <a:r>
-              <a:rPr lang="en-US" sz="2550" dirty="0" spc="-27" kern="0">
-                <a:solidFill>
-                  <a:srgbClr val="F3EEE3"/>
-                </a:solidFill>
-                <a:latin typeface="Be Vietnam Pro" pitchFamily="34" charset="0"/>
-                <a:ea typeface="Be Vietnam Pro" pitchFamily="34" charset="-122"/>
-                <a:cs typeface="Be Vietnam Pro" pitchFamily="34" charset="-120"/>
-              </a:rPr>
-              <a:t> ra,</a:t>
-            </a:r>
-            <a:r>
-              <a:rPr lang="en-US" sz="2550" dirty="0" spc="17" kern="0">
-                <a:solidFill>
-                  <a:srgbClr val="F3EEE3"/>
-                </a:solidFill>
-                <a:latin typeface="Be Vietnam Pro" pitchFamily="34" charset="0"/>
-                <a:ea typeface="Be Vietnam Pro" pitchFamily="34" charset="-122"/>
-                <a:cs typeface="Be Vietnam Pro" pitchFamily="34" charset="-120"/>
-              </a:rPr>
-              <a:t> độ</a:t>
-            </a:r>
-            <a:r>
-              <a:rPr lang="en-US" sz="2550" dirty="0" spc="-24" kern="0">
-                <a:solidFill>
-                  <a:srgbClr val="F3EEE3"/>
-                </a:solidFill>
-                <a:latin typeface="Be Vietnam Pro" pitchFamily="34" charset="0"/>
-                <a:ea typeface="Be Vietnam Pro" pitchFamily="34" charset="-122"/>
-                <a:cs typeface="Be Vietnam Pro" pitchFamily="34" charset="-120"/>
-              </a:rPr>
-              <a:t> trễ</a:t>
+              <a:rPr lang="en-US" sz="2550" dirty="0" spc="-2" kern="0">
+                <a:solidFill>
+                  <a:srgbClr val="F3EEE3"/>
+                </a:solidFill>
+                <a:latin typeface="Be Vietnam Pro" pitchFamily="34" charset="0"/>
+                <a:ea typeface="Be Vietnam Pro" pitchFamily="34" charset="-122"/>
+                <a:cs typeface="Be Vietnam Pro" pitchFamily="34" charset="-120"/>
+              </a:rPr>
+              <a:t>Thời</a:t>
             </a:r>
             <a:r>
               <a:rPr lang="en-US" sz="2550" dirty="0" spc="0" kern="0">
@@ -10815,7 +10389,18 @@
                 <a:ea typeface="Be Vietnam Pro" pitchFamily="34" charset="-122"/>
                 <a:cs typeface="Be Vietnam Pro" pitchFamily="34" charset="-120"/>
               </a:rPr>
-              <a:t> cao</a:t>
+              <a:t> gian</a:t>
+            </a:r>
+            <a:r>
+              <a:rPr lang="en-US" sz="2550" dirty="0" spc="-1" kern="0">
+                <a:solidFill>
+                  <a:srgbClr val="F3EEE3"/>
+                </a:solidFill>
+                <a:latin typeface="Be Vietnam Pro" pitchFamily="34" charset="0"/>
+                <a:ea typeface="Be Vietnam Pro" pitchFamily="34" charset="-122"/>
+                <a:cs typeface="Be Vietnam Pro" pitchFamily="34" charset="-120"/>
+              </a:rPr>
+              <a:t> chờ</a:t>
             </a:r>
             <a:endParaRPr lang="en-US" sz="2550" dirty="0"/>
           </a:p>
@@ -11724,6 +11309,61 @@
               <a:t> Python</a:t>
             </a:r>
             <a:r>
+              <a:rPr lang="en-US" sz="2850" dirty="0" spc="-1" kern="0">
+                <a:solidFill>
+                  <a:srgbClr val="14161C"/>
+                </a:solidFill>
+                <a:latin typeface="Be Vietnam Pro" pitchFamily="34" charset="0"/>
+                <a:ea typeface="Be Vietnam Pro" pitchFamily="34" charset="-122"/>
+                <a:cs typeface="Be Vietnam Pro" pitchFamily="34" charset="-120"/>
+              </a:rPr>
+              <a:t> nói</a:t>
+            </a:r>
+            <a:r>
+              <a:rPr lang="en-US" sz="2850" dirty="0" spc="0" kern="0">
+                <a:solidFill>
+                  <a:srgbClr val="14161C"/>
+                </a:solidFill>
+                <a:latin typeface="Be Vietnam Pro" pitchFamily="34" charset="0"/>
+                <a:ea typeface="Be Vietnam Pro" pitchFamily="34" charset="-122"/>
+                <a:cs typeface="Be Vietnam Pro" pitchFamily="34" charset="-120"/>
+              </a:rPr>
+              <a:t> gì</a:t>
+            </a:r>
+            <a:r>
+              <a:rPr lang="en-US" sz="2850" dirty="0" spc="-16" kern="0">
+                <a:solidFill>
+                  <a:srgbClr val="14161C"/>
+                </a:solidFill>
+                <a:latin typeface="Be Vietnam Pro" pitchFamily="34" charset="0"/>
+                <a:ea typeface="Be Vietnam Pro" pitchFamily="34" charset="-122"/>
+                <a:cs typeface="Be Vietnam Pro" pitchFamily="34" charset="-120"/>
+              </a:rPr>
+              <a:t> về</a:t>
+            </a:r>
+            <a:r>
+              <a:rPr lang="en-US" sz="2850" dirty="0" spc="3" kern="0">
+                <a:solidFill>
+                  <a:srgbClr val="14161C"/>
+                </a:solidFill>
+                <a:latin typeface="Be Vietnam Pro" pitchFamily="34" charset="0"/>
+                <a:ea typeface="Be Vietnam Pro" pitchFamily="34" charset="-122"/>
+                <a:cs typeface="Be Vietnam Pro" pitchFamily="34" charset="-120"/>
+              </a:rPr>
+              <a:t> hai</a:t>
+            </a:r>
+            <a:r>
+              <a:rPr lang="en-US" sz="2850" dirty="0" spc="0" kern="0">
+                <a:solidFill>
+                  <a:srgbClr val="14161C"/>
+                </a:solidFill>
+                <a:latin typeface="Be Vietnam Pro" pitchFamily="34" charset="0"/>
+                <a:ea typeface="Be Vietnam Pro" pitchFamily="34" charset="-122"/>
+                <a:cs typeface="Be Vietnam Pro" pitchFamily="34" charset="-120"/>
+              </a:rPr>
+              <a:t> khái</a:t>
+            </a:r>
+            <a:r>
               <a:rPr lang="en-US" sz="2850" dirty="0" spc="-2" kern="0">
                 <a:solidFill>
                   <a:srgbClr val="14161C"/>
@@ -11732,73 +11372,7 @@
                 <a:ea typeface="Be Vietnam Pro" pitchFamily="34" charset="-122"/>
                 <a:cs typeface="Be Vietnam Pro" pitchFamily="34" charset="-120"/>
               </a:rPr>
-              <a:t> mô</a:t>
-            </a:r>
-            <a:r>
-              <a:rPr lang="en-US" sz="2850" dirty="0" spc="-19" kern="0">
-                <a:solidFill>
-                  <a:srgbClr val="14161C"/>
-                </a:solidFill>
-                <a:latin typeface="Be Vietnam Pro" pitchFamily="34" charset="0"/>
-                <a:ea typeface="Be Vietnam Pro" pitchFamily="34" charset="-122"/>
-                <a:cs typeface="Be Vietnam Pro" pitchFamily="34" charset="-120"/>
-              </a:rPr>
-              <a:t> tả</a:t>
-            </a:r>
-            <a:r>
-              <a:rPr lang="en-US" sz="2850" dirty="0" spc="2" kern="0">
-                <a:solidFill>
-                  <a:srgbClr val="14161C"/>
-                </a:solidFill>
-                <a:latin typeface="Be Vietnam Pro" pitchFamily="34" charset="0"/>
-                <a:ea typeface="Be Vietnam Pro" pitchFamily="34" charset="-122"/>
-                <a:cs typeface="Be Vietnam Pro" pitchFamily="34" charset="-120"/>
-              </a:rPr>
-              <a:t> lại</a:t>
-            </a:r>
-            <a:r>
-              <a:rPr lang="en-US" sz="2850" dirty="0" spc="3" kern="0">
-                <a:solidFill>
-                  <a:srgbClr val="14161C"/>
-                </a:solidFill>
-                <a:latin typeface="Be Vietnam Pro" pitchFamily="34" charset="0"/>
-                <a:ea typeface="Be Vietnam Pro" pitchFamily="34" charset="-122"/>
-                <a:cs typeface="Be Vietnam Pro" pitchFamily="34" charset="-120"/>
-              </a:rPr>
-              <a:t> hai</a:t>
-            </a:r>
-            <a:r>
-              <a:rPr lang="en-US" sz="2850" dirty="0" spc="0" kern="0">
-                <a:solidFill>
-                  <a:srgbClr val="14161C"/>
-                </a:solidFill>
-                <a:latin typeface="Be Vietnam Pro" pitchFamily="34" charset="0"/>
-                <a:ea typeface="Be Vietnam Pro" pitchFamily="34" charset="-122"/>
-                <a:cs typeface="Be Vietnam Pro" pitchFamily="34" charset="-120"/>
-              </a:rPr>
-              <a:t> khái</a:t>
-            </a:r>
-            <a:r>
-              <a:rPr lang="en-US" sz="2850" dirty="0" spc="-1" kern="0">
-                <a:solidFill>
-                  <a:srgbClr val="14161C"/>
-                </a:solidFill>
-                <a:latin typeface="Be Vietnam Pro" pitchFamily="34" charset="0"/>
-                <a:ea typeface="Be Vietnam Pro" pitchFamily="34" charset="-122"/>
-                <a:cs typeface="Be Vietnam Pro" pitchFamily="34" charset="-120"/>
-              </a:rPr>
-              <a:t> niệm</a:t>
-            </a:r>
-            <a:r>
-              <a:rPr lang="en-US" sz="2850" dirty="0" spc="-8" kern="0">
-                <a:solidFill>
-                  <a:srgbClr val="14161C"/>
-                </a:solidFill>
-                <a:latin typeface="Be Vietnam Pro" pitchFamily="34" charset="0"/>
-                <a:ea typeface="Be Vietnam Pro" pitchFamily="34" charset="-122"/>
-                <a:cs typeface="Be Vietnam Pro" pitchFamily="34" charset="-120"/>
-              </a:rPr>
-              <a:t> này.</a:t>
+              <a:t> niệm?</a:t>
             </a:r>
             <a:endParaRPr lang="en-US" sz="2850" dirty="0"/>
           </a:p>
@@ -11915,15 +11489,48 @@
               <a:t>Vài</a:t>
             </a:r>
             <a:r>
-              <a:rPr lang="en-US" sz="2550" dirty="0" spc="5" kern="0">
-                <a:solidFill>
-                  <a:srgbClr val="14161C"/>
-                </a:solidFill>
-                <a:latin typeface="Be Vietnam Pro" pitchFamily="34" charset="0"/>
-                <a:ea typeface="Be Vietnam Pro" pitchFamily="34" charset="-122"/>
-                <a:cs typeface="Be Vietnam Pro" pitchFamily="34" charset="-120"/>
-              </a:rPr>
-              <a:t> trường</a:t>
+              <a:rPr lang="en-US" sz="2550" dirty="0" spc="-12" kern="0">
+                <a:solidFill>
+                  <a:srgbClr val="14161C"/>
+                </a:solidFill>
+                <a:latin typeface="Be Vietnam Pro" pitchFamily="34" charset="0"/>
+                <a:ea typeface="Be Vietnam Pro" pitchFamily="34" charset="-122"/>
+                <a:cs typeface="Be Vietnam Pro" pitchFamily="34" charset="-120"/>
+              </a:rPr>
+              <a:t> tài</a:t>
+            </a:r>
+            <a:r>
+              <a:rPr lang="en-US" sz="2550" dirty="0" spc="1" kern="0">
+                <a:solidFill>
+                  <a:srgbClr val="14161C"/>
+                </a:solidFill>
+                <a:latin typeface="Be Vietnam Pro" pitchFamily="34" charset="0"/>
+                <a:ea typeface="Be Vietnam Pro" pitchFamily="34" charset="-122"/>
+                <a:cs typeface="Be Vietnam Pro" pitchFamily="34" charset="-120"/>
+              </a:rPr>
+              <a:t> liệu</a:t>
+            </a:r>
+            <a:r>
+              <a:rPr lang="en-US" sz="2550" dirty="0" spc="19" kern="0">
+                <a:solidFill>
+                  <a:srgbClr val="14161C"/>
+                </a:solidFill>
+                <a:latin typeface="Be Vietnam Pro" pitchFamily="34" charset="0"/>
+                <a:ea typeface="Be Vietnam Pro" pitchFamily="34" charset="-122"/>
+                <a:cs typeface="Be Vietnam Pro" pitchFamily="34" charset="-120"/>
+              </a:rPr>
+              <a:t> đã</a:t>
+            </a:r>
+            <a:r>
+              <a:rPr lang="en-US" sz="2550" dirty="0" spc="7" kern="0">
+                <a:solidFill>
+                  <a:srgbClr val="14161C"/>
+                </a:solidFill>
+                <a:latin typeface="Be Vietnam Pro" pitchFamily="34" charset="0"/>
+                <a:ea typeface="Be Vietnam Pro" pitchFamily="34" charset="-122"/>
+                <a:cs typeface="Be Vietnam Pro" pitchFamily="34" charset="-120"/>
+              </a:rPr>
+              <a:t> đọc,</a:t>
             </a:r>
             <a:r>
               <a:rPr lang="en-US" sz="2550" dirty="0" spc="0" kern="0">
@@ -11934,51 +11541,7 @@
                 <a:ea typeface="Be Vietnam Pro" pitchFamily="34" charset="-122"/>
                 <a:cs typeface="Be Vietnam Pro" pitchFamily="34" charset="-120"/>
               </a:rPr>
-              <a:t> hợp</a:t>
-            </a:r>
-            <a:r>
-              <a:rPr lang="en-US" sz="2550" dirty="0" spc="17" kern="0">
-                <a:solidFill>
-                  <a:srgbClr val="14161C"/>
-                </a:solidFill>
-                <a:latin typeface="Be Vietnam Pro" pitchFamily="34" charset="0"/>
-                <a:ea typeface="Be Vietnam Pro" pitchFamily="34" charset="-122"/>
-                <a:cs typeface="Be Vietnam Pro" pitchFamily="34" charset="-120"/>
-              </a:rPr>
-              <a:t> đã</a:t>
-            </a:r>
-            <a:r>
-              <a:rPr lang="en-US" sz="2550" dirty="0" spc="13" kern="0">
-                <a:solidFill>
-                  <a:srgbClr val="14161C"/>
-                </a:solidFill>
-                <a:latin typeface="Be Vietnam Pro" pitchFamily="34" charset="0"/>
-                <a:ea typeface="Be Vietnam Pro" pitchFamily="34" charset="-122"/>
-                <a:cs typeface="Be Vietnam Pro" pitchFamily="34" charset="-120"/>
-              </a:rPr>
-              <a:t> đối</a:t>
-            </a:r>
-            <a:r>
-              <a:rPr lang="en-US" sz="2550" dirty="0" spc="0" kern="0">
-                <a:solidFill>
-                  <a:srgbClr val="14161C"/>
-                </a:solidFill>
-                <a:latin typeface="Be Vietnam Pro" pitchFamily="34" charset="0"/>
-                <a:ea typeface="Be Vietnam Pro" pitchFamily="34" charset="-122"/>
-                <a:cs typeface="Be Vietnam Pro" pitchFamily="34" charset="-120"/>
-              </a:rPr>
-              <a:t> chiếu,</a:t>
-            </a:r>
-            <a:r>
-              <a:rPr lang="en-US" sz="2550" dirty="0" spc="1" kern="0">
-                <a:solidFill>
-                  <a:srgbClr val="14161C"/>
-                </a:solidFill>
-                <a:latin typeface="Be Vietnam Pro" pitchFamily="34" charset="0"/>
-                <a:ea typeface="Be Vietnam Pro" pitchFamily="34" charset="-122"/>
-                <a:cs typeface="Be Vietnam Pro" pitchFamily="34" charset="-120"/>
-              </a:rPr>
-              <a:t> không</a:t>
+              <a:t> không phải</a:t>
             </a:r>
             <a:r>
               <a:rPr lang="en-US" sz="2550" dirty="0" spc="-1" kern="0">
@@ -11989,21 +11552,10 @@
                 <a:ea typeface="Be Vietnam Pro" pitchFamily="34" charset="-122"/>
                 <a:cs typeface="Be Vietnam Pro" pitchFamily="34" charset="-120"/>
               </a:rPr>
-              <a:t> phải</a:t>
-            </a:r>
-            <a:r>
-              <a:rPr lang="en-US" sz="2550" dirty="0" spc="0" kern="0">
-                <a:solidFill>
-                  <a:srgbClr val="14161C"/>
-                </a:solidFill>
-                <a:latin typeface="Be Vietnam Pro" pitchFamily="34" charset="0"/>
-                <a:ea typeface="Be Vietnam Pro" pitchFamily="34" charset="-122"/>
-                <a:cs typeface="Be Vietnam Pro" pitchFamily="34" charset="-120"/>
-              </a:rPr>
               <a:t> danh</a:t>
             </a:r>
             <a:r>
-              <a:rPr lang="en-US" sz="2550" dirty="0" spc="-6" kern="0">
+              <a:rPr lang="en-US" sz="2550" dirty="0" spc="-5" kern="0">
                 <a:solidFill>
                   <a:srgbClr val="14161C"/>
                 </a:solidFill>
@@ -13791,36 +13343,38 @@
               <a:buNone/>
             </a:pPr>
             <a:r>
-              <a:rPr lang="en-US" sz="2850" b="1" dirty="0" spc="-7" kern="0">
-                <a:solidFill>
-                  <a:srgbClr val="7C93FF"/>
-                </a:solidFill>
-                <a:latin typeface="Be Vietnam Pro" pitchFamily="34" charset="0"/>
-                <a:ea typeface="Be Vietnam Pro" pitchFamily="34" charset="-122"/>
-                <a:cs typeface="Be Vietnam Pro" pitchFamily="34" charset="-120"/>
-              </a:rPr>
-              <a:t>Đồng</a:t>
-            </a:r>
-            <a:r>
-              <a:rPr lang="en-US" sz="2850" b="1" dirty="0" spc="2" kern="0">
-                <a:solidFill>
-                  <a:srgbClr val="7C93FF"/>
-                </a:solidFill>
-                <a:latin typeface="Be Vietnam Pro" pitchFamily="34" charset="0"/>
-                <a:ea typeface="Be Vietnam Pro" pitchFamily="34" charset="-122"/>
-                <a:cs typeface="Be Vietnam Pro" pitchFamily="34" charset="-120"/>
-              </a:rPr>
-              <a:t> thời</a:t>
-            </a:r>
-            <a:pPr algn="l" indent="0" marL="0">
-              <a:lnSpc>
-                <a:spcPts val="3990"/>
-              </a:lnSpc>
-              <a:spcAft>
-                <a:spcPts val="1050"/>
-              </a:spcAft>
-              <a:buNone/>
-            </a:pPr>
+              <a:rPr lang="en-US" sz="2850" dirty="0" spc="-4" kern="0">
+                <a:solidFill>
+                  <a:srgbClr val="F3EEE3"/>
+                </a:solidFill>
+                <a:latin typeface="Be Vietnam Pro" pitchFamily="34" charset="0"/>
+                <a:ea typeface="Be Vietnam Pro" pitchFamily="34" charset="-122"/>
+                <a:cs typeface="Be Vietnam Pro" pitchFamily="34" charset="-120"/>
+              </a:rPr>
+              <a:t>Số</a:t>
+            </a:r>
+            <a:r>
+              <a:rPr lang="en-US" sz="2850" dirty="0" spc="22" kern="0">
+                <a:solidFill>
+                  <a:srgbClr val="F3EEE3"/>
+                </a:solidFill>
+                <a:latin typeface="Be Vietnam Pro" pitchFamily="34" charset="0"/>
+                <a:ea typeface="Be Vietnam Pro" pitchFamily="34" charset="-122"/>
+                <a:cs typeface="Be Vietnam Pro" pitchFamily="34" charset="-120"/>
+              </a:rPr>
+              <a:t> đo</a:t>
+            </a:r>
+            <a:r>
+              <a:rPr lang="en-US" sz="2850" dirty="0" spc="1" kern="0">
+                <a:solidFill>
+                  <a:srgbClr val="F3EEE3"/>
+                </a:solidFill>
+                <a:latin typeface="Be Vietnam Pro" pitchFamily="34" charset="0"/>
+                <a:ea typeface="Be Vietnam Pro" pitchFamily="34" charset="-122"/>
+                <a:cs typeface="Be Vietnam Pro" pitchFamily="34" charset="-120"/>
+              </a:rPr>
+              <a:t> của</a:t>
+            </a:r>
             <a:r>
               <a:rPr lang="en-US" sz="2850" dirty="0" spc="3" kern="0">
                 <a:solidFill>
@@ -13830,54 +13384,32 @@
                 <a:ea typeface="Be Vietnam Pro" pitchFamily="34" charset="-122"/>
                 <a:cs typeface="Be Vietnam Pro" pitchFamily="34" charset="-120"/>
               </a:rPr>
-              <a:t>:</a:t>
-            </a:r>
-            <a:r>
-              <a:rPr lang="en-US" sz="2850" dirty="0" spc="-3" kern="0">
-                <a:solidFill>
-                  <a:srgbClr val="F3EEE3"/>
-                </a:solidFill>
-                <a:latin typeface="Be Vietnam Pro" pitchFamily="34" charset="0"/>
-                <a:ea typeface="Be Vietnam Pro" pitchFamily="34" charset="-122"/>
-                <a:cs typeface="Be Vietnam Pro" pitchFamily="34" charset="-120"/>
-              </a:rPr>
-              <a:t> không</a:t>
-            </a:r>
-            <a:r>
-              <a:rPr lang="en-US" sz="2850" dirty="0" spc="-12" kern="0">
-                <a:solidFill>
-                  <a:srgbClr val="F3EEE3"/>
-                </a:solidFill>
-                <a:latin typeface="Be Vietnam Pro" pitchFamily="34" charset="0"/>
-                <a:ea typeface="Be Vietnam Pro" pitchFamily="34" charset="-122"/>
-                <a:cs typeface="Be Vietnam Pro" pitchFamily="34" charset="-120"/>
-              </a:rPr>
-              <a:t> nhất</a:t>
-            </a:r>
-            <a:r>
-              <a:rPr lang="en-US" sz="2850" dirty="0" spc="-6" kern="0">
-                <a:solidFill>
-                  <a:srgbClr val="F3EEE3"/>
-                </a:solidFill>
-                <a:latin typeface="Be Vietnam Pro" pitchFamily="34" charset="0"/>
-                <a:ea typeface="Be Vietnam Pro" pitchFamily="34" charset="-122"/>
-                <a:cs typeface="Be Vietnam Pro" pitchFamily="34" charset="-120"/>
-              </a:rPr>
-              <a:t> thiết</a:t>
-            </a:r>
-            <a:r>
-              <a:rPr lang="en-US" sz="2850" dirty="0" spc="-2" kern="0">
-                <a:solidFill>
-                  <a:srgbClr val="F3EEE3"/>
-                </a:solidFill>
-                <a:latin typeface="Be Vietnam Pro" pitchFamily="34" charset="0"/>
-                <a:ea typeface="Be Vietnam Pro" pitchFamily="34" charset="-122"/>
-                <a:cs typeface="Be Vietnam Pro" pitchFamily="34" charset="-120"/>
-              </a:rPr>
-              <a:t> cùng</a:t>
-            </a:r>
-            <a:r>
-              <a:rPr lang="en-US" sz="2850" dirty="0" spc="-9" kern="0">
+              <a:t> hai</a:t>
+            </a:r>
+            <a:r>
+              <a:rPr lang="en-US" sz="2850" dirty="0" spc="1" kern="0">
+                <a:solidFill>
+                  <a:srgbClr val="F3EEE3"/>
+                </a:solidFill>
+                <a:latin typeface="Be Vietnam Pro" pitchFamily="34" charset="0"/>
+                <a:ea typeface="Be Vietnam Pro" pitchFamily="34" charset="-122"/>
+                <a:cs typeface="Be Vietnam Pro" pitchFamily="34" charset="-120"/>
+              </a:rPr>
+              <a:t> lần</a:t>
+            </a:r>
+            <a:r>
+              <a:rPr lang="en-US" sz="2850" dirty="0" spc="-7" kern="0">
+                <a:solidFill>
+                  <a:srgbClr val="F3EEE3"/>
+                </a:solidFill>
+                <a:latin typeface="Be Vietnam Pro" pitchFamily="34" charset="0"/>
+                <a:ea typeface="Be Vietnam Pro" pitchFamily="34" charset="-122"/>
+                <a:cs typeface="Be Vietnam Pro" pitchFamily="34" charset="-120"/>
+              </a:rPr>
+              <a:t> chạy,</a:t>
+            </a:r>
+            <a:r>
+              <a:rPr lang="en-US" sz="2850" dirty="0" spc="-10" kern="0">
                 <a:solidFill>
                   <a:srgbClr val="F3EEE3"/>
                 </a:solidFill>
@@ -13888,26 +13420,15 @@
               <a:t> một</a:t>
             </a:r>
             <a:r>
-              <a:rPr lang="en-US" sz="2850" dirty="0" spc="-3" kern="0">
-                <a:solidFill>
-                  <a:srgbClr val="F3EEE3"/>
-                </a:solidFill>
-                <a:latin typeface="Be Vietnam Pro" pitchFamily="34" charset="0"/>
-                <a:ea typeface="Be Vietnam Pro" pitchFamily="34" charset="-122"/>
-                <a:cs typeface="Be Vietnam Pro" pitchFamily="34" charset="-120"/>
-              </a:rPr>
-              <a:t> khoảnh</a:t>
-            </a:r>
-            <a:r>
-              <a:rPr lang="en-US" sz="2850" dirty="0" spc="0" kern="0">
-                <a:solidFill>
-                  <a:srgbClr val="F3EEE3"/>
-                </a:solidFill>
-                <a:latin typeface="Be Vietnam Pro" pitchFamily="34" charset="0"/>
-                <a:ea typeface="Be Vietnam Pro" pitchFamily="34" charset="-122"/>
-                <a:cs typeface="Be Vietnam Pro" pitchFamily="34" charset="-120"/>
-              </a:rPr>
-              <a:t> khắc.</a:t>
+              <a:rPr lang="en-US" sz="2850" dirty="0" spc="-8" kern="0">
+                <a:solidFill>
+                  <a:srgbClr val="F3EEE3"/>
+                </a:solidFill>
+                <a:latin typeface="Be Vietnam Pro" pitchFamily="34" charset="0"/>
+                <a:ea typeface="Be Vietnam Pro" pitchFamily="34" charset="-122"/>
+                <a:cs typeface="Be Vietnam Pro" pitchFamily="34" charset="-120"/>
+              </a:rPr>
+              <a:t> máy.</a:t>
             </a:r>
             <a:endParaRPr lang="en-US" sz="2850" dirty="0"/>
           </a:p>
@@ -13919,76 +13440,37 @@
               <a:buNone/>
             </a:pPr>
             <a:r>
-              <a:rPr lang="en-US" sz="2850" b="1" dirty="0" spc="-7" kern="0">
-                <a:solidFill>
-                  <a:srgbClr val="3DD6A0"/>
-                </a:solidFill>
-                <a:latin typeface="Be Vietnam Pro" pitchFamily="34" charset="0"/>
-                <a:ea typeface="Be Vietnam Pro" pitchFamily="34" charset="-122"/>
-                <a:cs typeface="Be Vietnam Pro" pitchFamily="34" charset="-120"/>
-              </a:rPr>
-              <a:t>Song</a:t>
-            </a:r>
-            <a:r>
-              <a:rPr lang="en-US" sz="2850" b="1" dirty="0" spc="-5" kern="0">
-                <a:solidFill>
-                  <a:srgbClr val="3DD6A0"/>
-                </a:solidFill>
-                <a:latin typeface="Be Vietnam Pro" pitchFamily="34" charset="0"/>
-                <a:ea typeface="Be Vietnam Pro" pitchFamily="34" charset="-122"/>
-                <a:cs typeface="Be Vietnam Pro" pitchFamily="34" charset="-120"/>
-              </a:rPr>
-              <a:t> song</a:t>
-            </a:r>
-            <a:pPr algn="l" indent="0" marL="0">
-              <a:lnSpc>
-                <a:spcPts val="3990"/>
-              </a:lnSpc>
-              <a:buNone/>
-            </a:pPr>
-            <a:r>
-              <a:rPr lang="en-US" sz="2850" dirty="0" spc="3" kern="0">
-                <a:solidFill>
-                  <a:srgbClr val="F3EEE3"/>
-                </a:solidFill>
-                <a:latin typeface="Be Vietnam Pro" pitchFamily="34" charset="0"/>
-                <a:ea typeface="Be Vietnam Pro" pitchFamily="34" charset="-122"/>
-                <a:cs typeface="Be Vietnam Pro" pitchFamily="34" charset="-120"/>
-              </a:rPr>
-              <a:t>:</a:t>
-            </a:r>
-            <a:r>
-              <a:rPr lang="en-US" sz="2850" dirty="0" spc="-9" kern="0">
-                <a:solidFill>
-                  <a:srgbClr val="F3EEE3"/>
-                </a:solidFill>
-                <a:latin typeface="Be Vietnam Pro" pitchFamily="34" charset="0"/>
-                <a:ea typeface="Be Vietnam Pro" pitchFamily="34" charset="-122"/>
-                <a:cs typeface="Be Vietnam Pro" pitchFamily="34" charset="-120"/>
-              </a:rPr>
-              <a:t> chạy</a:t>
-            </a:r>
-            <a:r>
-              <a:rPr lang="en-US" sz="2850" dirty="0" spc="-2" kern="0">
-                <a:solidFill>
-                  <a:srgbClr val="F3EEE3"/>
-                </a:solidFill>
-                <a:latin typeface="Be Vietnam Pro" pitchFamily="34" charset="0"/>
-                <a:ea typeface="Be Vietnam Pro" pitchFamily="34" charset="-122"/>
-                <a:cs typeface="Be Vietnam Pro" pitchFamily="34" charset="-120"/>
-              </a:rPr>
-              <a:t> cùng</a:t>
-            </a:r>
-            <a:r>
-              <a:rPr lang="en-US" sz="2850" dirty="0" spc="-9" kern="0">
-                <a:solidFill>
-                  <a:srgbClr val="F3EEE3"/>
-                </a:solidFill>
-                <a:latin typeface="Be Vietnam Pro" pitchFamily="34" charset="0"/>
-                <a:ea typeface="Be Vietnam Pro" pitchFamily="34" charset="-122"/>
-                <a:cs typeface="Be Vietnam Pro" pitchFamily="34" charset="-120"/>
-              </a:rPr>
-              <a:t> một</a:t>
+              <a:rPr lang="en-US" sz="2850" dirty="0" spc="8" kern="0">
+                <a:solidFill>
+                  <a:srgbClr val="F3EEE3"/>
+                </a:solidFill>
+                <a:latin typeface="Be Vietnam Pro" pitchFamily="34" charset="0"/>
+                <a:ea typeface="Be Vietnam Pro" pitchFamily="34" charset="-122"/>
+                <a:cs typeface="Be Vietnam Pro" pitchFamily="34" charset="-120"/>
+              </a:rPr>
+              <a:t>Python</a:t>
+            </a:r>
+            <a:r>
+              <a:rPr lang="en-US" sz="2850" dirty="0" spc="2" kern="0">
+                <a:solidFill>
+                  <a:srgbClr val="F3EEE3"/>
+                </a:solidFill>
+                <a:latin typeface="Be Vietnam Pro" pitchFamily="34" charset="0"/>
+                <a:ea typeface="Be Vietnam Pro" pitchFamily="34" charset="-122"/>
+                <a:cs typeface="Be Vietnam Pro" pitchFamily="34" charset="-120"/>
+              </a:rPr>
+              <a:t> 3.13.16,</a:t>
+            </a:r>
+            <a:r>
+              <a:rPr lang="en-US" sz="2850" dirty="0" spc="-5" kern="0">
+                <a:solidFill>
+                  <a:srgbClr val="F3EEE3"/>
+                </a:solidFill>
+                <a:latin typeface="Be Vietnam Pro" pitchFamily="34" charset="0"/>
+                <a:ea typeface="Be Vietnam Pro" pitchFamily="34" charset="-122"/>
+                <a:cs typeface="Be Vietnam Pro" pitchFamily="34" charset="-120"/>
+              </a:rPr>
+              <a:t> bốn</a:t>
             </a:r>
             <a:r>
               <a:rPr lang="en-US" sz="2850" dirty="0" spc="1" kern="0">
@@ -13999,7 +13481,7 @@
                 <a:ea typeface="Be Vietnam Pro" pitchFamily="34" charset="-122"/>
                 <a:cs typeface="Be Vietnam Pro" pitchFamily="34" charset="-120"/>
               </a:rPr>
-              <a:t> lúc.</a:t>
+              <a:t> lõi.</a:t>
             </a:r>
             <a:endParaRPr lang="en-US" sz="2850" dirty="0"/>
           </a:p>
@@ -14105,15 +13587,37 @@
               <a:buNone/>
             </a:pPr>
             <a:r>
-              <a:rPr lang="en-US" sz="2550" dirty="0" spc="-2" kern="0">
-                <a:solidFill>
-                  <a:srgbClr val="F3EEE3"/>
-                </a:solidFill>
-                <a:latin typeface="Be Vietnam Pro" pitchFamily="34" charset="0"/>
-                <a:ea typeface="Be Vietnam Pro" pitchFamily="34" charset="-122"/>
-                <a:cs typeface="Be Vietnam Pro" pitchFamily="34" charset="-120"/>
-              </a:rPr>
-              <a:t>Chữ</a:t>
+              <a:rPr lang="en-US" sz="2550" dirty="0" spc="-5" kern="0">
+                <a:solidFill>
+                  <a:srgbClr val="F3EEE3"/>
+                </a:solidFill>
+                <a:latin typeface="Be Vietnam Pro" pitchFamily="34" charset="0"/>
+                <a:ea typeface="Be Vietnam Pro" pitchFamily="34" charset="-122"/>
+                <a:cs typeface="Be Vietnam Pro" pitchFamily="34" charset="-120"/>
+              </a:rPr>
+              <a:t>Đọc</a:t>
+            </a:r>
+            <a:r>
+              <a:rPr lang="en-US" sz="2550" dirty="0" spc="2" kern="0">
+                <a:solidFill>
+                  <a:srgbClr val="F3EEE3"/>
+                </a:solidFill>
+                <a:latin typeface="Be Vietnam Pro" pitchFamily="34" charset="0"/>
+                <a:ea typeface="Be Vietnam Pro" pitchFamily="34" charset="-122"/>
+                <a:cs typeface="Be Vietnam Pro" pitchFamily="34" charset="-120"/>
+              </a:rPr>
+              <a:t> tỉ</a:t>
+            </a:r>
+            <a:r>
+              <a:rPr lang="en-US" sz="2550" dirty="0" spc="1" kern="0">
+                <a:solidFill>
+                  <a:srgbClr val="F3EEE3"/>
+                </a:solidFill>
+                <a:latin typeface="Be Vietnam Pro" pitchFamily="34" charset="0"/>
+                <a:ea typeface="Be Vietnam Pro" pitchFamily="34" charset="-122"/>
+                <a:cs typeface="Be Vietnam Pro" pitchFamily="34" charset="-120"/>
+              </a:rPr>
+              <a:t> lệ</a:t>
             </a:r>
             <a:r>
               <a:rPr lang="en-US" sz="2550" dirty="0" spc="-1" kern="0">
@@ -14124,7 +13628,18 @@
                 <a:ea typeface="Be Vietnam Pro" pitchFamily="34" charset="-122"/>
                 <a:cs typeface="Be Vietnam Pro" pitchFamily="34" charset="-120"/>
               </a:rPr>
-              <a:t> "cùng lúc"</a:t>
+              <a:t> hơn</a:t>
+            </a:r>
+            <a:r>
+              <a:rPr lang="en-US" sz="2550" dirty="0" spc="20" kern="0">
+                <a:solidFill>
+                  <a:srgbClr val="F3EEE3"/>
+                </a:solidFill>
+                <a:latin typeface="Be Vietnam Pro" pitchFamily="34" charset="0"/>
+                <a:ea typeface="Be Vietnam Pro" pitchFamily="34" charset="-122"/>
+                <a:cs typeface="Be Vietnam Pro" pitchFamily="34" charset="-120"/>
+              </a:rPr>
+              <a:t> từng</a:t>
             </a:r>
             <a:r>
               <a:rPr lang="en-US" sz="2550" dirty="0" spc="0" kern="0">
@@ -14135,106 +13650,18 @@
                 <a:ea typeface="Be Vietnam Pro" pitchFamily="34" charset="-122"/>
                 <a:cs typeface="Be Vietnam Pro" pitchFamily="34" charset="-120"/>
               </a:rPr>
-              <a:t> dễ</a:t>
-            </a:r>
-            <a:r>
-              <a:rPr lang="en-US" sz="2550" dirty="0" spc="-22" kern="0">
-                <a:solidFill>
-                  <a:srgbClr val="F3EEE3"/>
-                </a:solidFill>
-                <a:latin typeface="Be Vietnam Pro" pitchFamily="34" charset="0"/>
-                <a:ea typeface="Be Vietnam Pro" pitchFamily="34" charset="-122"/>
-                <a:cs typeface="Be Vietnam Pro" pitchFamily="34" charset="-120"/>
-              </a:rPr>
-              <a:t> gây</a:t>
-            </a:r>
-            <a:r>
-              <a:rPr lang="en-US" sz="2550" dirty="0" spc="1" kern="0">
-                <a:solidFill>
-                  <a:srgbClr val="F3EEE3"/>
-                </a:solidFill>
-                <a:latin typeface="Be Vietnam Pro" pitchFamily="34" charset="0"/>
-                <a:ea typeface="Be Vietnam Pro" pitchFamily="34" charset="-122"/>
-                <a:cs typeface="Be Vietnam Pro" pitchFamily="34" charset="-120"/>
-              </a:rPr>
-              <a:t> lẫn.</a:t>
-            </a:r>
-            <a:r>
-              <a:rPr lang="en-US" sz="2550" dirty="0" spc="-4" kern="0">
-                <a:solidFill>
-                  <a:srgbClr val="F3EEE3"/>
-                </a:solidFill>
-                <a:latin typeface="Be Vietnam Pro" pitchFamily="34" charset="0"/>
-                <a:ea typeface="Be Vietnam Pro" pitchFamily="34" charset="-122"/>
-                <a:cs typeface="Be Vietnam Pro" pitchFamily="34" charset="-120"/>
-              </a:rPr>
-              <a:t> Đọc</a:t>
-            </a:r>
-            <a:r>
-              <a:rPr lang="en-US" sz="2550" dirty="0" spc="1" kern="0">
-                <a:solidFill>
-                  <a:srgbClr val="F3EEE3"/>
-                </a:solidFill>
-                <a:latin typeface="Be Vietnam Pro" pitchFamily="34" charset="0"/>
-                <a:ea typeface="Be Vietnam Pro" pitchFamily="34" charset="-122"/>
-                <a:cs typeface="Be Vietnam Pro" pitchFamily="34" charset="-120"/>
-              </a:rPr>
-              <a:t> kỹ</a:t>
-            </a:r>
-            <a:r>
-              <a:rPr lang="en-US" sz="2550" dirty="0" spc="18" kern="0">
-                <a:solidFill>
-                  <a:srgbClr val="F3EEE3"/>
-                </a:solidFill>
-                <a:latin typeface="Be Vietnam Pro" pitchFamily="34" charset="0"/>
-                <a:ea typeface="Be Vietnam Pro" pitchFamily="34" charset="-122"/>
-                <a:cs typeface="Be Vietnam Pro" pitchFamily="34" charset="-120"/>
-              </a:rPr>
-              <a:t> để</a:t>
-            </a:r>
-            <a:r>
-              <a:rPr lang="en-US" sz="2550" dirty="0" spc="0" kern="0">
-                <a:solidFill>
-                  <a:srgbClr val="F3EEE3"/>
-                </a:solidFill>
-                <a:latin typeface="Be Vietnam Pro" pitchFamily="34" charset="0"/>
-                <a:ea typeface="Be Vietnam Pro" pitchFamily="34" charset="-122"/>
-                <a:cs typeface="Be Vietnam Pro" pitchFamily="34" charset="-120"/>
-              </a:rPr>
-              <a:t> khỏi lẫn</a:t>
-            </a:r>
-            <a:r>
-              <a:rPr lang="en-US" sz="2550" dirty="0" spc="-1" kern="0">
-                <a:solidFill>
-                  <a:srgbClr val="F3EEE3"/>
-                </a:solidFill>
-                <a:latin typeface="Be Vietnam Pro" pitchFamily="34" charset="0"/>
-                <a:ea typeface="Be Vietnam Pro" pitchFamily="34" charset="-122"/>
-                <a:cs typeface="Be Vietnam Pro" pitchFamily="34" charset="-120"/>
-              </a:rPr>
-              <a:t> hai</a:t>
-            </a:r>
-            <a:r>
-              <a:rPr lang="en-US" sz="2550" dirty="0" spc="0" kern="0">
-                <a:solidFill>
-                  <a:srgbClr val="F3EEE3"/>
-                </a:solidFill>
-                <a:latin typeface="Be Vietnam Pro" pitchFamily="34" charset="0"/>
-                <a:ea typeface="Be Vietnam Pro" pitchFamily="34" charset="-122"/>
-                <a:cs typeface="Be Vietnam Pro" pitchFamily="34" charset="-120"/>
-              </a:rPr>
-              <a:t> khái</a:t>
-            </a:r>
-            <a:r>
-              <a:rPr lang="en-US" sz="2550" dirty="0" spc="1" kern="0">
-                <a:solidFill>
-                  <a:srgbClr val="F3EEE3"/>
-                </a:solidFill>
-                <a:latin typeface="Be Vietnam Pro" pitchFamily="34" charset="0"/>
-                <a:ea typeface="Be Vietnam Pro" pitchFamily="34" charset="-122"/>
-                <a:cs typeface="Be Vietnam Pro" pitchFamily="34" charset="-120"/>
-              </a:rPr>
-              <a:t> niệm.</a:t>
+              <a:t> con</a:t>
+            </a:r>
+            <a:r>
+              <a:rPr lang="en-US" sz="2550" dirty="0" spc="-7" kern="0">
+                <a:solidFill>
+                  <a:srgbClr val="F3EEE3"/>
+                </a:solidFill>
+                <a:latin typeface="Be Vietnam Pro" pitchFamily="34" charset="0"/>
+                <a:ea typeface="Be Vietnam Pro" pitchFamily="34" charset="-122"/>
+                <a:cs typeface="Be Vietnam Pro" pitchFamily="34" charset="-120"/>
+              </a:rPr>
+              <a:t> số.</a:t>
             </a:r>
             <a:endParaRPr lang="en-US" sz="2550" dirty="0"/>
           </a:p>
@@ -14360,15 +13787,15 @@
               <a:buNone/>
             </a:pPr>
             <a:r>
-              <a:rPr lang="en-US" sz="2550" dirty="0" spc="2" kern="0">
-                <a:solidFill>
-                  <a:srgbClr val="F3EEE3"/>
-                </a:solidFill>
-                <a:latin typeface="Be Vietnam Pro" pitchFamily="34" charset="0"/>
-                <a:ea typeface="Be Vietnam Pro" pitchFamily="34" charset="-122"/>
-                <a:cs typeface="Be Vietnam Pro" pitchFamily="34" charset="-120"/>
-              </a:rPr>
-              <a:t>Nguồn</a:t>
+              <a:rPr lang="en-US" sz="2550" dirty="0" spc="-3" kern="0">
+                <a:solidFill>
+                  <a:srgbClr val="F3EEE3"/>
+                </a:solidFill>
+                <a:latin typeface="Be Vietnam Pro" pitchFamily="34" charset="0"/>
+                <a:ea typeface="Be Vietnam Pro" pitchFamily="34" charset="-122"/>
+                <a:cs typeface="Be Vietnam Pro" pitchFamily="34" charset="-120"/>
+              </a:rPr>
+              <a:t>Việc</a:t>
             </a:r>
             <a:r>
               <a:rPr lang="en-US" sz="2550" dirty="0" spc="0" kern="0">
@@ -14379,9 +13806,53 @@
                 <a:ea typeface="Be Vietnam Pro" pitchFamily="34" charset="-122"/>
                 <a:cs typeface="Be Vietnam Pro" pitchFamily="34" charset="-120"/>
               </a:rPr>
+              <a:t> chờ</a:t>
+            </a:r>
+            <a:r>
+              <a:rPr lang="en-US" sz="2550" dirty="0" spc="1" kern="0">
+                <a:solidFill>
+                  <a:srgbClr val="F3EEE3"/>
+                </a:solidFill>
+                <a:latin typeface="Be Vietnam Pro" pitchFamily="34" charset="0"/>
+                <a:ea typeface="Be Vietnam Pro" pitchFamily="34" charset="-122"/>
+                <a:cs typeface="Be Vietnam Pro" pitchFamily="34" charset="-120"/>
+              </a:rPr>
+              <a:t> giả</a:t>
+            </a:r>
+            <a:r>
+              <a:rPr lang="en-US" sz="2550" dirty="0" spc="-2" kern="0">
+                <a:solidFill>
+                  <a:srgbClr val="F3EEE3"/>
+                </a:solidFill>
+                <a:latin typeface="Be Vietnam Pro" pitchFamily="34" charset="0"/>
+                <a:ea typeface="Be Vietnam Pro" pitchFamily="34" charset="-122"/>
+                <a:cs typeface="Be Vietnam Pro" pitchFamily="34" charset="-120"/>
+              </a:rPr>
+              <a:t> bằng sleep,</a:t>
+            </a:r>
+            <a:r>
+              <a:rPr lang="en-US" sz="2550" dirty="0" spc="0" kern="0">
+                <a:solidFill>
+                  <a:srgbClr val="F3EEE3"/>
+                </a:solidFill>
+                <a:latin typeface="Be Vietnam Pro" pitchFamily="34" charset="0"/>
+                <a:ea typeface="Be Vietnam Pro" pitchFamily="34" charset="-122"/>
+                <a:cs typeface="Be Vietnam Pro" pitchFamily="34" charset="-120"/>
+              </a:rPr>
               <a:t> không</a:t>
             </a:r>
             <a:r>
+              <a:rPr lang="en-US" sz="2550" dirty="0" spc="-1" kern="0">
+                <a:solidFill>
+                  <a:srgbClr val="F3EEE3"/>
+                </a:solidFill>
+                <a:latin typeface="Be Vietnam Pro" pitchFamily="34" charset="0"/>
+                <a:ea typeface="Be Vietnam Pro" pitchFamily="34" charset="-122"/>
+                <a:cs typeface="Be Vietnam Pro" pitchFamily="34" charset="-120"/>
+              </a:rPr>
+              <a:t> phải</a:t>
+            </a:r>
+            <a:r>
               <a:rPr lang="en-US" sz="2550" dirty="0" spc="1" kern="0">
                 <a:solidFill>
                   <a:srgbClr val="F3EEE3"/>
@@ -14390,95 +13861,18 @@
                 <a:ea typeface="Be Vietnam Pro" pitchFamily="34" charset="-122"/>
                 <a:cs typeface="Be Vietnam Pro" pitchFamily="34" charset="-120"/>
               </a:rPr>
-              <a:t> có</a:t>
-            </a:r>
-            <a:r>
-              <a:rPr lang="en-US" sz="2550" dirty="0" spc="0" kern="0">
-                <a:solidFill>
-                  <a:srgbClr val="F3EEE3"/>
-                </a:solidFill>
-                <a:latin typeface="Be Vietnam Pro" pitchFamily="34" charset="0"/>
-                <a:ea typeface="Be Vietnam Pro" pitchFamily="34" charset="-122"/>
-                <a:cs typeface="Be Vietnam Pro" pitchFamily="34" charset="-120"/>
-              </a:rPr>
-              <a:t> mã,</a:t>
-            </a:r>
-            <a:r>
-              <a:rPr lang="en-US" sz="2550" dirty="0" spc="-10" kern="0">
-                <a:solidFill>
-                  <a:srgbClr val="F3EEE3"/>
-                </a:solidFill>
-                <a:latin typeface="Be Vietnam Pro" pitchFamily="34" charset="0"/>
-                <a:ea typeface="Be Vietnam Pro" pitchFamily="34" charset="-122"/>
-                <a:cs typeface="Be Vietnam Pro" pitchFamily="34" charset="-120"/>
-              </a:rPr>
-              <a:t> số</a:t>
-            </a:r>
-            <a:r>
-              <a:rPr lang="en-US" sz="2550" dirty="0" spc="17" kern="0">
-                <a:solidFill>
-                  <a:srgbClr val="F3EEE3"/>
-                </a:solidFill>
-                <a:latin typeface="Be Vietnam Pro" pitchFamily="34" charset="0"/>
-                <a:ea typeface="Be Vietnam Pro" pitchFamily="34" charset="-122"/>
-                <a:cs typeface="Be Vietnam Pro" pitchFamily="34" charset="-120"/>
-              </a:rPr>
-              <a:t> đo</a:t>
-            </a:r>
-            <a:r>
-              <a:rPr lang="en-US" sz="2550" dirty="0" spc="-11" kern="0">
-                <a:solidFill>
-                  <a:srgbClr val="F3EEE3"/>
-                </a:solidFill>
-                <a:latin typeface="Be Vietnam Pro" pitchFamily="34" charset="0"/>
-                <a:ea typeface="Be Vietnam Pro" pitchFamily="34" charset="-122"/>
-                <a:cs typeface="Be Vietnam Pro" pitchFamily="34" charset="-120"/>
-              </a:rPr>
-              <a:t> hay</a:t>
-            </a:r>
-            <a:r>
-              <a:rPr lang="en-US" sz="2550" dirty="0" spc="-1" kern="0">
-                <a:solidFill>
-                  <a:srgbClr val="F3EEE3"/>
-                </a:solidFill>
-                <a:latin typeface="Be Vietnam Pro" pitchFamily="34" charset="0"/>
-                <a:ea typeface="Be Vietnam Pro" pitchFamily="34" charset="-122"/>
-                <a:cs typeface="Be Vietnam Pro" pitchFamily="34" charset="-120"/>
-              </a:rPr>
-              <a:t> ví</a:t>
-            </a:r>
-            <a:r>
-              <a:rPr lang="en-US" sz="2550" dirty="0" spc="-2" kern="0">
-                <a:solidFill>
-                  <a:srgbClr val="F3EEE3"/>
-                </a:solidFill>
-                <a:latin typeface="Be Vietnam Pro" pitchFamily="34" charset="0"/>
-                <a:ea typeface="Be Vietnam Pro" pitchFamily="34" charset="-122"/>
-                <a:cs typeface="Be Vietnam Pro" pitchFamily="34" charset="-120"/>
-              </a:rPr>
-              <a:t> dụ</a:t>
-            </a:r>
-            <a:r>
-              <a:rPr lang="en-US" sz="2550" dirty="0" spc="-7" kern="0">
-                <a:solidFill>
-                  <a:srgbClr val="F3EEE3"/>
-                </a:solidFill>
-                <a:latin typeface="Be Vietnam Pro" pitchFamily="34" charset="0"/>
-                <a:ea typeface="Be Vietnam Pro" pitchFamily="34" charset="-122"/>
-                <a:cs typeface="Be Vietnam Pro" pitchFamily="34" charset="-120"/>
-              </a:rPr>
-              <a:t> chạy</a:t>
-            </a:r>
-            <a:r>
-              <a:rPr lang="en-US" sz="2550" dirty="0" spc="6" kern="0">
-                <a:solidFill>
-                  <a:srgbClr val="F3EEE3"/>
-                </a:solidFill>
-                <a:latin typeface="Be Vietnam Pro" pitchFamily="34" charset="0"/>
-                <a:ea typeface="Be Vietnam Pro" pitchFamily="34" charset="-122"/>
-                <a:cs typeface="Be Vietnam Pro" pitchFamily="34" charset="-120"/>
-              </a:rPr>
-              <a:t> được.</a:t>
+              <a:t> mạng</a:t>
+            </a:r>
+            <a:r>
+              <a:rPr lang="en-US" sz="2550" dirty="0" spc="-6" kern="0">
+                <a:solidFill>
+                  <a:srgbClr val="F3EEE3"/>
+                </a:solidFill>
+                <a:latin typeface="Be Vietnam Pro" pitchFamily="34" charset="0"/>
+                <a:ea typeface="Be Vietnam Pro" pitchFamily="34" charset="-122"/>
+                <a:cs typeface="Be Vietnam Pro" pitchFamily="34" charset="-120"/>
+              </a:rPr>
+              <a:t> thật.</a:t>
             </a:r>
             <a:endParaRPr lang="en-US" sz="2550" dirty="0"/>
           </a:p>
@@ -14577,15 +13971,26 @@
               <a:buNone/>
             </a:pPr>
             <a:r>
-              <a:rPr lang="en-US" sz="2550" dirty="0" spc="2" kern="0">
-                <a:solidFill>
-                  <a:srgbClr val="F3EEE3"/>
-                </a:solidFill>
-                <a:latin typeface="Be Vietnam Pro" pitchFamily="34" charset="0"/>
-                <a:ea typeface="Be Vietnam Pro" pitchFamily="34" charset="-122"/>
-                <a:cs typeface="Be Vietnam Pro" pitchFamily="34" charset="-120"/>
-              </a:rPr>
-              <a:t>Nguồn</a:t>
+              <a:rPr lang="en-US" sz="2550" dirty="0" spc="-1" kern="0">
+                <a:solidFill>
+                  <a:srgbClr val="F3EEE3"/>
+                </a:solidFill>
+                <a:latin typeface="Be Vietnam Pro" pitchFamily="34" charset="0"/>
+                <a:ea typeface="Be Vietnam Pro" pitchFamily="34" charset="-122"/>
+                <a:cs typeface="Be Vietnam Pro" pitchFamily="34" charset="-120"/>
+              </a:rPr>
+              <a:t>Tiến</a:t>
+            </a:r>
+            <a:r>
+              <a:rPr lang="en-US" sz="2550" dirty="0" spc="9" kern="0">
+                <a:solidFill>
+                  <a:srgbClr val="F3EEE3"/>
+                </a:solidFill>
+                <a:latin typeface="Be Vietnam Pro" pitchFamily="34" charset="0"/>
+                <a:ea typeface="Be Vietnam Pro" pitchFamily="34" charset="-122"/>
+                <a:cs typeface="Be Vietnam Pro" pitchFamily="34" charset="-120"/>
+              </a:rPr>
+              <a:t> trình</a:t>
             </a:r>
             <a:r>
               <a:rPr lang="en-US" sz="2550" dirty="0" spc="0" kern="0">
@@ -14596,7 +14001,7 @@
                 <a:ea typeface="Be Vietnam Pro" pitchFamily="34" charset="-122"/>
                 <a:cs typeface="Be Vietnam Pro" pitchFamily="34" charset="-120"/>
               </a:rPr>
-              <a:t> không nói</a:t>
+              <a:t> có</a:t>
             </a:r>
             <a:r>
               <a:rPr lang="en-US" sz="2550" dirty="0" spc="-1" kern="0">
@@ -14607,7 +14012,18 @@
                 <a:ea typeface="Be Vietnam Pro" pitchFamily="34" charset="-122"/>
                 <a:cs typeface="Be Vietnam Pro" pitchFamily="34" charset="-120"/>
               </a:rPr>
-              <a:t> khi</a:t>
+              <a:t> chi</a:t>
+            </a:r>
+            <a:r>
+              <a:rPr lang="en-US" sz="2550" dirty="0" spc="1" kern="0">
+                <a:solidFill>
+                  <a:srgbClr val="F3EEE3"/>
+                </a:solidFill>
+                <a:latin typeface="Be Vietnam Pro" pitchFamily="34" charset="0"/>
+                <a:ea typeface="Be Vietnam Pro" pitchFamily="34" charset="-122"/>
+                <a:cs typeface="Be Vietnam Pro" pitchFamily="34" charset="-120"/>
+              </a:rPr>
+              <a:t> phí</a:t>
             </a:r>
             <a:r>
               <a:rPr lang="en-US" sz="2550" dirty="0" spc="0" kern="0">
@@ -14618,18 +14034,29 @@
                 <a:ea typeface="Be Vietnam Pro" pitchFamily="34" charset="-122"/>
                 <a:cs typeface="Be Vietnam Pro" pitchFamily="34" charset="-120"/>
               </a:rPr>
-              <a:t> nào chọn</a:t>
-            </a:r>
-            <a:r>
-              <a:rPr lang="en-US" sz="2550" dirty="0" spc="-3" kern="0">
-                <a:solidFill>
-                  <a:srgbClr val="F3EEE3"/>
-                </a:solidFill>
-                <a:latin typeface="Be Vietnam Pro" pitchFamily="34" charset="0"/>
-                <a:ea typeface="Be Vietnam Pro" pitchFamily="34" charset="-122"/>
-                <a:cs typeface="Be Vietnam Pro" pitchFamily="34" charset="-120"/>
-              </a:rPr>
-              <a:t> bên</a:t>
+              <a:t> khởi</a:t>
+            </a:r>
+            <a:r>
+              <a:rPr lang="en-US" sz="2550" dirty="0" spc="8" kern="0">
+                <a:solidFill>
+                  <a:srgbClr val="F3EEE3"/>
+                </a:solidFill>
+                <a:latin typeface="Be Vietnam Pro" pitchFamily="34" charset="0"/>
+                <a:ea typeface="Be Vietnam Pro" pitchFamily="34" charset="-122"/>
+                <a:cs typeface="Be Vietnam Pro" pitchFamily="34" charset="-120"/>
+              </a:rPr>
+              <a:t> động;</a:t>
+            </a:r>
+            <a:r>
+              <a:rPr lang="en-US" sz="2550" dirty="0" spc="-4" kern="0">
+                <a:solidFill>
+                  <a:srgbClr val="F3EEE3"/>
+                </a:solidFill>
+                <a:latin typeface="Be Vietnam Pro" pitchFamily="34" charset="0"/>
+                <a:ea typeface="Be Vietnam Pro" pitchFamily="34" charset="-122"/>
+                <a:cs typeface="Be Vietnam Pro" pitchFamily="34" charset="-120"/>
+              </a:rPr>
+              <a:t> việc</a:t>
             </a:r>
             <a:r>
               <a:rPr lang="en-US" sz="2550" dirty="0" spc="-1" kern="0">
@@ -14640,40 +14067,29 @@
                 <a:ea typeface="Be Vietnam Pro" pitchFamily="34" charset="-122"/>
                 <a:cs typeface="Be Vietnam Pro" pitchFamily="34" charset="-120"/>
               </a:rPr>
-              <a:t> nào,</a:t>
-            </a:r>
-            <a:r>
-              <a:rPr lang="en-US" sz="2550" dirty="0" spc="-10" kern="0">
-                <a:solidFill>
-                  <a:srgbClr val="F3EEE3"/>
-                </a:solidFill>
-                <a:latin typeface="Be Vietnam Pro" pitchFamily="34" charset="0"/>
-                <a:ea typeface="Be Vietnam Pro" pitchFamily="34" charset="-122"/>
-                <a:cs typeface="Be Vietnam Pro" pitchFamily="34" charset="-120"/>
-              </a:rPr>
-              <a:t> ngoài</a:t>
-            </a:r>
-            <a:r>
-              <a:rPr lang="en-US" sz="2550" dirty="0" spc="-1" kern="0">
-                <a:solidFill>
-                  <a:srgbClr val="F3EEE3"/>
-                </a:solidFill>
-                <a:latin typeface="Be Vietnam Pro" pitchFamily="34" charset="0"/>
-                <a:ea typeface="Be Vietnam Pro" pitchFamily="34" charset="-122"/>
-                <a:cs typeface="Be Vietnam Pro" pitchFamily="34" charset="-120"/>
-              </a:rPr>
-              <a:t> hai nhóm</a:t>
-            </a:r>
-            <a:r>
-              <a:rPr lang="en-US" sz="2550" dirty="0" spc="-2" kern="0">
-                <a:solidFill>
-                  <a:srgbClr val="F3EEE3"/>
-                </a:solidFill>
-                <a:latin typeface="Be Vietnam Pro" pitchFamily="34" charset="0"/>
-                <a:ea typeface="Be Vietnam Pro" pitchFamily="34" charset="-122"/>
-                <a:cs typeface="Be Vietnam Pro" pitchFamily="34" charset="-120"/>
-              </a:rPr>
-              <a:t> việc.</a:t>
+              <a:t> nhỏ</a:t>
+            </a:r>
+            <a:r>
+              <a:rPr lang="en-US" sz="2550" dirty="0" spc="1" kern="0">
+                <a:solidFill>
+                  <a:srgbClr val="F3EEE3"/>
+                </a:solidFill>
+                <a:latin typeface="Be Vietnam Pro" pitchFamily="34" charset="0"/>
+                <a:ea typeface="Be Vietnam Pro" pitchFamily="34" charset="-122"/>
+                <a:cs typeface="Be Vietnam Pro" pitchFamily="34" charset="-120"/>
+              </a:rPr>
+              <a:t> không</a:t>
+            </a:r>
+            <a:r>
+              <a:rPr lang="en-US" sz="2550" dirty="0" spc="9" kern="0">
+                <a:solidFill>
+                  <a:srgbClr val="F3EEE3"/>
+                </a:solidFill>
+                <a:latin typeface="Be Vietnam Pro" pitchFamily="34" charset="0"/>
+                <a:ea typeface="Be Vietnam Pro" pitchFamily="34" charset="-122"/>
+                <a:cs typeface="Be Vietnam Pro" pitchFamily="34" charset="-120"/>
+              </a:rPr>
+              <a:t> đáng.</a:t>
             </a:r>
             <a:endParaRPr lang="en-US" sz="2550" dirty="0"/>
           </a:p>
@@ -14783,50 +14199,6 @@
               <a:t>Bài</a:t>
             </a:r>
             <a:r>
-              <a:rPr lang="en-US" sz="2550" dirty="0" spc="1" kern="0">
-                <a:solidFill>
-                  <a:srgbClr val="F3EEE3"/>
-                </a:solidFill>
-                <a:latin typeface="Be Vietnam Pro" pitchFamily="34" charset="0"/>
-                <a:ea typeface="Be Vietnam Pro" pitchFamily="34" charset="-122"/>
-                <a:cs typeface="Be Vietnam Pro" pitchFamily="34" charset="-120"/>
-              </a:rPr>
-              <a:t> chỉ</a:t>
-            </a:r>
-            <a:r>
-              <a:rPr lang="en-US" sz="2550" dirty="0" spc="12" kern="0">
-                <a:solidFill>
-                  <a:srgbClr val="F3EEE3"/>
-                </a:solidFill>
-                <a:latin typeface="Be Vietnam Pro" pitchFamily="34" charset="0"/>
-                <a:ea typeface="Be Vietnam Pro" pitchFamily="34" charset="-122"/>
-                <a:cs typeface="Be Vietnam Pro" pitchFamily="34" charset="-120"/>
-              </a:rPr>
-              <a:t> đối</a:t>
-            </a:r>
-            <a:r>
-              <a:rPr lang="en-US" sz="2550" dirty="0" spc="1" kern="0">
-                <a:solidFill>
-                  <a:srgbClr val="F3EEE3"/>
-                </a:solidFill>
-                <a:latin typeface="Be Vietnam Pro" pitchFamily="34" charset="0"/>
-                <a:ea typeface="Be Vietnam Pro" pitchFamily="34" charset="-122"/>
-                <a:cs typeface="Be Vietnam Pro" pitchFamily="34" charset="-120"/>
-              </a:rPr>
-              <a:t> chiếu</a:t>
-            </a:r>
-            <a:r>
-              <a:rPr lang="en-US" sz="2550" dirty="0" spc="21" kern="0">
-                <a:solidFill>
-                  <a:srgbClr val="F3EEE3"/>
-                </a:solidFill>
-                <a:latin typeface="Be Vietnam Pro" pitchFamily="34" charset="0"/>
-                <a:ea typeface="Be Vietnam Pro" pitchFamily="34" charset="-122"/>
-                <a:cs typeface="Be Vietnam Pro" pitchFamily="34" charset="-120"/>
-              </a:rPr>
-              <a:t> định</a:t>
-            </a:r>
-            <a:r>
               <a:rPr lang="en-US" sz="2550" dirty="0" spc="0" kern="0">
                 <a:solidFill>
                   <a:srgbClr val="F3EEE3"/>
@@ -14835,29 +14207,62 @@
                 <a:ea typeface="Be Vietnam Pro" pitchFamily="34" charset="-122"/>
                 <a:cs typeface="Be Vietnam Pro" pitchFamily="34" charset="-120"/>
               </a:rPr>
-              <a:t> nghĩa, không</a:t>
-            </a:r>
-            <a:r>
-              <a:rPr lang="en-US" sz="2550" dirty="0" spc="1" kern="0">
-                <a:solidFill>
-                  <a:srgbClr val="F3EEE3"/>
-                </a:solidFill>
-                <a:latin typeface="Be Vietnam Pro" pitchFamily="34" charset="0"/>
-                <a:ea typeface="Be Vietnam Pro" pitchFamily="34" charset="-122"/>
-                <a:cs typeface="Be Vietnam Pro" pitchFamily="34" charset="-120"/>
-              </a:rPr>
-              <a:t> kiểm</a:t>
-            </a:r>
-            <a:r>
-              <a:rPr lang="en-US" sz="2550" dirty="0" spc="-25" kern="0">
-                <a:solidFill>
-                  <a:srgbClr val="F3EEE3"/>
-                </a:solidFill>
-                <a:latin typeface="Be Vietnam Pro" pitchFamily="34" charset="0"/>
-                <a:ea typeface="Be Vietnam Pro" pitchFamily="34" charset="-122"/>
-                <a:cs typeface="Be Vietnam Pro" pitchFamily="34" charset="-120"/>
-              </a:rPr>
-              <a:t> tra</a:t>
+              <a:t> không</a:t>
+            </a:r>
+            <a:r>
+              <a:rPr lang="en-US" sz="2550" dirty="0" spc="18" kern="0">
+                <a:solidFill>
+                  <a:srgbClr val="F3EEE3"/>
+                </a:solidFill>
+                <a:latin typeface="Be Vietnam Pro" pitchFamily="34" charset="0"/>
+                <a:ea typeface="Be Vietnam Pro" pitchFamily="34" charset="-122"/>
+                <a:cs typeface="Be Vietnam Pro" pitchFamily="34" charset="-120"/>
+              </a:rPr>
+              <a:t> đo</a:t>
+            </a:r>
+            <a:r>
+              <a:rPr lang="en-US" sz="2550" dirty="0" spc="-2" kern="0">
+                <a:solidFill>
+                  <a:srgbClr val="F3EEE3"/>
+                </a:solidFill>
+                <a:latin typeface="Be Vietnam Pro" pitchFamily="34" charset="0"/>
+                <a:ea typeface="Be Vietnam Pro" pitchFamily="34" charset="-122"/>
+                <a:cs typeface="Be Vietnam Pro" pitchFamily="34" charset="-120"/>
+              </a:rPr>
+              <a:t> Go</a:t>
+            </a:r>
+            <a:r>
+              <a:rPr lang="en-US" sz="2550" dirty="0" spc="-18" kern="0">
+                <a:solidFill>
+                  <a:srgbClr val="F3EEE3"/>
+                </a:solidFill>
+                <a:latin typeface="Be Vietnam Pro" pitchFamily="34" charset="0"/>
+                <a:ea typeface="Be Vietnam Pro" pitchFamily="34" charset="-122"/>
+                <a:cs typeface="Be Vietnam Pro" pitchFamily="34" charset="-120"/>
+              </a:rPr>
+              <a:t> và</a:t>
+            </a:r>
+            <a:r>
+              <a:rPr lang="en-US" sz="2550" dirty="0" spc="0" kern="0">
+                <a:solidFill>
+                  <a:srgbClr val="F3EEE3"/>
+                </a:solidFill>
+                <a:latin typeface="Be Vietnam Pro" pitchFamily="34" charset="0"/>
+                <a:ea typeface="Be Vietnam Pro" pitchFamily="34" charset="-122"/>
+                <a:cs typeface="Be Vietnam Pro" pitchFamily="34" charset="-120"/>
+              </a:rPr>
+              <a:t> không chọn công</a:t>
+            </a:r>
+            <a:r>
+              <a:rPr lang="en-US" sz="2550" dirty="0" spc="-2" kern="0">
+                <a:solidFill>
+                  <a:srgbClr val="F3EEE3"/>
+                </a:solidFill>
+                <a:latin typeface="Be Vietnam Pro" pitchFamily="34" charset="0"/>
+                <a:ea typeface="Be Vietnam Pro" pitchFamily="34" charset="-122"/>
+                <a:cs typeface="Be Vietnam Pro" pitchFamily="34" charset="-120"/>
+              </a:rPr>
+              <a:t> cụ</a:t>
             </a:r>
             <a:r>
               <a:rPr lang="en-US" sz="2550" dirty="0" spc="-1" kern="0">
@@ -14868,51 +14273,40 @@
                 <a:ea typeface="Be Vietnam Pro" pitchFamily="34" charset="-122"/>
                 <a:cs typeface="Be Vietnam Pro" pitchFamily="34" charset="-120"/>
               </a:rPr>
-              <a:t> lời</a:t>
-            </a:r>
-            <a:r>
-              <a:rPr lang="en-US" sz="2550" dirty="0" spc="10" kern="0">
-                <a:solidFill>
-                  <a:srgbClr val="F3EEE3"/>
-                </a:solidFill>
-                <a:latin typeface="Be Vietnam Pro" pitchFamily="34" charset="0"/>
-                <a:ea typeface="Be Vietnam Pro" pitchFamily="34" charset="-122"/>
-                <a:cs typeface="Be Vietnam Pro" pitchFamily="34" charset="-120"/>
-              </a:rPr>
-              <a:t> trích</a:t>
-            </a:r>
-            <a:r>
-              <a:rPr lang="en-US" sz="2550" dirty="0" spc="-2" kern="0">
-                <a:solidFill>
-                  <a:srgbClr val="F3EEE3"/>
-                </a:solidFill>
-                <a:latin typeface="Be Vietnam Pro" pitchFamily="34" charset="0"/>
-                <a:ea typeface="Be Vietnam Pro" pitchFamily="34" charset="-122"/>
-                <a:cs typeface="Be Vietnam Pro" pitchFamily="34" charset="-120"/>
-              </a:rPr>
-              <a:t> của</a:t>
-            </a:r>
-            <a:r>
-              <a:rPr lang="en-US" sz="2550" dirty="0" spc="-31" kern="0">
-                <a:solidFill>
-                  <a:srgbClr val="F3EEE3"/>
-                </a:solidFill>
-                <a:latin typeface="Be Vietnam Pro" pitchFamily="34" charset="0"/>
-                <a:ea typeface="Be Vietnam Pro" pitchFamily="34" charset="-122"/>
-                <a:cs typeface="Be Vietnam Pro" pitchFamily="34" charset="-120"/>
-              </a:rPr>
-              <a:t> Rob</a:t>
-            </a:r>
-            <a:r>
-              <a:rPr lang="en-US" sz="2550" dirty="0" spc="-17" kern="0">
-                <a:solidFill>
-                  <a:srgbClr val="F3EEE3"/>
-                </a:solidFill>
-                <a:latin typeface="Be Vietnam Pro" pitchFamily="34" charset="0"/>
-                <a:ea typeface="Be Vietnam Pro" pitchFamily="34" charset="-122"/>
-                <a:cs typeface="Be Vietnam Pro" pitchFamily="34" charset="-120"/>
-              </a:rPr>
-              <a:t> Pike.</a:t>
+              <a:t> cho</a:t>
+            </a:r>
+            <a:r>
+              <a:rPr lang="en-US" sz="2550" dirty="0" spc="5" kern="0">
+                <a:solidFill>
+                  <a:srgbClr val="F3EEE3"/>
+                </a:solidFill>
+                <a:latin typeface="Be Vietnam Pro" pitchFamily="34" charset="0"/>
+                <a:ea typeface="Be Vietnam Pro" pitchFamily="34" charset="-122"/>
+                <a:cs typeface="Be Vietnam Pro" pitchFamily="34" charset="-120"/>
+              </a:rPr>
+              <a:t> chương</a:t>
+            </a:r>
+            <a:r>
+              <a:rPr lang="en-US" sz="2550" dirty="0" spc="9" kern="0">
+                <a:solidFill>
+                  <a:srgbClr val="F3EEE3"/>
+                </a:solidFill>
+                <a:latin typeface="Be Vietnam Pro" pitchFamily="34" charset="0"/>
+                <a:ea typeface="Be Vietnam Pro" pitchFamily="34" charset="-122"/>
+                <a:cs typeface="Be Vietnam Pro" pitchFamily="34" charset="-120"/>
+              </a:rPr>
+              <a:t> trình</a:t>
+            </a:r>
+            <a:r>
+              <a:rPr lang="en-US" sz="2550" dirty="0" spc="-7" kern="0">
+                <a:solidFill>
+                  <a:srgbClr val="F3EEE3"/>
+                </a:solidFill>
+                <a:latin typeface="Be Vietnam Pro" pitchFamily="34" charset="0"/>
+                <a:ea typeface="Be Vietnam Pro" pitchFamily="34" charset="-122"/>
+                <a:cs typeface="Be Vietnam Pro" pitchFamily="34" charset="-120"/>
+              </a:rPr>
+              <a:t> thật.</a:t>
             </a:r>
             <a:endParaRPr lang="en-US" sz="2550" dirty="0"/>
           </a:p>
@@ -15597,7 +14991,7 @@
               <a:buNone/>
             </a:pPr>
             <a:r>
-              <a:rPr lang="en-US" sz="2550" b="1" dirty="0" spc="8" kern="0">
+              <a:rPr lang="en-US" sz="2550" dirty="0" spc="5" kern="0">
                 <a:solidFill>
                   <a:srgbClr val="14161C"/>
                 </a:solidFill>
@@ -15608,7 +15002,7 @@
               <a:t>Chương</a:t>
             </a:r>
             <a:r>
-              <a:rPr lang="en-US" sz="2550" b="1" dirty="0" spc="5" kern="0">
+              <a:rPr lang="en-US" sz="2550" dirty="0" spc="10" kern="0">
                 <a:solidFill>
                   <a:srgbClr val="14161C"/>
                 </a:solidFill>
@@ -15619,7 +15013,7 @@
               <a:t> trình</a:t>
             </a:r>
             <a:r>
-              <a:rPr lang="en-US" sz="2550" b="1" dirty="0" spc="-2" kern="0">
+              <a:rPr lang="en-US" sz="2550" dirty="0" spc="-1" kern="0">
                 <a:solidFill>
                   <a:srgbClr val="14161C"/>
                 </a:solidFill>
@@ -15629,6 +15023,108 @@
               </a:rPr>
               <a:t> A</a:t>
             </a:r>
+            <a:r>
+              <a:rPr lang="en-US" sz="2550" dirty="0" spc="-13" kern="0">
+                <a:solidFill>
+                  <a:srgbClr val="14161C"/>
+                </a:solidFill>
+                <a:latin typeface="Be Vietnam Pro" pitchFamily="34" charset="0"/>
+                <a:ea typeface="Be Vietnam Pro" pitchFamily="34" charset="-122"/>
+                <a:cs typeface="Be Vietnam Pro" pitchFamily="34" charset="-120"/>
+              </a:rPr>
+              <a:t> gọi</a:t>
+            </a:r>
+            <a:r>
+              <a:rPr lang="en-US" sz="2550" dirty="0" spc="-1" kern="0">
+                <a:solidFill>
+                  <a:srgbClr val="14161C"/>
+                </a:solidFill>
+                <a:latin typeface="Be Vietnam Pro" pitchFamily="34" charset="0"/>
+                <a:ea typeface="Be Vietnam Pro" pitchFamily="34" charset="-122"/>
+                <a:cs typeface="Be Vietnam Pro" pitchFamily="34" charset="-120"/>
+              </a:rPr>
+              <a:t> hai</a:t>
+            </a:r>
+            <a:r>
+              <a:rPr lang="en-US" sz="2550" dirty="0" spc="6" kern="0">
+                <a:solidFill>
+                  <a:srgbClr val="14161C"/>
+                </a:solidFill>
+                <a:latin typeface="Be Vietnam Pro" pitchFamily="34" charset="0"/>
+                <a:ea typeface="Be Vietnam Pro" pitchFamily="34" charset="-122"/>
+                <a:cs typeface="Be Vietnam Pro" pitchFamily="34" charset="-120"/>
+              </a:rPr>
+              <a:t> mươi</a:t>
+            </a:r>
+            <a:r>
+              <a:rPr lang="en-US" sz="2550" dirty="0" spc="1" kern="0">
+                <a:solidFill>
+                  <a:srgbClr val="14161C"/>
+                </a:solidFill>
+                <a:latin typeface="Be Vietnam Pro" pitchFamily="34" charset="0"/>
+                <a:ea typeface="Be Vietnam Pro" pitchFamily="34" charset="-122"/>
+                <a:cs typeface="Be Vietnam Pro" pitchFamily="34" charset="-120"/>
+              </a:rPr>
+              <a:t> dịch</a:t>
+            </a:r>
+            <a:r>
+              <a:rPr lang="en-US" sz="2550" dirty="0" spc="-4" kern="0">
+                <a:solidFill>
+                  <a:srgbClr val="14161C"/>
+                </a:solidFill>
+                <a:latin typeface="Be Vietnam Pro" pitchFamily="34" charset="0"/>
+                <a:ea typeface="Be Vietnam Pro" pitchFamily="34" charset="-122"/>
+                <a:cs typeface="Be Vietnam Pro" pitchFamily="34" charset="-120"/>
+              </a:rPr>
+              <a:t> vụ</a:t>
+            </a:r>
+            <a:r>
+              <a:rPr lang="en-US" sz="2550" dirty="0" spc="-10" kern="0">
+                <a:solidFill>
+                  <a:srgbClr val="14161C"/>
+                </a:solidFill>
+                <a:latin typeface="Be Vietnam Pro" pitchFamily="34" charset="0"/>
+                <a:ea typeface="Be Vietnam Pro" pitchFamily="34" charset="-122"/>
+                <a:cs typeface="Be Vietnam Pro" pitchFamily="34" charset="-120"/>
+              </a:rPr>
+              <a:t> ngoài,</a:t>
+            </a:r>
+            <a:r>
+              <a:rPr lang="en-US" sz="2550" dirty="0" spc="-1" kern="0">
+                <a:solidFill>
+                  <a:srgbClr val="14161C"/>
+                </a:solidFill>
+                <a:latin typeface="Be Vietnam Pro" pitchFamily="34" charset="0"/>
+                <a:ea typeface="Be Vietnam Pro" pitchFamily="34" charset="-122"/>
+                <a:cs typeface="Be Vietnam Pro" pitchFamily="34" charset="-120"/>
+              </a:rPr>
+              <a:t> chủ</a:t>
+            </a:r>
+            <a:r>
+              <a:rPr lang="en-US" sz="2550" dirty="0" spc="-20" kern="0">
+                <a:solidFill>
+                  <a:srgbClr val="14161C"/>
+                </a:solidFill>
+                <a:latin typeface="Be Vietnam Pro" pitchFamily="34" charset="0"/>
+                <a:ea typeface="Be Vietnam Pro" pitchFamily="34" charset="-122"/>
+                <a:cs typeface="Be Vietnam Pro" pitchFamily="34" charset="-120"/>
+              </a:rPr>
+              <a:t> yếu</a:t>
+            </a:r>
+            <a:r>
+              <a:rPr lang="en-US" sz="2550" dirty="0" spc="0" kern="0">
+                <a:solidFill>
+                  <a:srgbClr val="14161C"/>
+                </a:solidFill>
+                <a:latin typeface="Be Vietnam Pro" pitchFamily="34" charset="0"/>
+                <a:ea typeface="Be Vietnam Pro" pitchFamily="34" charset="-122"/>
+                <a:cs typeface="Be Vietnam Pro" pitchFamily="34" charset="-120"/>
+              </a:rPr>
+              <a:t> chờ.</a:t>
+            </a:r>
+            <a:endParaRPr lang="en-US" sz="2550" dirty="0"/>
+          </a:p>
+          <a:p>
             <a:pPr algn="l" indent="0" marL="0">
               <a:lnSpc>
                 <a:spcPts val="3570"/>
@@ -15639,6 +15135,39 @@
               <a:buNone/>
             </a:pPr>
             <a:r>
+              <a:rPr lang="en-US" sz="2550" dirty="0" spc="5" kern="0">
+                <a:solidFill>
+                  <a:srgbClr val="14161C"/>
+                </a:solidFill>
+                <a:latin typeface="Be Vietnam Pro" pitchFamily="34" charset="0"/>
+                <a:ea typeface="Be Vietnam Pro" pitchFamily="34" charset="-122"/>
+                <a:cs typeface="Be Vietnam Pro" pitchFamily="34" charset="-120"/>
+              </a:rPr>
+              <a:t>Chương</a:t>
+            </a:r>
+            <a:r>
+              <a:rPr lang="en-US" sz="2550" dirty="0" spc="10" kern="0">
+                <a:solidFill>
+                  <a:srgbClr val="14161C"/>
+                </a:solidFill>
+                <a:latin typeface="Be Vietnam Pro" pitchFamily="34" charset="0"/>
+                <a:ea typeface="Be Vietnam Pro" pitchFamily="34" charset="-122"/>
+                <a:cs typeface="Be Vietnam Pro" pitchFamily="34" charset="-120"/>
+              </a:rPr>
+              <a:t> trình</a:t>
+            </a:r>
+            <a:r>
+              <a:rPr lang="en-US" sz="2550" dirty="0" spc="2" kern="0">
+                <a:solidFill>
+                  <a:srgbClr val="14161C"/>
+                </a:solidFill>
+                <a:latin typeface="Be Vietnam Pro" pitchFamily="34" charset="0"/>
+                <a:ea typeface="Be Vietnam Pro" pitchFamily="34" charset="-122"/>
+                <a:cs typeface="Be Vietnam Pro" pitchFamily="34" charset="-120"/>
+              </a:rPr>
+              <a:t> B</a:t>
+            </a:r>
+            <a:r>
               <a:rPr lang="en-US" sz="2550" dirty="0" spc="0" kern="0">
                 <a:solidFill>
                   <a:srgbClr val="14161C"/>
@@ -15647,7 +15176,7 @@
                 <a:ea typeface="Be Vietnam Pro" pitchFamily="34" charset="-122"/>
                 <a:cs typeface="Be Vietnam Pro" pitchFamily="34" charset="-120"/>
               </a:rPr>
-              <a:t> dành phần</a:t>
+              <a:t> nén</a:t>
             </a:r>
             <a:r>
               <a:rPr lang="en-US" sz="2550" dirty="0" spc="-1" kern="0">
@@ -15658,29 +15187,29 @@
                 <a:ea typeface="Be Vietnam Pro" pitchFamily="34" charset="-122"/>
                 <a:cs typeface="Be Vietnam Pro" pitchFamily="34" charset="-120"/>
               </a:rPr>
-              <a:t> lớn</a:t>
-            </a:r>
-            <a:r>
-              <a:rPr lang="en-US" sz="2550" dirty="0" spc="0" kern="0">
-                <a:solidFill>
-                  <a:srgbClr val="14161C"/>
-                </a:solidFill>
-                <a:latin typeface="Be Vietnam Pro" pitchFamily="34" charset="0"/>
-                <a:ea typeface="Be Vietnam Pro" pitchFamily="34" charset="-122"/>
-                <a:cs typeface="Be Vietnam Pro" pitchFamily="34" charset="-120"/>
-              </a:rPr>
-              <a:t> thời gian</a:t>
-            </a:r>
-            <a:r>
-              <a:rPr lang="en-US" sz="2550" dirty="0" spc="-1" kern="0">
-                <a:solidFill>
-                  <a:srgbClr val="14161C"/>
-                </a:solidFill>
-                <a:latin typeface="Be Vietnam Pro" pitchFamily="34" charset="0"/>
-                <a:ea typeface="Be Vietnam Pro" pitchFamily="34" charset="-122"/>
-                <a:cs typeface="Be Vietnam Pro" pitchFamily="34" charset="-120"/>
-              </a:rPr>
-              <a:t> chờ</a:t>
+              <a:t> ảnh,</a:t>
+            </a:r>
+            <a:r>
+              <a:rPr lang="en-US" sz="2550" dirty="0" spc="7" kern="0">
+                <a:solidFill>
+                  <a:srgbClr val="14161C"/>
+                </a:solidFill>
+                <a:latin typeface="Be Vietnam Pro" pitchFamily="34" charset="0"/>
+                <a:ea typeface="Be Vietnam Pro" pitchFamily="34" charset="-122"/>
+                <a:cs typeface="Be Vietnam Pro" pitchFamily="34" charset="-120"/>
+              </a:rPr>
+              <a:t> đốt</a:t>
+            </a:r>
+            <a:r>
+              <a:rPr lang="en-US" sz="2550" dirty="0" spc="-5" kern="0">
+                <a:solidFill>
+                  <a:srgbClr val="14161C"/>
+                </a:solidFill>
+                <a:latin typeface="Be Vietnam Pro" pitchFamily="34" charset="0"/>
+                <a:ea typeface="Be Vietnam Pro" pitchFamily="34" charset="-122"/>
+                <a:cs typeface="Be Vietnam Pro" pitchFamily="34" charset="-120"/>
+              </a:rPr>
+              <a:t> hết một</a:t>
             </a:r>
             <a:r>
               <a:rPr lang="en-US" sz="2550" dirty="0" spc="1" kern="0">
@@ -15691,160 +15220,7 @@
                 <a:ea typeface="Be Vietnam Pro" pitchFamily="34" charset="-122"/>
                 <a:cs typeface="Be Vietnam Pro" pitchFamily="34" charset="-120"/>
               </a:rPr>
-              <a:t> mạng</a:t>
-            </a:r>
-            <a:r>
-              <a:rPr lang="en-US" sz="2550" dirty="0" spc="-18" kern="0">
-                <a:solidFill>
-                  <a:srgbClr val="14161C"/>
-                </a:solidFill>
-                <a:latin typeface="Be Vietnam Pro" pitchFamily="34" charset="0"/>
-                <a:ea typeface="Be Vietnam Pro" pitchFamily="34" charset="-122"/>
-                <a:cs typeface="Be Vietnam Pro" pitchFamily="34" charset="-120"/>
-              </a:rPr>
-              <a:t> và</a:t>
-            </a:r>
-            <a:r>
-              <a:rPr lang="en-US" sz="2550" dirty="0" spc="-8" kern="0">
-                <a:solidFill>
-                  <a:srgbClr val="14161C"/>
-                </a:solidFill>
-                <a:latin typeface="Be Vietnam Pro" pitchFamily="34" charset="0"/>
-                <a:ea typeface="Be Vietnam Pro" pitchFamily="34" charset="-122"/>
-                <a:cs typeface="Be Vietnam Pro" pitchFamily="34" charset="-120"/>
-              </a:rPr>
-              <a:t> tệp.</a:t>
-            </a:r>
-            <a:endParaRPr lang="en-US" sz="2550" dirty="0"/>
-          </a:p>
-          <a:p>
-            <a:pPr algn="l" indent="0" marL="0">
-              <a:lnSpc>
-                <a:spcPts val="3570"/>
-              </a:lnSpc>
-              <a:spcAft>
-                <a:spcPts val="1350"/>
-              </a:spcAft>
-              <a:buNone/>
-            </a:pPr>
-            <a:r>
-              <a:rPr lang="en-US" sz="2550" b="1" dirty="0" spc="8" kern="0">
-                <a:solidFill>
-                  <a:srgbClr val="14161C"/>
-                </a:solidFill>
-                <a:latin typeface="Be Vietnam Pro" pitchFamily="34" charset="0"/>
-                <a:ea typeface="Be Vietnam Pro" pitchFamily="34" charset="-122"/>
-                <a:cs typeface="Be Vietnam Pro" pitchFamily="34" charset="-120"/>
-              </a:rPr>
-              <a:t>Chương</a:t>
-            </a:r>
-            <a:r>
-              <a:rPr lang="en-US" sz="2550" b="1" dirty="0" spc="5" kern="0">
-                <a:solidFill>
-                  <a:srgbClr val="14161C"/>
-                </a:solidFill>
-                <a:latin typeface="Be Vietnam Pro" pitchFamily="34" charset="0"/>
-                <a:ea typeface="Be Vietnam Pro" pitchFamily="34" charset="-122"/>
-                <a:cs typeface="Be Vietnam Pro" pitchFamily="34" charset="-120"/>
-              </a:rPr>
-              <a:t> trình</a:t>
-            </a:r>
-            <a:r>
-              <a:rPr lang="en-US" sz="2550" b="1" dirty="0" spc="-3" kern="0">
-                <a:solidFill>
-                  <a:srgbClr val="14161C"/>
-                </a:solidFill>
-                <a:latin typeface="Be Vietnam Pro" pitchFamily="34" charset="0"/>
-                <a:ea typeface="Be Vietnam Pro" pitchFamily="34" charset="-122"/>
-                <a:cs typeface="Be Vietnam Pro" pitchFamily="34" charset="-120"/>
-              </a:rPr>
-              <a:t> B</a:t>
-            </a:r>
-            <a:pPr algn="l" indent="0" marL="0">
-              <a:lnSpc>
-                <a:spcPts val="3570"/>
-              </a:lnSpc>
-              <a:spcAft>
-                <a:spcPts val="1350"/>
-              </a:spcAft>
-              <a:buNone/>
-            </a:pPr>
-            <a:r>
-              <a:rPr lang="en-US" sz="2550" dirty="0" spc="-2" kern="0">
-                <a:solidFill>
-                  <a:srgbClr val="14161C"/>
-                </a:solidFill>
-                <a:latin typeface="Be Vietnam Pro" pitchFamily="34" charset="0"/>
-                <a:ea typeface="Be Vietnam Pro" pitchFamily="34" charset="-122"/>
-                <a:cs typeface="Be Vietnam Pro" pitchFamily="34" charset="-120"/>
-              </a:rPr>
-              <a:t> xử</a:t>
-            </a:r>
-            <a:r>
-              <a:rPr lang="en-US" sz="2550" dirty="0" spc="-1" kern="0">
-                <a:solidFill>
-                  <a:srgbClr val="14161C"/>
-                </a:solidFill>
-                <a:latin typeface="Be Vietnam Pro" pitchFamily="34" charset="0"/>
-                <a:ea typeface="Be Vietnam Pro" pitchFamily="34" charset="-122"/>
-                <a:cs typeface="Be Vietnam Pro" pitchFamily="34" charset="-120"/>
-              </a:rPr>
-              <a:t> lý</a:t>
-            </a:r>
-            <a:r>
-              <a:rPr lang="en-US" sz="2550" dirty="0" spc="0" kern="0">
-                <a:solidFill>
-                  <a:srgbClr val="14161C"/>
-                </a:solidFill>
-                <a:latin typeface="Be Vietnam Pro" pitchFamily="34" charset="0"/>
-                <a:ea typeface="Be Vietnam Pro" pitchFamily="34" charset="-122"/>
-                <a:cs typeface="Be Vietnam Pro" pitchFamily="34" charset="-120"/>
-              </a:rPr>
-              <a:t> ảnh</a:t>
-            </a:r>
-            <a:r>
-              <a:rPr lang="en-US" sz="2550" dirty="0" spc="-2" kern="0">
-                <a:solidFill>
-                  <a:srgbClr val="14161C"/>
-                </a:solidFill>
-                <a:latin typeface="Be Vietnam Pro" pitchFamily="34" charset="0"/>
-                <a:ea typeface="Be Vietnam Pro" pitchFamily="34" charset="-122"/>
-                <a:cs typeface="Be Vietnam Pro" pitchFamily="34" charset="-120"/>
-              </a:rPr>
-              <a:t> bằng</a:t>
-            </a:r>
-            <a:r>
-              <a:rPr lang="en-US" sz="2550" dirty="0" spc="16" kern="0">
-                <a:solidFill>
-                  <a:srgbClr val="14161C"/>
-                </a:solidFill>
-                <a:latin typeface="Be Vietnam Pro" pitchFamily="34" charset="0"/>
-                <a:ea typeface="Be Vietnam Pro" pitchFamily="34" charset="-122"/>
-                <a:cs typeface="Be Vietnam Pro" pitchFamily="34" charset="-120"/>
-              </a:rPr>
-              <a:t> những</a:t>
-            </a:r>
-            <a:r>
-              <a:rPr lang="en-US" sz="2550" dirty="0" spc="0" kern="0">
-                <a:solidFill>
-                  <a:srgbClr val="14161C"/>
-                </a:solidFill>
-                <a:latin typeface="Be Vietnam Pro" pitchFamily="34" charset="0"/>
-                <a:ea typeface="Be Vietnam Pro" pitchFamily="34" charset="-122"/>
-                <a:cs typeface="Be Vietnam Pro" pitchFamily="34" charset="-120"/>
-              </a:rPr>
-              <a:t> phép</a:t>
-            </a:r>
-            <a:r>
-              <a:rPr lang="en-US" sz="2550" dirty="0" spc="1" kern="0">
-                <a:solidFill>
-                  <a:srgbClr val="14161C"/>
-                </a:solidFill>
-                <a:latin typeface="Be Vietnam Pro" pitchFamily="34" charset="0"/>
-                <a:ea typeface="Be Vietnam Pro" pitchFamily="34" charset="-122"/>
-                <a:cs typeface="Be Vietnam Pro" pitchFamily="34" charset="-120"/>
-              </a:rPr>
-              <a:t> tính nặng.</a:t>
+              <a:t> lõi.</a:t>
             </a:r>
             <a:endParaRPr lang="en-US" sz="2550" dirty="0"/>
           </a:p>
@@ -15867,26 +15243,59 @@
               <a:t>Mỗi</a:t>
             </a:r>
             <a:r>
-              <a:rPr lang="en-US" sz="2550" dirty="0" spc="5" kern="0">
-                <a:solidFill>
-                  <a:srgbClr val="14161C"/>
-                </a:solidFill>
-                <a:latin typeface="Be Vietnam Pro" pitchFamily="34" charset="0"/>
-                <a:ea typeface="Be Vietnam Pro" pitchFamily="34" charset="-122"/>
-                <a:cs typeface="Be Vietnam Pro" pitchFamily="34" charset="-120"/>
-              </a:rPr>
-              <a:t> chương</a:t>
-            </a:r>
-            <a:r>
-              <a:rPr lang="en-US" sz="2550" dirty="0" spc="9" kern="0">
-                <a:solidFill>
-                  <a:srgbClr val="14161C"/>
-                </a:solidFill>
-                <a:latin typeface="Be Vietnam Pro" pitchFamily="34" charset="0"/>
-                <a:ea typeface="Be Vietnam Pro" pitchFamily="34" charset="-122"/>
-                <a:cs typeface="Be Vietnam Pro" pitchFamily="34" charset="-120"/>
-              </a:rPr>
-              <a:t> trình</a:t>
+              <a:rPr lang="en-US" sz="2550" dirty="0" spc="0" kern="0">
+                <a:solidFill>
+                  <a:srgbClr val="14161C"/>
+                </a:solidFill>
+                <a:latin typeface="Be Vietnam Pro" pitchFamily="34" charset="0"/>
+                <a:ea typeface="Be Vietnam Pro" pitchFamily="34" charset="-122"/>
+                <a:cs typeface="Be Vietnam Pro" pitchFamily="34" charset="-120"/>
+              </a:rPr>
+              <a:t> cái hợp cách nào?</a:t>
+            </a:r>
+            <a:r>
+              <a:rPr lang="en-US" sz="2550" dirty="0" spc="44" kern="0">
+                <a:solidFill>
+                  <a:srgbClr val="14161C"/>
+                </a:solidFill>
+                <a:latin typeface="Be Vietnam Pro" pitchFamily="34" charset="0"/>
+                <a:ea typeface="Be Vietnam Pro" pitchFamily="34" charset="-122"/>
+                <a:cs typeface="Be Vietnam Pro" pitchFamily="34" charset="-120"/>
+              </a:rPr>
+              <a:t> Vì</a:t>
+            </a:r>
+            <a:r>
+              <a:rPr lang="en-US" sz="2550" dirty="0" spc="-8" kern="0">
+                <a:solidFill>
+                  <a:srgbClr val="14161C"/>
+                </a:solidFill>
+                <a:latin typeface="Be Vietnam Pro" pitchFamily="34" charset="0"/>
+                <a:ea typeface="Be Vietnam Pro" pitchFamily="34" charset="-122"/>
+                <a:cs typeface="Be Vietnam Pro" pitchFamily="34" charset="-120"/>
+              </a:rPr>
+              <a:t> sao</a:t>
+            </a:r>
+            <a:r>
+              <a:rPr lang="en-US" sz="2550" dirty="0" spc="1" kern="0">
+                <a:solidFill>
+                  <a:srgbClr val="14161C"/>
+                </a:solidFill>
+                <a:latin typeface="Be Vietnam Pro" pitchFamily="34" charset="0"/>
+                <a:ea typeface="Be Vietnam Pro" pitchFamily="34" charset="-122"/>
+                <a:cs typeface="Be Vietnam Pro" pitchFamily="34" charset="-120"/>
+              </a:rPr>
+              <a:t> luồng</a:t>
+            </a:r>
+            <a:r>
+              <a:rPr lang="en-US" sz="2550" dirty="0" spc="0" kern="0">
+                <a:solidFill>
+                  <a:srgbClr val="14161C"/>
+                </a:solidFill>
+                <a:latin typeface="Be Vietnam Pro" pitchFamily="34" charset="0"/>
+                <a:ea typeface="Be Vietnam Pro" pitchFamily="34" charset="-122"/>
+                <a:cs typeface="Be Vietnam Pro" pitchFamily="34" charset="-120"/>
+              </a:rPr>
+              <a:t> không</a:t>
             </a:r>
             <a:r>
               <a:rPr lang="en-US" sz="2550" dirty="0" spc="-1" kern="0">
@@ -15897,128 +15306,7 @@
                 <a:ea typeface="Be Vietnam Pro" pitchFamily="34" charset="-122"/>
                 <a:cs typeface="Be Vietnam Pro" pitchFamily="34" charset="-120"/>
               </a:rPr>
-              <a:t> hợp</a:t>
-            </a:r>
-            <a:r>
-              <a:rPr lang="en-US" sz="2550" dirty="0" spc="-15" kern="0">
-                <a:solidFill>
-                  <a:srgbClr val="14161C"/>
-                </a:solidFill>
-                <a:latin typeface="Be Vietnam Pro" pitchFamily="34" charset="0"/>
-                <a:ea typeface="Be Vietnam Pro" pitchFamily="34" charset="-122"/>
-                <a:cs typeface="Be Vietnam Pro" pitchFamily="34" charset="-120"/>
-              </a:rPr>
-              <a:t> với</a:t>
-            </a:r>
-            <a:r>
-              <a:rPr lang="en-US" sz="2550" dirty="0" spc="11" kern="0">
-                <a:solidFill>
-                  <a:srgbClr val="14161C"/>
-                </a:solidFill>
-                <a:latin typeface="Be Vietnam Pro" pitchFamily="34" charset="0"/>
-                <a:ea typeface="Be Vietnam Pro" pitchFamily="34" charset="-122"/>
-                <a:cs typeface="Be Vietnam Pro" pitchFamily="34" charset="-120"/>
-              </a:rPr>
-              <a:t> đồng</a:t>
-            </a:r>
-            <a:r>
-              <a:rPr lang="en-US" sz="2550" dirty="0" spc="0" kern="0">
-                <a:solidFill>
-                  <a:srgbClr val="14161C"/>
-                </a:solidFill>
-                <a:latin typeface="Be Vietnam Pro" pitchFamily="34" charset="0"/>
-                <a:ea typeface="Be Vietnam Pro" pitchFamily="34" charset="-122"/>
-                <a:cs typeface="Be Vietnam Pro" pitchFamily="34" charset="-120"/>
-              </a:rPr>
-              <a:t> thời</a:t>
-            </a:r>
-            <a:r>
-              <a:rPr lang="en-US" sz="2550" dirty="0" spc="-11" kern="0">
-                <a:solidFill>
-                  <a:srgbClr val="14161C"/>
-                </a:solidFill>
-                <a:latin typeface="Be Vietnam Pro" pitchFamily="34" charset="0"/>
-                <a:ea typeface="Be Vietnam Pro" pitchFamily="34" charset="-122"/>
-                <a:cs typeface="Be Vietnam Pro" pitchFamily="34" charset="-120"/>
-              </a:rPr>
-              <a:t> hay</a:t>
-            </a:r>
-            <a:r>
-              <a:rPr lang="en-US" sz="2550" dirty="0" spc="-6" kern="0">
-                <a:solidFill>
-                  <a:srgbClr val="14161C"/>
-                </a:solidFill>
-                <a:latin typeface="Be Vietnam Pro" pitchFamily="34" charset="0"/>
-                <a:ea typeface="Be Vietnam Pro" pitchFamily="34" charset="-122"/>
-                <a:cs typeface="Be Vietnam Pro" pitchFamily="34" charset="-120"/>
-              </a:rPr>
-              <a:t> song</a:t>
-            </a:r>
-            <a:r>
-              <a:rPr lang="en-US" sz="2550" dirty="0" spc="-5" kern="0">
-                <a:solidFill>
-                  <a:srgbClr val="14161C"/>
-                </a:solidFill>
-                <a:latin typeface="Be Vietnam Pro" pitchFamily="34" charset="0"/>
-                <a:ea typeface="Be Vietnam Pro" pitchFamily="34" charset="-122"/>
-                <a:cs typeface="Be Vietnam Pro" pitchFamily="34" charset="-120"/>
-              </a:rPr>
-              <a:t> song?</a:t>
-            </a:r>
-            <a:r>
-              <a:rPr lang="en-US" sz="2550" dirty="0" spc="-1" kern="0">
-                <a:solidFill>
-                  <a:srgbClr val="14161C"/>
-                </a:solidFill>
-                <a:latin typeface="Be Vietnam Pro" pitchFamily="34" charset="0"/>
-                <a:ea typeface="Be Vietnam Pro" pitchFamily="34" charset="-122"/>
-                <a:cs typeface="Be Vietnam Pro" pitchFamily="34" charset="-120"/>
-              </a:rPr>
-              <a:t> Đồng</a:t>
-            </a:r>
-            <a:r>
-              <a:rPr lang="en-US" sz="2550" dirty="0" spc="0" kern="0">
-                <a:solidFill>
-                  <a:srgbClr val="14161C"/>
-                </a:solidFill>
-                <a:latin typeface="Be Vietnam Pro" pitchFamily="34" charset="0"/>
-                <a:ea typeface="Be Vietnam Pro" pitchFamily="34" charset="-122"/>
-                <a:cs typeface="Be Vietnam Pro" pitchFamily="34" charset="-120"/>
-              </a:rPr>
-              <a:t> thời có</a:t>
-            </a:r>
-            <a:r>
-              <a:rPr lang="en-US" sz="2550" dirty="0" spc="12" kern="0">
-                <a:solidFill>
-                  <a:srgbClr val="14161C"/>
-                </a:solidFill>
-                <a:latin typeface="Be Vietnam Pro" pitchFamily="34" charset="0"/>
-                <a:ea typeface="Be Vietnam Pro" pitchFamily="34" charset="-122"/>
-                <a:cs typeface="Be Vietnam Pro" pitchFamily="34" charset="-120"/>
-              </a:rPr>
-              <a:t> đòi</a:t>
-            </a:r>
-            <a:r>
-              <a:rPr lang="en-US" sz="2550" dirty="0" spc="-1" kern="0">
-                <a:solidFill>
-                  <a:srgbClr val="14161C"/>
-                </a:solidFill>
-                <a:latin typeface="Be Vietnam Pro" pitchFamily="34" charset="0"/>
-                <a:ea typeface="Be Vietnam Pro" pitchFamily="34" charset="-122"/>
-                <a:cs typeface="Be Vietnam Pro" pitchFamily="34" charset="-120"/>
-              </a:rPr>
-              <a:t> hỏi</a:t>
-            </a:r>
-            <a:r>
-              <a:rPr lang="en-US" sz="2550" dirty="0" spc="-9" kern="0">
-                <a:solidFill>
-                  <a:srgbClr val="14161C"/>
-                </a:solidFill>
-                <a:latin typeface="Be Vietnam Pro" pitchFamily="34" charset="0"/>
-                <a:ea typeface="Be Vietnam Pro" pitchFamily="34" charset="-122"/>
-                <a:cs typeface="Be Vietnam Pro" pitchFamily="34" charset="-120"/>
-              </a:rPr>
-              <a:t> máy</a:t>
+              <a:t> giúp</a:t>
             </a:r>
             <a:r>
               <a:rPr lang="en-US" sz="2550" dirty="0" spc="1" kern="0">
@@ -16029,29 +15317,7 @@
                 <a:ea typeface="Be Vietnam Pro" pitchFamily="34" charset="-122"/>
                 <a:cs typeface="Be Vietnam Pro" pitchFamily="34" charset="-120"/>
               </a:rPr>
-              <a:t> nhiều</a:t>
-            </a:r>
-            <a:r>
-              <a:rPr lang="en-US" sz="2550" dirty="0" spc="-1" kern="0">
-                <a:solidFill>
-                  <a:srgbClr val="14161C"/>
-                </a:solidFill>
-                <a:latin typeface="Be Vietnam Pro" pitchFamily="34" charset="0"/>
-                <a:ea typeface="Be Vietnam Pro" pitchFamily="34" charset="-122"/>
-                <a:cs typeface="Be Vietnam Pro" pitchFamily="34" charset="-120"/>
-              </a:rPr>
-              <a:t> lõi</a:t>
-            </a:r>
-            <a:r>
-              <a:rPr lang="en-US" sz="2550" dirty="0" spc="0" kern="0">
-                <a:solidFill>
-                  <a:srgbClr val="14161C"/>
-                </a:solidFill>
-                <a:latin typeface="Be Vietnam Pro" pitchFamily="34" charset="0"/>
-                <a:ea typeface="Be Vietnam Pro" pitchFamily="34" charset="-122"/>
-                <a:cs typeface="Be Vietnam Pro" pitchFamily="34" charset="-120"/>
-              </a:rPr>
-              <a:t> không?</a:t>
+              <a:t> B?</a:t>
             </a:r>
             <a:endParaRPr lang="en-US" sz="2550" dirty="0"/>
           </a:p>
@@ -16172,72 +15438,8 @@
           <a:ln/>
         </p:spPr>
         <p:txBody>
-          <a:bodyPr wrap="square" lIns="0" tIns="11430" rIns="0" bIns="-11430" rtlCol="0" anchor="ctr"/>
+          <a:bodyPr wrap="square" lIns="0" tIns="8557" rIns="0" bIns="-8557" rtlCol="0" anchor="ctr"/>
           <a:lstStyle/>
-          <a:p>
-            <a:pPr algn="l" indent="0" marL="0">
-              <a:lnSpc>
-                <a:spcPts val="4050"/>
-              </a:lnSpc>
-              <a:buNone/>
-            </a:pPr>
-            <a:r>
-              <a:rPr lang="en-US" sz="3000" b="1" dirty="0" spc="-5" kern="0">
-                <a:solidFill>
-                  <a:srgbClr val="1F3FD1"/>
-                </a:solidFill>
-                <a:latin typeface="Be Vietnam Pro" pitchFamily="34" charset="0"/>
-                <a:ea typeface="Be Vietnam Pro" pitchFamily="34" charset="-122"/>
-                <a:cs typeface="Be Vietnam Pro" pitchFamily="34" charset="-120"/>
-              </a:rPr>
-              <a:t>A</a:t>
-            </a:r>
-            <a:r>
-              <a:rPr lang="en-US" sz="3000" b="1" dirty="0" spc="-4" kern="0">
-                <a:solidFill>
-                  <a:srgbClr val="1F3FD1"/>
-                </a:solidFill>
-                <a:latin typeface="Be Vietnam Pro" pitchFamily="34" charset="0"/>
-                <a:ea typeface="Be Vietnam Pro" pitchFamily="34" charset="-122"/>
-                <a:cs typeface="Be Vietnam Pro" pitchFamily="34" charset="-120"/>
-              </a:rPr>
-              <a:t> hợp</a:t>
-            </a:r>
-            <a:r>
-              <a:rPr lang="en-US" sz="3000" b="1" dirty="0" spc="-13" kern="0">
-                <a:solidFill>
-                  <a:srgbClr val="1F3FD1"/>
-                </a:solidFill>
-                <a:latin typeface="Be Vietnam Pro" pitchFamily="34" charset="0"/>
-                <a:ea typeface="Be Vietnam Pro" pitchFamily="34" charset="-122"/>
-                <a:cs typeface="Be Vietnam Pro" pitchFamily="34" charset="-120"/>
-              </a:rPr>
-              <a:t> với</a:t>
-            </a:r>
-            <a:r>
-              <a:rPr lang="en-US" sz="3000" b="1" dirty="0" spc="-3" kern="0">
-                <a:solidFill>
-                  <a:srgbClr val="1F3FD1"/>
-                </a:solidFill>
-                <a:latin typeface="Be Vietnam Pro" pitchFamily="34" charset="0"/>
-                <a:ea typeface="Be Vietnam Pro" pitchFamily="34" charset="-122"/>
-                <a:cs typeface="Be Vietnam Pro" pitchFamily="34" charset="-120"/>
-              </a:rPr>
-              <a:t> đồng</a:t>
-            </a:r>
-            <a:r>
-              <a:rPr lang="en-US" sz="3000" b="1" dirty="0" spc="3" kern="0">
-                <a:solidFill>
-                  <a:srgbClr val="1F3FD1"/>
-                </a:solidFill>
-                <a:latin typeface="Be Vietnam Pro" pitchFamily="34" charset="0"/>
-                <a:ea typeface="Be Vietnam Pro" pitchFamily="34" charset="-122"/>
-                <a:cs typeface="Be Vietnam Pro" pitchFamily="34" charset="-120"/>
-              </a:rPr>
-              <a:t> thời</a:t>
-            </a:r>
-            <a:endParaRPr lang="en-US" sz="3000" dirty="0"/>
-          </a:p>
           <a:p>
             <a:pPr algn="l" indent="0" marL="0">
               <a:lnSpc>
@@ -16246,15 +15448,48 @@
               <a:buNone/>
             </a:pPr>
             <a:r>
-              <a:rPr lang="en-US" sz="2250" dirty="0" spc="0" kern="0">
-                <a:solidFill>
-                  <a:srgbClr val="14161C"/>
-                </a:solidFill>
-                <a:latin typeface="Be Vietnam Pro" pitchFamily="34" charset="0"/>
-                <a:ea typeface="Be Vietnam Pro" pitchFamily="34" charset="-122"/>
-                <a:cs typeface="Be Vietnam Pro" pitchFamily="34" charset="-120"/>
-              </a:rPr>
-              <a:t>Bị</a:t>
+              <a:rPr lang="en-US" sz="2250" dirty="0" spc="6" kern="0">
+                <a:solidFill>
+                  <a:srgbClr val="14161C"/>
+                </a:solidFill>
+                <a:latin typeface="Be Vietnam Pro" pitchFamily="34" charset="0"/>
+                <a:ea typeface="Be Vietnam Pro" pitchFamily="34" charset="-122"/>
+                <a:cs typeface="Be Vietnam Pro" pitchFamily="34" charset="-120"/>
+              </a:rPr>
+              <a:t>A</a:t>
+            </a:r>
+            <a:r>
+              <a:rPr lang="en-US" sz="2250" dirty="0" spc="3" kern="0">
+                <a:solidFill>
+                  <a:srgbClr val="14161C"/>
+                </a:solidFill>
+                <a:latin typeface="Be Vietnam Pro" pitchFamily="34" charset="0"/>
+                <a:ea typeface="Be Vietnam Pro" pitchFamily="34" charset="-122"/>
+                <a:cs typeface="Be Vietnam Pro" pitchFamily="34" charset="-120"/>
+              </a:rPr>
+              <a:t> hợp</a:t>
+            </a:r>
+            <a:r>
+              <a:rPr lang="en-US" sz="2250" dirty="0" spc="-11" kern="0">
+                <a:solidFill>
+                  <a:srgbClr val="14161C"/>
+                </a:solidFill>
+                <a:latin typeface="Be Vietnam Pro" pitchFamily="34" charset="0"/>
+                <a:ea typeface="Be Vietnam Pro" pitchFamily="34" charset="-122"/>
+                <a:cs typeface="Be Vietnam Pro" pitchFamily="34" charset="-120"/>
+              </a:rPr>
+              <a:t> với</a:t>
+            </a:r>
+            <a:r>
+              <a:rPr lang="en-US" sz="2250" dirty="0" spc="11" kern="0">
+                <a:solidFill>
+                  <a:srgbClr val="14161C"/>
+                </a:solidFill>
+                <a:latin typeface="Be Vietnam Pro" pitchFamily="34" charset="0"/>
+                <a:ea typeface="Be Vietnam Pro" pitchFamily="34" charset="-122"/>
+                <a:cs typeface="Be Vietnam Pro" pitchFamily="34" charset="-120"/>
+              </a:rPr>
+              <a:t> đồng</a:t>
             </a:r>
             <a:r>
               <a:rPr lang="en-US" sz="2250" dirty="0" spc="1" kern="0">
@@ -16265,8 +15500,17 @@
                 <a:ea typeface="Be Vietnam Pro" pitchFamily="34" charset="-122"/>
                 <a:cs typeface="Be Vietnam Pro" pitchFamily="34" charset="-120"/>
               </a:rPr>
-              <a:t> chặn</a:t>
-            </a:r>
+              <a:t> thời</a:t>
+            </a:r>
+            <a:endParaRPr lang="en-US" sz="2250" dirty="0"/>
+          </a:p>
+          <a:p>
+            <a:pPr algn="l" indent="0" marL="0">
+              <a:lnSpc>
+                <a:spcPts val="3038"/>
+              </a:lnSpc>
+              <a:buNone/>
+            </a:pPr>
             <a:r>
               <a:rPr lang="en-US" sz="2250" dirty="0" spc="-1" kern="0">
                 <a:solidFill>
@@ -16276,51 +15520,29 @@
                 <a:ea typeface="Be Vietnam Pro" pitchFamily="34" charset="-122"/>
                 <a:cs typeface="Be Vietnam Pro" pitchFamily="34" charset="-120"/>
               </a:rPr>
-              <a:t> bởi</a:t>
-            </a:r>
-            <a:r>
-              <a:rPr lang="en-US" sz="2250" dirty="0" spc="-14" kern="0">
-                <a:solidFill>
-                  <a:srgbClr val="14161C"/>
-                </a:solidFill>
-                <a:latin typeface="Be Vietnam Pro" pitchFamily="34" charset="0"/>
-                <a:ea typeface="Be Vietnam Pro" pitchFamily="34" charset="-122"/>
-                <a:cs typeface="Be Vietnam Pro" pitchFamily="34" charset="-120"/>
-              </a:rPr>
-              <a:t> vào</a:t>
-            </a:r>
-            <a:r>
-              <a:rPr lang="en-US" sz="2250" dirty="0" spc="-25" kern="0">
-                <a:solidFill>
-                  <a:srgbClr val="14161C"/>
-                </a:solidFill>
-                <a:latin typeface="Be Vietnam Pro" pitchFamily="34" charset="0"/>
-                <a:ea typeface="Be Vietnam Pro" pitchFamily="34" charset="-122"/>
-                <a:cs typeface="Be Vietnam Pro" pitchFamily="34" charset="-120"/>
-              </a:rPr>
-              <a:t> ra,</a:t>
-            </a:r>
-            <a:r>
-              <a:rPr lang="en-US" sz="2250" dirty="0" spc="19" kern="0">
-                <a:solidFill>
-                  <a:srgbClr val="14161C"/>
-                </a:solidFill>
-                <a:latin typeface="Be Vietnam Pro" pitchFamily="34" charset="0"/>
-                <a:ea typeface="Be Vietnam Pro" pitchFamily="34" charset="-122"/>
-                <a:cs typeface="Be Vietnam Pro" pitchFamily="34" charset="-120"/>
-              </a:rPr>
-              <a:t> độ</a:t>
-            </a:r>
-            <a:r>
-              <a:rPr lang="en-US" sz="2250" dirty="0" spc="-24" kern="0">
-                <a:solidFill>
-                  <a:srgbClr val="14161C"/>
-                </a:solidFill>
-                <a:latin typeface="Be Vietnam Pro" pitchFamily="34" charset="0"/>
-                <a:ea typeface="Be Vietnam Pro" pitchFamily="34" charset="-122"/>
-                <a:cs typeface="Be Vietnam Pro" pitchFamily="34" charset="-120"/>
-              </a:rPr>
-              <a:t> trễ</a:t>
+              <a:t>Thời gian</a:t>
+            </a:r>
+            <a:r>
+              <a:rPr lang="en-US" sz="2250" dirty="0" spc="3" kern="0">
+                <a:solidFill>
+                  <a:srgbClr val="14161C"/>
+                </a:solidFill>
+                <a:latin typeface="Be Vietnam Pro" pitchFamily="34" charset="0"/>
+                <a:ea typeface="Be Vietnam Pro" pitchFamily="34" charset="-122"/>
+                <a:cs typeface="Be Vietnam Pro" pitchFamily="34" charset="-120"/>
+              </a:rPr>
+              <a:t> chờ</a:t>
+            </a:r>
+            <a:r>
+              <a:rPr lang="en-US" sz="2250" dirty="0" spc="2" kern="0">
+                <a:solidFill>
+                  <a:srgbClr val="14161C"/>
+                </a:solidFill>
+                <a:latin typeface="Be Vietnam Pro" pitchFamily="34" charset="0"/>
+                <a:ea typeface="Be Vietnam Pro" pitchFamily="34" charset="-122"/>
+                <a:cs typeface="Be Vietnam Pro" pitchFamily="34" charset="-120"/>
+              </a:rPr>
+              <a:t> chồng</a:t>
             </a:r>
             <a:r>
               <a:rPr lang="en-US" sz="2250" dirty="0" spc="1" kern="0">
@@ -16331,9 +15553,53 @@
                 <a:ea typeface="Be Vietnam Pro" pitchFamily="34" charset="-122"/>
                 <a:cs typeface="Be Vietnam Pro" pitchFamily="34" charset="-120"/>
               </a:rPr>
-              <a:t> cao.</a:t>
-            </a:r>
-            <a:endParaRPr lang="en-US" sz="3000" dirty="0"/>
+              <a:t> nhau:</a:t>
+            </a:r>
+            <a:r>
+              <a:rPr lang="en-US" sz="2250" dirty="0" spc="-2" kern="0">
+                <a:solidFill>
+                  <a:srgbClr val="14161C"/>
+                </a:solidFill>
+                <a:latin typeface="Be Vietnam Pro" pitchFamily="34" charset="0"/>
+                <a:ea typeface="Be Vietnam Pro" pitchFamily="34" charset="-122"/>
+                <a:cs typeface="Be Vietnam Pro" pitchFamily="34" charset="-120"/>
+              </a:rPr>
+              <a:t> 2,00</a:t>
+            </a:r>
+            <a:r>
+              <a:rPr lang="en-US" sz="2250" dirty="0" spc="1" kern="0">
+                <a:solidFill>
+                  <a:srgbClr val="14161C"/>
+                </a:solidFill>
+                <a:latin typeface="Be Vietnam Pro" pitchFamily="34" charset="0"/>
+                <a:ea typeface="Be Vietnam Pro" pitchFamily="34" charset="-122"/>
+                <a:cs typeface="Be Vietnam Pro" pitchFamily="34" charset="-120"/>
+              </a:rPr>
+              <a:t> xuống</a:t>
+            </a:r>
+            <a:r>
+              <a:rPr lang="en-US" sz="2250" dirty="0" spc="-3" kern="0">
+                <a:solidFill>
+                  <a:srgbClr val="14161C"/>
+                </a:solidFill>
+                <a:latin typeface="Be Vietnam Pro" pitchFamily="34" charset="0"/>
+                <a:ea typeface="Be Vietnam Pro" pitchFamily="34" charset="-122"/>
+                <a:cs typeface="Be Vietnam Pro" pitchFamily="34" charset="-120"/>
+              </a:rPr>
+              <a:t> 0,50</a:t>
+            </a:r>
+            <a:r>
+              <a:rPr lang="en-US" sz="2250" dirty="0" spc="-6" kern="0">
+                <a:solidFill>
+                  <a:srgbClr val="14161C"/>
+                </a:solidFill>
+                <a:latin typeface="Be Vietnam Pro" pitchFamily="34" charset="0"/>
+                <a:ea typeface="Be Vietnam Pro" pitchFamily="34" charset="-122"/>
+                <a:cs typeface="Be Vietnam Pro" pitchFamily="34" charset="-120"/>
+              </a:rPr>
+              <a:t> giây.</a:t>
+            </a:r>
+            <a:endParaRPr lang="en-US" sz="2250" dirty="0"/>
           </a:p>
         </p:txBody>
       </p:sp>
@@ -16425,72 +15691,8 @@
           <a:ln/>
         </p:spPr>
         <p:txBody>
-          <a:bodyPr wrap="square" lIns="0" tIns="11430" rIns="0" bIns="-11430" rtlCol="0" anchor="ctr"/>
+          <a:bodyPr wrap="square" lIns="0" tIns="8557" rIns="0" bIns="-8557" rtlCol="0" anchor="ctr"/>
           <a:lstStyle/>
-          <a:p>
-            <a:pPr algn="l" indent="0" marL="0">
-              <a:lnSpc>
-                <a:spcPts val="4050"/>
-              </a:lnSpc>
-              <a:buNone/>
-            </a:pPr>
-            <a:r>
-              <a:rPr lang="en-US" sz="3000" b="1" dirty="0" spc="2" kern="0">
-                <a:solidFill>
-                  <a:srgbClr val="0F766E"/>
-                </a:solidFill>
-                <a:latin typeface="Be Vietnam Pro" pitchFamily="34" charset="0"/>
-                <a:ea typeface="Be Vietnam Pro" pitchFamily="34" charset="-122"/>
-                <a:cs typeface="Be Vietnam Pro" pitchFamily="34" charset="-120"/>
-              </a:rPr>
-              <a:t>B</a:t>
-            </a:r>
-            <a:r>
-              <a:rPr lang="en-US" sz="3000" b="1" dirty="0" spc="-3" kern="0">
-                <a:solidFill>
-                  <a:srgbClr val="0F766E"/>
-                </a:solidFill>
-                <a:latin typeface="Be Vietnam Pro" pitchFamily="34" charset="0"/>
-                <a:ea typeface="Be Vietnam Pro" pitchFamily="34" charset="-122"/>
-                <a:cs typeface="Be Vietnam Pro" pitchFamily="34" charset="-120"/>
-              </a:rPr>
-              <a:t> hợp</a:t>
-            </a:r>
-            <a:r>
-              <a:rPr lang="en-US" sz="3000" b="1" dirty="0" spc="-14" kern="0">
-                <a:solidFill>
-                  <a:srgbClr val="0F766E"/>
-                </a:solidFill>
-                <a:latin typeface="Be Vietnam Pro" pitchFamily="34" charset="0"/>
-                <a:ea typeface="Be Vietnam Pro" pitchFamily="34" charset="-122"/>
-                <a:cs typeface="Be Vietnam Pro" pitchFamily="34" charset="-120"/>
-              </a:rPr>
-              <a:t> với</a:t>
-            </a:r>
-            <a:r>
-              <a:rPr lang="en-US" sz="3000" b="1" dirty="0" spc="-10" kern="0">
-                <a:solidFill>
-                  <a:srgbClr val="0F766E"/>
-                </a:solidFill>
-                <a:latin typeface="Be Vietnam Pro" pitchFamily="34" charset="0"/>
-                <a:ea typeface="Be Vietnam Pro" pitchFamily="34" charset="-122"/>
-                <a:cs typeface="Be Vietnam Pro" pitchFamily="34" charset="-120"/>
-              </a:rPr>
-              <a:t> song</a:t>
-            </a:r>
-            <a:r>
-              <a:rPr lang="en-US" sz="3000" b="1" dirty="0" spc="-11" kern="0">
-                <a:solidFill>
-                  <a:srgbClr val="0F766E"/>
-                </a:solidFill>
-                <a:latin typeface="Be Vietnam Pro" pitchFamily="34" charset="0"/>
-                <a:ea typeface="Be Vietnam Pro" pitchFamily="34" charset="-122"/>
-                <a:cs typeface="Be Vietnam Pro" pitchFamily="34" charset="-120"/>
-              </a:rPr>
-              <a:t> song</a:t>
-            </a:r>
-            <a:endParaRPr lang="en-US" sz="3000" dirty="0"/>
-          </a:p>
           <a:p>
             <a:pPr algn="l" indent="0" marL="0">
               <a:lnSpc>
@@ -16499,6 +15701,103 @@
               <a:buNone/>
             </a:pPr>
             <a:r>
+              <a:rPr lang="en-US" sz="2250" dirty="0" spc="4" kern="0">
+                <a:solidFill>
+                  <a:srgbClr val="14161C"/>
+                </a:solidFill>
+                <a:latin typeface="Be Vietnam Pro" pitchFamily="34" charset="0"/>
+                <a:ea typeface="Be Vietnam Pro" pitchFamily="34" charset="-122"/>
+                <a:cs typeface="Be Vietnam Pro" pitchFamily="34" charset="-120"/>
+              </a:rPr>
+              <a:t>B</a:t>
+            </a:r>
+            <a:r>
+              <a:rPr lang="en-US" sz="2250" dirty="0" spc="3" kern="0">
+                <a:solidFill>
+                  <a:srgbClr val="14161C"/>
+                </a:solidFill>
+                <a:latin typeface="Be Vietnam Pro" pitchFamily="34" charset="0"/>
+                <a:ea typeface="Be Vietnam Pro" pitchFamily="34" charset="-122"/>
+                <a:cs typeface="Be Vietnam Pro" pitchFamily="34" charset="-120"/>
+              </a:rPr>
+              <a:t> hợp</a:t>
+            </a:r>
+            <a:r>
+              <a:rPr lang="en-US" sz="2250" dirty="0" spc="-11" kern="0">
+                <a:solidFill>
+                  <a:srgbClr val="14161C"/>
+                </a:solidFill>
+                <a:latin typeface="Be Vietnam Pro" pitchFamily="34" charset="0"/>
+                <a:ea typeface="Be Vietnam Pro" pitchFamily="34" charset="-122"/>
+                <a:cs typeface="Be Vietnam Pro" pitchFamily="34" charset="-120"/>
+              </a:rPr>
+              <a:t> với</a:t>
+            </a:r>
+            <a:r>
+              <a:rPr lang="en-US" sz="2250" dirty="0" spc="-4" kern="0">
+                <a:solidFill>
+                  <a:srgbClr val="14161C"/>
+                </a:solidFill>
+                <a:latin typeface="Be Vietnam Pro" pitchFamily="34" charset="0"/>
+                <a:ea typeface="Be Vietnam Pro" pitchFamily="34" charset="-122"/>
+                <a:cs typeface="Be Vietnam Pro" pitchFamily="34" charset="-120"/>
+              </a:rPr>
+              <a:t> song song</a:t>
+            </a:r>
+            <a:endParaRPr lang="en-US" sz="2250" dirty="0"/>
+          </a:p>
+          <a:p>
+            <a:pPr algn="l" indent="0" marL="0">
+              <a:lnSpc>
+                <a:spcPts val="3038"/>
+              </a:lnSpc>
+              <a:buNone/>
+            </a:pPr>
+            <a:r>
+              <a:rPr lang="en-US" sz="2250" dirty="0" spc="-12" kern="0">
+                <a:solidFill>
+                  <a:srgbClr val="14161C"/>
+                </a:solidFill>
+                <a:latin typeface="Be Vietnam Pro" pitchFamily="34" charset="0"/>
+                <a:ea typeface="Be Vietnam Pro" pitchFamily="34" charset="-122"/>
+                <a:cs typeface="Be Vietnam Pro" pitchFamily="34" charset="-120"/>
+              </a:rPr>
+              <a:t>Luồng</a:t>
+            </a:r>
+            <a:r>
+              <a:rPr lang="en-US" sz="2250" dirty="0" spc="1" kern="0">
+                <a:solidFill>
+                  <a:srgbClr val="14161C"/>
+                </a:solidFill>
+                <a:latin typeface="Be Vietnam Pro" pitchFamily="34" charset="0"/>
+                <a:ea typeface="Be Vietnam Pro" pitchFamily="34" charset="-122"/>
+                <a:cs typeface="Be Vietnam Pro" pitchFamily="34" charset="-120"/>
+              </a:rPr>
+              <a:t> bị</a:t>
+            </a:r>
+            <a:r>
+              <a:rPr lang="en-US" sz="2250" dirty="0" spc="4" kern="0">
+                <a:solidFill>
+                  <a:srgbClr val="14161C"/>
+                </a:solidFill>
+                <a:latin typeface="Be Vietnam Pro" pitchFamily="34" charset="0"/>
+                <a:ea typeface="Be Vietnam Pro" pitchFamily="34" charset="-122"/>
+                <a:cs typeface="Be Vietnam Pro" pitchFamily="34" charset="-120"/>
+              </a:rPr>
+              <a:t> GIL</a:t>
+            </a:r>
+            <a:r>
+              <a:rPr lang="en-US" sz="2250" dirty="0" spc="-1" kern="0">
+                <a:solidFill>
+                  <a:srgbClr val="14161C"/>
+                </a:solidFill>
+                <a:latin typeface="Be Vietnam Pro" pitchFamily="34" charset="0"/>
+                <a:ea typeface="Be Vietnam Pro" pitchFamily="34" charset="-122"/>
+                <a:cs typeface="Be Vietnam Pro" pitchFamily="34" charset="-120"/>
+              </a:rPr>
+              <a:t> chặn;</a:t>
+            </a:r>
+            <a:r>
               <a:rPr lang="en-US" sz="2250" dirty="0" spc="0" kern="0">
                 <a:solidFill>
                   <a:srgbClr val="14161C"/>
@@ -16507,18 +15806,29 @@
                 <a:ea typeface="Be Vietnam Pro" pitchFamily="34" charset="-122"/>
                 <a:cs typeface="Be Vietnam Pro" pitchFamily="34" charset="-120"/>
               </a:rPr>
-              <a:t>Bị</a:t>
-            </a:r>
-            <a:r>
-              <a:rPr lang="en-US" sz="2250" dirty="0" spc="1" kern="0">
-                <a:solidFill>
-                  <a:srgbClr val="14161C"/>
-                </a:solidFill>
-                <a:latin typeface="Be Vietnam Pro" pitchFamily="34" charset="0"/>
-                <a:ea typeface="Be Vietnam Pro" pitchFamily="34" charset="-122"/>
-                <a:cs typeface="Be Vietnam Pro" pitchFamily="34" charset="-120"/>
-              </a:rPr>
-              <a:t> chặn</a:t>
+              <a:t> tiến</a:t>
+            </a:r>
+            <a:r>
+              <a:rPr lang="en-US" sz="2250" dirty="0" spc="7" kern="0">
+                <a:solidFill>
+                  <a:srgbClr val="14161C"/>
+                </a:solidFill>
+                <a:latin typeface="Be Vietnam Pro" pitchFamily="34" charset="0"/>
+                <a:ea typeface="Be Vietnam Pro" pitchFamily="34" charset="-122"/>
+                <a:cs typeface="Be Vietnam Pro" pitchFamily="34" charset="-120"/>
+              </a:rPr>
+              <a:t> trình</a:t>
+            </a:r>
+            <a:r>
+              <a:rPr lang="en-US" sz="2250" dirty="0" spc="2" kern="0">
+                <a:solidFill>
+                  <a:srgbClr val="14161C"/>
+                </a:solidFill>
+                <a:latin typeface="Be Vietnam Pro" pitchFamily="34" charset="0"/>
+                <a:ea typeface="Be Vietnam Pro" pitchFamily="34" charset="-122"/>
+                <a:cs typeface="Be Vietnam Pro" pitchFamily="34" charset="-120"/>
+              </a:rPr>
+              <a:t> dùng</a:t>
             </a:r>
             <a:r>
               <a:rPr lang="en-US" sz="2250" dirty="0" spc="-1" kern="0">
@@ -16529,18 +15839,7 @@
                 <a:ea typeface="Be Vietnam Pro" pitchFamily="34" charset="-122"/>
                 <a:cs typeface="Be Vietnam Pro" pitchFamily="34" charset="-120"/>
               </a:rPr>
-              <a:t> bởi</a:t>
-            </a:r>
-            <a:r>
-              <a:rPr lang="en-US" sz="2250" dirty="0" spc="-3" kern="0">
-                <a:solidFill>
-                  <a:srgbClr val="14161C"/>
-                </a:solidFill>
-                <a:latin typeface="Be Vietnam Pro" pitchFamily="34" charset="0"/>
-                <a:ea typeface="Be Vietnam Pro" pitchFamily="34" charset="-122"/>
-                <a:cs typeface="Be Vietnam Pro" pitchFamily="34" charset="-120"/>
-              </a:rPr>
-              <a:t> CPU,</a:t>
+              <a:t> nhiều</a:t>
             </a:r>
             <a:r>
               <a:rPr lang="en-US" sz="2250" dirty="0" spc="2" kern="0">
@@ -16551,53 +15850,9 @@
                 <a:ea typeface="Be Vietnam Pro" pitchFamily="34" charset="-122"/>
                 <a:cs typeface="Be Vietnam Pro" pitchFamily="34" charset="-120"/>
               </a:rPr>
-              <a:t> cần</a:t>
-            </a:r>
-            <a:r>
-              <a:rPr lang="en-US" sz="2250" dirty="0" spc="-11" kern="0">
-                <a:solidFill>
-                  <a:srgbClr val="14161C"/>
-                </a:solidFill>
-                <a:latin typeface="Be Vietnam Pro" pitchFamily="34" charset="0"/>
-                <a:ea typeface="Be Vietnam Pro" pitchFamily="34" charset="-122"/>
-                <a:cs typeface="Be Vietnam Pro" pitchFamily="34" charset="-120"/>
-              </a:rPr>
-              <a:t> tốc</a:t>
-            </a:r>
-            <a:r>
-              <a:rPr lang="en-US" sz="2250" dirty="0" spc="19" kern="0">
-                <a:solidFill>
-                  <a:srgbClr val="14161C"/>
-                </a:solidFill>
-                <a:latin typeface="Be Vietnam Pro" pitchFamily="34" charset="0"/>
-                <a:ea typeface="Be Vietnam Pro" pitchFamily="34" charset="-122"/>
-                <a:cs typeface="Be Vietnam Pro" pitchFamily="34" charset="-120"/>
-              </a:rPr>
-              <a:t> độ</a:t>
-            </a:r>
-            <a:r>
-              <a:rPr lang="en-US" sz="2250" dirty="0" spc="0" kern="0">
-                <a:solidFill>
-                  <a:srgbClr val="14161C"/>
-                </a:solidFill>
-                <a:latin typeface="Be Vietnam Pro" pitchFamily="34" charset="0"/>
-                <a:ea typeface="Be Vietnam Pro" pitchFamily="34" charset="-122"/>
-                <a:cs typeface="Be Vietnam Pro" pitchFamily="34" charset="-120"/>
-              </a:rPr>
-              <a:t> tính</a:t>
-            </a:r>
-            <a:r>
-              <a:rPr lang="en-US" sz="2250" dirty="0" spc="-9" kern="0">
-                <a:solidFill>
-                  <a:srgbClr val="14161C"/>
-                </a:solidFill>
-                <a:latin typeface="Be Vietnam Pro" pitchFamily="34" charset="0"/>
-                <a:ea typeface="Be Vietnam Pro" pitchFamily="34" charset="-122"/>
-                <a:cs typeface="Be Vietnam Pro" pitchFamily="34" charset="-120"/>
-              </a:rPr>
-              <a:t> toán.</a:t>
-            </a:r>
-            <a:endParaRPr lang="en-US" sz="3000" dirty="0"/>
+              <a:t> lõi.</a:t>
+            </a:r>
+            <a:endParaRPr lang="en-US" sz="2250" dirty="0"/>
           </a:p>
         </p:txBody>
       </p:sp>
@@ -17030,61 +16285,8 @@
           <a:ln/>
         </p:spPr>
         <p:txBody>
-          <a:bodyPr wrap="square" lIns="0" tIns="11430" rIns="0" bIns="-11430" rtlCol="0" anchor="ctr"/>
+          <a:bodyPr wrap="square" lIns="0" tIns="8557" rIns="0" bIns="-8557" rtlCol="0" anchor="ctr"/>
           <a:lstStyle/>
-          <a:p>
-            <a:pPr algn="l" indent="0" marL="0">
-              <a:lnSpc>
-                <a:spcPts val="4050"/>
-              </a:lnSpc>
-              <a:buNone/>
-            </a:pPr>
-            <a:r>
-              <a:rPr lang="en-US" sz="3000" b="1" dirty="0" spc="-12" kern="0">
-                <a:solidFill>
-                  <a:srgbClr val="14161C"/>
-                </a:solidFill>
-                <a:latin typeface="Be Vietnam Pro" pitchFamily="34" charset="0"/>
-                <a:ea typeface="Be Vietnam Pro" pitchFamily="34" charset="-122"/>
-                <a:cs typeface="Be Vietnam Pro" pitchFamily="34" charset="-120"/>
-              </a:rPr>
-              <a:t>Không</a:t>
-            </a:r>
-            <a:r>
-              <a:rPr lang="en-US" sz="3000" b="1" dirty="0" spc="-3" kern="0">
-                <a:solidFill>
-                  <a:srgbClr val="14161C"/>
-                </a:solidFill>
-                <a:latin typeface="Be Vietnam Pro" pitchFamily="34" charset="0"/>
-                <a:ea typeface="Be Vietnam Pro" pitchFamily="34" charset="-122"/>
-                <a:cs typeface="Be Vietnam Pro" pitchFamily="34" charset="-120"/>
-              </a:rPr>
-              <a:t> cần</a:t>
-            </a:r>
-            <a:r>
-              <a:rPr lang="en-US" sz="3000" b="1" dirty="0" spc="0" kern="0">
-                <a:solidFill>
-                  <a:srgbClr val="14161C"/>
-                </a:solidFill>
-                <a:latin typeface="Be Vietnam Pro" pitchFamily="34" charset="0"/>
-                <a:ea typeface="Be Vietnam Pro" pitchFamily="34" charset="-122"/>
-                <a:cs typeface="Be Vietnam Pro" pitchFamily="34" charset="-120"/>
-              </a:rPr>
-              <a:t> nhiều</a:t>
-            </a:r>
-            <a:r>
-              <a:rPr lang="en-US" sz="3000" b="1" dirty="0" spc="-4" kern="0">
-                <a:solidFill>
-                  <a:srgbClr val="14161C"/>
-                </a:solidFill>
-                <a:latin typeface="Be Vietnam Pro" pitchFamily="34" charset="0"/>
-                <a:ea typeface="Be Vietnam Pro" pitchFamily="34" charset="-122"/>
-                <a:cs typeface="Be Vietnam Pro" pitchFamily="34" charset="-120"/>
-              </a:rPr>
-              <a:t> lõi</a:t>
-            </a:r>
-            <a:endParaRPr lang="en-US" sz="3000" dirty="0"/>
-          </a:p>
           <a:p>
             <a:pPr algn="l" indent="0" marL="0">
               <a:lnSpc>
@@ -17093,27 +16295,41 @@
               <a:buNone/>
             </a:pPr>
             <a:r>
-              <a:rPr lang="en-US" sz="2250" b="1" dirty="0" spc="-7" kern="0">
-                <a:solidFill>
-                  <a:srgbClr val="1F3FD1"/>
-                </a:solidFill>
-                <a:latin typeface="Be Vietnam Pro" pitchFamily="34" charset="0"/>
-                <a:ea typeface="Be Vietnam Pro" pitchFamily="34" charset="-122"/>
-                <a:cs typeface="Be Vietnam Pro" pitchFamily="34" charset="-120"/>
-              </a:rPr>
-              <a:t>Đồng</a:t>
-            </a:r>
-            <a:r>
-              <a:rPr lang="en-US" sz="2250" b="1" dirty="0" spc="5" kern="0">
-                <a:solidFill>
-                  <a:srgbClr val="1F3FD1"/>
-                </a:solidFill>
-                <a:latin typeface="Be Vietnam Pro" pitchFamily="34" charset="0"/>
-                <a:ea typeface="Be Vietnam Pro" pitchFamily="34" charset="-122"/>
-                <a:cs typeface="Be Vietnam Pro" pitchFamily="34" charset="-120"/>
-              </a:rPr>
-              <a:t> thời</a:t>
-            </a:r>
+              <a:rPr lang="en-US" sz="2250" dirty="0" spc="-12" kern="0">
+                <a:solidFill>
+                  <a:srgbClr val="14161C"/>
+                </a:solidFill>
+                <a:latin typeface="Be Vietnam Pro" pitchFamily="34" charset="0"/>
+                <a:ea typeface="Be Vietnam Pro" pitchFamily="34" charset="-122"/>
+                <a:cs typeface="Be Vietnam Pro" pitchFamily="34" charset="-120"/>
+              </a:rPr>
+              <a:t>Luồng</a:t>
+            </a:r>
+            <a:r>
+              <a:rPr lang="en-US" sz="2250" dirty="0" spc="1" kern="0">
+                <a:solidFill>
+                  <a:srgbClr val="14161C"/>
+                </a:solidFill>
+                <a:latin typeface="Be Vietnam Pro" pitchFamily="34" charset="0"/>
+                <a:ea typeface="Be Vietnam Pro" pitchFamily="34" charset="-122"/>
+                <a:cs typeface="Be Vietnam Pro" pitchFamily="34" charset="-120"/>
+              </a:rPr>
+              <a:t> không giúp</a:t>
+            </a:r>
+            <a:r>
+              <a:rPr lang="en-US" sz="2250" dirty="0" spc="3" kern="0">
+                <a:solidFill>
+                  <a:srgbClr val="14161C"/>
+                </a:solidFill>
+                <a:latin typeface="Be Vietnam Pro" pitchFamily="34" charset="0"/>
+                <a:ea typeface="Be Vietnam Pro" pitchFamily="34" charset="-122"/>
+                <a:cs typeface="Be Vietnam Pro" pitchFamily="34" charset="-120"/>
+              </a:rPr>
+              <a:t> B</a:t>
+            </a:r>
+            <a:endParaRPr lang="en-US" sz="2250" dirty="0"/>
+          </a:p>
+          <a:p>
             <a:pPr algn="l" indent="0" marL="0">
               <a:lnSpc>
                 <a:spcPts val="3038"/>
@@ -17121,37 +16337,15 @@
               <a:buNone/>
             </a:pPr>
             <a:r>
-              <a:rPr lang="en-US" sz="2250" dirty="0" spc="-6" kern="0">
-                <a:solidFill>
-                  <a:srgbClr val="14161C"/>
-                </a:solidFill>
-                <a:latin typeface="Be Vietnam Pro" pitchFamily="34" charset="0"/>
-                <a:ea typeface="Be Vietnam Pro" pitchFamily="34" charset="-122"/>
-                <a:cs typeface="Be Vietnam Pro" pitchFamily="34" charset="-120"/>
-              </a:rPr>
-              <a:t> chạy</a:t>
-            </a:r>
-            <a:r>
-              <a:rPr lang="en-US" sz="2250" dirty="0" spc="9" kern="0">
-                <a:solidFill>
-                  <a:srgbClr val="14161C"/>
-                </a:solidFill>
-                <a:latin typeface="Be Vietnam Pro" pitchFamily="34" charset="0"/>
-                <a:ea typeface="Be Vietnam Pro" pitchFamily="34" charset="-122"/>
-                <a:cs typeface="Be Vietnam Pro" pitchFamily="34" charset="-120"/>
-              </a:rPr>
-              <a:t> được</a:t>
-            </a:r>
-            <a:r>
-              <a:rPr lang="en-US" sz="2250" dirty="0" spc="-19" kern="0">
-                <a:solidFill>
-                  <a:srgbClr val="14161C"/>
-                </a:solidFill>
-                <a:latin typeface="Be Vietnam Pro" pitchFamily="34" charset="0"/>
-                <a:ea typeface="Be Vietnam Pro" pitchFamily="34" charset="-122"/>
-                <a:cs typeface="Be Vietnam Pro" pitchFamily="34" charset="-120"/>
-              </a:rPr>
-              <a:t> trên</a:t>
+              <a:rPr lang="en-US" sz="2250" dirty="0" spc="4" kern="0">
+                <a:solidFill>
+                  <a:srgbClr val="14161C"/>
+                </a:solidFill>
+                <a:latin typeface="Be Vietnam Pro" pitchFamily="34" charset="0"/>
+                <a:ea typeface="Be Vietnam Pro" pitchFamily="34" charset="-122"/>
+                <a:cs typeface="Be Vietnam Pro" pitchFamily="34" charset="-120"/>
+              </a:rPr>
+              <a:t>GIL:</a:t>
             </a:r>
             <a:r>
               <a:rPr lang="en-US" sz="2250" dirty="0" spc="-4" kern="0">
@@ -17165,17 +16359,50 @@
               <a:t> một</a:t>
             </a:r>
             <a:r>
-              <a:rPr lang="en-US" sz="2250" dirty="0" spc="2" kern="0">
-                <a:solidFill>
-                  <a:srgbClr val="14161C"/>
-                </a:solidFill>
-                <a:latin typeface="Be Vietnam Pro" pitchFamily="34" charset="0"/>
-                <a:ea typeface="Be Vietnam Pro" pitchFamily="34" charset="-122"/>
-                <a:cs typeface="Be Vietnam Pro" pitchFamily="34" charset="-120"/>
-              </a:rPr>
-              <a:t> lõi.</a:t>
-            </a:r>
-            <a:endParaRPr lang="en-US" sz="3000" dirty="0"/>
+              <a:rPr lang="en-US" sz="2250" dirty="0" spc="3" kern="0">
+                <a:solidFill>
+                  <a:srgbClr val="14161C"/>
+                </a:solidFill>
+                <a:latin typeface="Be Vietnam Pro" pitchFamily="34" charset="0"/>
+                <a:ea typeface="Be Vietnam Pro" pitchFamily="34" charset="-122"/>
+                <a:cs typeface="Be Vietnam Pro" pitchFamily="34" charset="-120"/>
+              </a:rPr>
+              <a:t> lúc</a:t>
+            </a:r>
+            <a:r>
+              <a:rPr lang="en-US" sz="2250" dirty="0" spc="1" kern="0">
+                <a:solidFill>
+                  <a:srgbClr val="14161C"/>
+                </a:solidFill>
+                <a:latin typeface="Be Vietnam Pro" pitchFamily="34" charset="0"/>
+                <a:ea typeface="Be Vietnam Pro" pitchFamily="34" charset="-122"/>
+                <a:cs typeface="Be Vietnam Pro" pitchFamily="34" charset="-120"/>
+              </a:rPr>
+              <a:t> chỉ</a:t>
+            </a:r>
+            <a:r>
+              <a:rPr lang="en-US" sz="2250" dirty="0" spc="-4" kern="0">
+                <a:solidFill>
+                  <a:srgbClr val="14161C"/>
+                </a:solidFill>
+                <a:latin typeface="Be Vietnam Pro" pitchFamily="34" charset="0"/>
+                <a:ea typeface="Be Vietnam Pro" pitchFamily="34" charset="-122"/>
+                <a:cs typeface="Be Vietnam Pro" pitchFamily="34" charset="-120"/>
+              </a:rPr>
+              <a:t> một</a:t>
+            </a:r>
+            <a:r>
+              <a:rPr lang="en-US" sz="2250" dirty="0" spc="1" kern="0">
+                <a:solidFill>
+                  <a:srgbClr val="14161C"/>
+                </a:solidFill>
+                <a:latin typeface="Be Vietnam Pro" pitchFamily="34" charset="0"/>
+                <a:ea typeface="Be Vietnam Pro" pitchFamily="34" charset="-122"/>
+                <a:cs typeface="Be Vietnam Pro" pitchFamily="34" charset="-120"/>
+              </a:rPr>
+              <a:t> luồng</a:t>
+            </a:r>
+            <a:endParaRPr lang="en-US" sz="2250" dirty="0"/>
           </a:p>
           <a:p>
             <a:pPr algn="l" indent="0" marL="0">
@@ -17185,67 +16412,39 @@
               <a:buNone/>
             </a:pPr>
             <a:r>
-              <a:rPr lang="en-US" sz="2250" b="1" dirty="0" spc="-8" kern="0">
-                <a:solidFill>
-                  <a:srgbClr val="0F766E"/>
-                </a:solidFill>
-                <a:latin typeface="Be Vietnam Pro" pitchFamily="34" charset="0"/>
-                <a:ea typeface="Be Vietnam Pro" pitchFamily="34" charset="-122"/>
-                <a:cs typeface="Be Vietnam Pro" pitchFamily="34" charset="-120"/>
-              </a:rPr>
-              <a:t>Song song</a:t>
-            </a:r>
-            <a:pPr algn="l" indent="0" marL="0">
-              <a:lnSpc>
-                <a:spcPts val="3038"/>
-              </a:lnSpc>
-              <a:buNone/>
-            </a:pPr>
-            <a:r>
-              <a:rPr lang="en-US" sz="2250" dirty="0" spc="0" kern="0">
-                <a:solidFill>
-                  <a:srgbClr val="14161C"/>
-                </a:solidFill>
-                <a:latin typeface="Be Vietnam Pro" pitchFamily="34" charset="0"/>
-                <a:ea typeface="Be Vietnam Pro" pitchFamily="34" charset="-122"/>
-                <a:cs typeface="Be Vietnam Pro" pitchFamily="34" charset="-120"/>
-              </a:rPr>
-              <a:t> thì</a:t>
-            </a:r>
-            <a:r>
-              <a:rPr lang="en-US" sz="2250" dirty="0" spc="1" kern="0">
-                <a:solidFill>
-                  <a:srgbClr val="14161C"/>
-                </a:solidFill>
-                <a:latin typeface="Be Vietnam Pro" pitchFamily="34" charset="0"/>
-                <a:ea typeface="Be Vietnam Pro" pitchFamily="34" charset="-122"/>
-                <a:cs typeface="Be Vietnam Pro" pitchFamily="34" charset="-120"/>
-              </a:rPr>
-              <a:t> cần</a:t>
-            </a:r>
-            <a:r>
-              <a:rPr lang="en-US" sz="2250" dirty="0" spc="-1" kern="0">
-                <a:solidFill>
-                  <a:srgbClr val="14161C"/>
-                </a:solidFill>
-                <a:latin typeface="Be Vietnam Pro" pitchFamily="34" charset="0"/>
-                <a:ea typeface="Be Vietnam Pro" pitchFamily="34" charset="-122"/>
-                <a:cs typeface="Be Vietnam Pro" pitchFamily="34" charset="-120"/>
-              </a:rPr>
-              <a:t> nhiều</a:t>
-            </a:r>
-            <a:r>
-              <a:rPr lang="en-US" sz="2250" dirty="0" spc="2" kern="0">
-                <a:solidFill>
-                  <a:srgbClr val="14161C"/>
-                </a:solidFill>
-                <a:latin typeface="Be Vietnam Pro" pitchFamily="34" charset="0"/>
-                <a:ea typeface="Be Vietnam Pro" pitchFamily="34" charset="-122"/>
-                <a:cs typeface="Be Vietnam Pro" pitchFamily="34" charset="-120"/>
-              </a:rPr>
-              <a:t> lõi.</a:t>
-            </a:r>
-            <a:endParaRPr lang="en-US" sz="3000" dirty="0"/>
+              <a:rPr lang="en-US" sz="2250" dirty="0" spc="-9" kern="0">
+                <a:solidFill>
+                  <a:srgbClr val="14161C"/>
+                </a:solidFill>
+                <a:latin typeface="Be Vietnam Pro" pitchFamily="34" charset="0"/>
+                <a:ea typeface="Be Vietnam Pro" pitchFamily="34" charset="-122"/>
+                <a:cs typeface="Be Vietnam Pro" pitchFamily="34" charset="-120"/>
+              </a:rPr>
+              <a:t>chạy</a:t>
+            </a:r>
+            <a:r>
+              <a:rPr lang="en-US" sz="2250" dirty="0" spc="-2" kern="0">
+                <a:solidFill>
+                  <a:srgbClr val="14161C"/>
+                </a:solidFill>
+                <a:latin typeface="Be Vietnam Pro" pitchFamily="34" charset="0"/>
+                <a:ea typeface="Be Vietnam Pro" pitchFamily="34" charset="-122"/>
+                <a:cs typeface="Be Vietnam Pro" pitchFamily="34" charset="-120"/>
+              </a:rPr>
+              <a:t> mã</a:t>
+            </a:r>
+            <a:r>
+              <a:rPr lang="en-US" sz="2250" dirty="0" spc="6" kern="0">
+                <a:solidFill>
+                  <a:srgbClr val="14161C"/>
+                </a:solidFill>
+                <a:latin typeface="Be Vietnam Pro" pitchFamily="34" charset="0"/>
+                <a:ea typeface="Be Vietnam Pro" pitchFamily="34" charset="-122"/>
+                <a:cs typeface="Be Vietnam Pro" pitchFamily="34" charset="-120"/>
+              </a:rPr>
+              <a:t> Python.</a:t>
+            </a:r>
+            <a:endParaRPr lang="en-US" sz="2250" dirty="0"/>
           </a:p>
         </p:txBody>
       </p:sp>
@@ -18231,7 +17430,7 @@
               <a:buNone/>
             </a:pPr>
             <a:r>
-              <a:rPr lang="en-US" sz="1950" dirty="0" spc="1" kern="0">
+              <a:rPr lang="en-US" sz="1950" dirty="0" spc="0" kern="0">
                 <a:solidFill>
                   <a:srgbClr val="C4C8D6"/>
                 </a:solidFill>
@@ -18239,10 +17438,10 @@
                 <a:ea typeface="Be Vietnam Pro" pitchFamily="34" charset="-122"/>
                 <a:cs typeface="Be Vietnam Pro" pitchFamily="34" charset="-120"/>
               </a:rPr>
-              <a:t>Định</a:t>
-            </a:r>
-            <a:r>
-              <a:rPr lang="en-US" sz="1950" dirty="0" spc="2" kern="0">
+              <a:t>Chỉ</a:t>
+            </a:r>
+            <a:r>
+              <a:rPr lang="en-US" sz="1950" dirty="0" spc="-9" kern="0">
                 <a:solidFill>
                   <a:srgbClr val="C4C8D6"/>
                 </a:solidFill>
@@ -18250,10 +17449,10 @@
                 <a:ea typeface="Be Vietnam Pro" pitchFamily="34" charset="-122"/>
                 <a:cs typeface="Be Vietnam Pro" pitchFamily="34" charset="-120"/>
               </a:rPr>
-              <a:t> nghĩa</a:t>
-            </a:r>
-            <a:r>
-              <a:rPr lang="en-US" sz="1950" dirty="0" spc="9" kern="0">
+              <a:t> lấy</a:t>
+            </a:r>
+            <a:r>
+              <a:rPr lang="en-US" sz="1950" dirty="0" spc="-1" kern="0">
                 <a:solidFill>
                   <a:srgbClr val="C4C8D6"/>
                 </a:solidFill>
@@ -18261,7 +17460,18 @@
                 <a:ea typeface="Be Vietnam Pro" pitchFamily="34" charset="-122"/>
                 <a:cs typeface="Be Vietnam Pro" pitchFamily="34" charset="-120"/>
               </a:rPr>
-              <a:t> đồng</a:t>
+              <a:t> chủ</a:t>
+            </a:r>
+            <a:r>
+              <a:rPr lang="en-US" sz="1950" dirty="0" spc="11" kern="0">
+                <a:solidFill>
+                  <a:srgbClr val="C4C8D6"/>
+                </a:solidFill>
+                <a:latin typeface="Be Vietnam Pro" pitchFamily="34" charset="0"/>
+                <a:ea typeface="Be Vietnam Pro" pitchFamily="34" charset="-122"/>
+                <a:cs typeface="Be Vietnam Pro" pitchFamily="34" charset="-120"/>
+              </a:rPr>
+              <a:t> đề;</a:t>
             </a:r>
             <a:r>
               <a:rPr lang="en-US" sz="1950" dirty="0" spc="-2" kern="0">
@@ -18272,7 +17482,7 @@
                 <a:ea typeface="Be Vietnam Pro" pitchFamily="34" charset="-122"/>
                 <a:cs typeface="Be Vietnam Pro" pitchFamily="34" charset="-120"/>
               </a:rPr>
-              <a:t> thời</a:t>
+              <a:t> ý</a:t>
             </a:r>
             <a:r>
               <a:rPr lang="en-US" sz="1950" dirty="0" spc="-14" kern="0">
@@ -18286,6 +17496,39 @@
               <a:t> và</a:t>
             </a:r>
             <a:r>
+              <a:rPr lang="en-US" sz="1950" dirty="0" spc="-8" kern="0">
+                <a:solidFill>
+                  <a:srgbClr val="C4C8D6"/>
+                </a:solidFill>
+                <a:latin typeface="Be Vietnam Pro" pitchFamily="34" charset="0"/>
+                <a:ea typeface="Be Vietnam Pro" pitchFamily="34" charset="-122"/>
+                <a:cs typeface="Be Vietnam Pro" pitchFamily="34" charset="-120"/>
+              </a:rPr>
+              <a:t> số</a:t>
+            </a:r>
+            <a:r>
+              <a:rPr lang="en-US" sz="1950" dirty="0" spc="15" kern="0">
+                <a:solidFill>
+                  <a:srgbClr val="C4C8D6"/>
+                </a:solidFill>
+                <a:latin typeface="Be Vietnam Pro" pitchFamily="34" charset="0"/>
+                <a:ea typeface="Be Vietnam Pro" pitchFamily="34" charset="-122"/>
+                <a:cs typeface="Be Vietnam Pro" pitchFamily="34" charset="-120"/>
+              </a:rPr>
+              <a:t> đo</a:t>
+            </a:r>
+            <a:r>
+              <a:rPr lang="en-US" sz="1950" dirty="0" spc="-2" kern="0">
+                <a:solidFill>
+                  <a:srgbClr val="C4C8D6"/>
+                </a:solidFill>
+                <a:latin typeface="Be Vietnam Pro" pitchFamily="34" charset="0"/>
+                <a:ea typeface="Be Vietnam Pro" pitchFamily="34" charset="-122"/>
+                <a:cs typeface="Be Vietnam Pro" pitchFamily="34" charset="-120"/>
+              </a:rPr>
+              <a:t> là</a:t>
+            </a:r>
+            <a:r>
               <a:rPr lang="en-US" sz="1950" dirty="0" spc="-1" kern="0">
                 <a:solidFill>
                   <a:srgbClr val="C4C8D6"/>
@@ -18294,10 +17537,10 @@
                 <a:ea typeface="Be Vietnam Pro" pitchFamily="34" charset="-122"/>
                 <a:cs typeface="Be Vietnam Pro" pitchFamily="34" charset="-120"/>
               </a:rPr>
-              <a:t> song song;</a:t>
-            </a:r>
-            <a:r>
-              <a:rPr lang="en-US" sz="1950" dirty="0" spc="2" kern="0">
+              <a:t> của</a:t>
+            </a:r>
+            <a:r>
+              <a:rPr lang="en-US" sz="1950" dirty="0" spc="-3" kern="0">
                 <a:solidFill>
                   <a:srgbClr val="C4C8D6"/>
                 </a:solidFill>
@@ -18305,10 +17548,10 @@
                 <a:ea typeface="Be Vietnam Pro" pitchFamily="34" charset="-122"/>
                 <a:cs typeface="Be Vietnam Pro" pitchFamily="34" charset="-120"/>
               </a:rPr>
-              <a:t> nơi</a:t>
-            </a:r>
-            <a:r>
-              <a:rPr lang="en-US" sz="1950" dirty="0" spc="0" kern="0">
+              <a:t> bài</a:t>
+            </a:r>
+            <a:r>
+              <a:rPr lang="en-US" sz="1950" dirty="0" spc="-7" kern="0">
                 <a:solidFill>
                   <a:srgbClr val="C4C8D6"/>
                 </a:solidFill>
@@ -18316,29 +17559,7 @@
                 <a:ea typeface="Be Vietnam Pro" pitchFamily="34" charset="-122"/>
                 <a:cs typeface="Be Vietnam Pro" pitchFamily="34" charset="-120"/>
               </a:rPr>
-              <a:t> mỗi</a:t>
-            </a:r>
-            <a:r>
-              <a:rPr lang="en-US" sz="1950" dirty="0" spc="-2" kern="0">
-                <a:solidFill>
-                  <a:srgbClr val="C4C8D6"/>
-                </a:solidFill>
-                <a:latin typeface="Be Vietnam Pro" pitchFamily="34" charset="0"/>
-                <a:ea typeface="Be Vietnam Pro" pitchFamily="34" charset="-122"/>
-                <a:cs typeface="Be Vietnam Pro" pitchFamily="34" charset="-120"/>
-              </a:rPr>
-              <a:t> bên</a:t>
-            </a:r>
-            <a:r>
-              <a:rPr lang="en-US" sz="1950" dirty="0" spc="-3" kern="0">
-                <a:solidFill>
-                  <a:srgbClr val="C4C8D6"/>
-                </a:solidFill>
-                <a:latin typeface="Be Vietnam Pro" pitchFamily="34" charset="0"/>
-                <a:ea typeface="Be Vietnam Pro" pitchFamily="34" charset="-122"/>
-                <a:cs typeface="Be Vietnam Pro" pitchFamily="34" charset="-120"/>
-              </a:rPr>
-              <a:t> hợp.</a:t>
+              <a:t> này.</a:t>
             </a:r>
             <a:endParaRPr lang="en-US" sz="1950" dirty="0"/>
           </a:p>
@@ -18712,6 +17933,17 @@
               <a:t> thời,</a:t>
             </a:r>
             <a:r>
+              <a:rPr lang="en-US" sz="1950" dirty="0" spc="2" kern="0">
+                <a:solidFill>
+                  <a:srgbClr val="C4C8D6"/>
+                </a:solidFill>
+                <a:latin typeface="Be Vietnam Pro" pitchFamily="34" charset="0"/>
+                <a:ea typeface="Be Vietnam Pro" pitchFamily="34" charset="-122"/>
+                <a:cs typeface="Be Vietnam Pro" pitchFamily="34" charset="-120"/>
+              </a:rPr>
+              <a:t> GIL,</a:t>
+            </a:r>
+            <a:r>
               <a:rPr lang="en-US" sz="1950" dirty="0" spc="-4" kern="0">
                 <a:solidFill>
                   <a:srgbClr val="C4C8D6"/>
@@ -18720,10 +17952,10 @@
                 <a:ea typeface="Be Vietnam Pro" pitchFamily="34" charset="-122"/>
                 <a:cs typeface="Be Vietnam Pro" pitchFamily="34" charset="-120"/>
               </a:rPr>
-              <a:t> việc</a:t>
-            </a:r>
-            <a:r>
-              <a:rPr lang="en-US" sz="1950" dirty="0" spc="-1" kern="0">
+              <a:t> multiprocessing,</a:t>
+            </a:r>
+            <a:r>
+              <a:rPr lang="en-US" sz="1950" dirty="0" spc="-2" kern="0">
                 <a:solidFill>
                   <a:srgbClr val="C4C8D6"/>
                 </a:solidFill>
@@ -18731,10 +17963,10 @@
                 <a:ea typeface="Be Vietnam Pro" pitchFamily="34" charset="-122"/>
                 <a:cs typeface="Be Vietnam Pro" pitchFamily="34" charset="-120"/>
               </a:rPr>
-              <a:t> bị chặn</a:t>
-            </a:r>
-            <a:r>
-              <a:rPr lang="en-US" sz="1950" dirty="0" spc="-4" kern="0">
+              <a:t> bản</a:t>
+            </a:r>
+            <a:r>
+              <a:rPr lang="en-US" sz="1950" dirty="0" spc="-12" kern="0">
                 <a:solidFill>
                   <a:srgbClr val="C4C8D6"/>
                 </a:solidFill>
@@ -18742,51 +17974,7 @@
                 <a:ea typeface="Be Vietnam Pro" pitchFamily="34" charset="-122"/>
                 <a:cs typeface="Be Vietnam Pro" pitchFamily="34" charset="-120"/>
               </a:rPr>
-              <a:t> bởi</a:t>
-            </a:r>
-            <a:r>
-              <a:rPr lang="en-US" sz="1950" dirty="0" spc="-10" kern="0">
-                <a:solidFill>
-                  <a:srgbClr val="C4C8D6"/>
-                </a:solidFill>
-                <a:latin typeface="Be Vietnam Pro" pitchFamily="34" charset="0"/>
-                <a:ea typeface="Be Vietnam Pro" pitchFamily="34" charset="-122"/>
-                <a:cs typeface="Be Vietnam Pro" pitchFamily="34" charset="-120"/>
-              </a:rPr>
-              <a:t> vào</a:t>
-            </a:r>
-            <a:r>
-              <a:rPr lang="en-US" sz="1950" dirty="0" spc="-18" kern="0">
-                <a:solidFill>
-                  <a:srgbClr val="C4C8D6"/>
-                </a:solidFill>
-                <a:latin typeface="Be Vietnam Pro" pitchFamily="34" charset="0"/>
-                <a:ea typeface="Be Vietnam Pro" pitchFamily="34" charset="-122"/>
-                <a:cs typeface="Be Vietnam Pro" pitchFamily="34" charset="-120"/>
-              </a:rPr>
-              <a:t> ra,</a:t>
-            </a:r>
-            <a:r>
-              <a:rPr lang="en-US" sz="1950" dirty="0" spc="2" kern="0">
-                <a:solidFill>
-                  <a:srgbClr val="C4C8D6"/>
-                </a:solidFill>
-                <a:latin typeface="Be Vietnam Pro" pitchFamily="34" charset="0"/>
-                <a:ea typeface="Be Vietnam Pro" pitchFamily="34" charset="-122"/>
-                <a:cs typeface="Be Vietnam Pro" pitchFamily="34" charset="-120"/>
-              </a:rPr>
-              <a:t> GIL,</a:t>
-            </a:r>
-            <a:r>
-              <a:rPr lang="en-US" sz="1950" dirty="0" spc="-4" kern="0">
-                <a:solidFill>
-                  <a:srgbClr val="C4C8D6"/>
-                </a:solidFill>
-                <a:latin typeface="Be Vietnam Pro" pitchFamily="34" charset="0"/>
-                <a:ea typeface="Be Vietnam Pro" pitchFamily="34" charset="-122"/>
-                <a:cs typeface="Be Vietnam Pro" pitchFamily="34" charset="-120"/>
-              </a:rPr>
-              <a:t> multiprocessing.</a:t>
+              <a:t> free-threaded.</a:t>
             </a:r>
             <a:endParaRPr lang="en-US" sz="1950" dirty="0"/>
           </a:p>
@@ -18889,17 +18077,6 @@
               <a:t> ngày</a:t>
             </a:r>
             <a:r>
-              <a:rPr lang="en-US" sz="2100" dirty="0" spc="-1" kern="0">
-                <a:solidFill>
-                  <a:srgbClr val="F3EEE3"/>
-                </a:solidFill>
-                <a:latin typeface="Be Vietnam Pro" pitchFamily="34" charset="0"/>
-                <a:ea typeface="Be Vietnam Pro" pitchFamily="34" charset="-122"/>
-                <a:cs typeface="Be Vietnam Pro" pitchFamily="34" charset="-120"/>
-              </a:rPr>
-              <a:t> 2026-10-18.</a:t>
-            </a:r>
-            <a:r>
               <a:rPr lang="en-US" sz="2100" dirty="0" spc="0" kern="0">
                 <a:solidFill>
                   <a:srgbClr val="F3EEE3"/>
@@ -18908,18 +18085,7 @@
                 <a:ea typeface="Be Vietnam Pro" pitchFamily="34" charset="-122"/>
                 <a:cs typeface="Be Vietnam Pro" pitchFamily="34" charset="-120"/>
               </a:rPr>
-              <a:t> Hình</a:t>
-            </a:r>
-            <a:r>
-              <a:rPr lang="en-US" sz="2100" dirty="0" spc="1" kern="0">
-                <a:solidFill>
-                  <a:srgbClr val="F3EEE3"/>
-                </a:solidFill>
-                <a:latin typeface="Be Vietnam Pro" pitchFamily="34" charset="0"/>
-                <a:ea typeface="Be Vietnam Pro" pitchFamily="34" charset="-122"/>
-                <a:cs typeface="Be Vietnam Pro" pitchFamily="34" charset="-120"/>
-              </a:rPr>
-              <a:t> minh</a:t>
+              <a:t> 2026-10-19.</a:t>
             </a:r>
             <a:r>
               <a:rPr lang="en-US" sz="2100" dirty="0" spc="-6" kern="0">
@@ -18930,18 +18096,18 @@
                 <a:ea typeface="Be Vietnam Pro" pitchFamily="34" charset="-122"/>
                 <a:cs typeface="Be Vietnam Pro" pitchFamily="34" charset="-120"/>
               </a:rPr>
-              <a:t> họa</a:t>
-            </a:r>
-            <a:r>
-              <a:rPr lang="en-US" sz="2100" dirty="0" spc="-3" kern="0">
-                <a:solidFill>
-                  <a:srgbClr val="F3EEE3"/>
-                </a:solidFill>
-                <a:latin typeface="Be Vietnam Pro" pitchFamily="34" charset="0"/>
-                <a:ea typeface="Be Vietnam Pro" pitchFamily="34" charset="-122"/>
-                <a:cs typeface="Be Vietnam Pro" pitchFamily="34" charset="-120"/>
-              </a:rPr>
-              <a:t> là</a:t>
+              <a:t> Số</a:t>
+            </a:r>
+            <a:r>
+              <a:rPr lang="en-US" sz="2100" dirty="0" spc="12" kern="0">
+                <a:solidFill>
+                  <a:srgbClr val="F3EEE3"/>
+                </a:solidFill>
+                <a:latin typeface="Be Vietnam Pro" pitchFamily="34" charset="0"/>
+                <a:ea typeface="Be Vietnam Pro" pitchFamily="34" charset="-122"/>
+                <a:cs typeface="Be Vietnam Pro" pitchFamily="34" charset="-120"/>
+              </a:rPr>
+              <a:t> đo</a:t>
             </a:r>
             <a:r>
               <a:rPr lang="en-US" sz="2100" dirty="0" spc="-4" kern="0">
@@ -18952,29 +18118,40 @@
                 <a:ea typeface="Be Vietnam Pro" pitchFamily="34" charset="-122"/>
                 <a:cs typeface="Be Vietnam Pro" pitchFamily="34" charset="-120"/>
               </a:rPr>
-              <a:t> thiết</a:t>
-            </a:r>
-            <a:r>
-              <a:rPr lang="en-US" sz="2100" dirty="0" spc="-30" kern="0">
-                <a:solidFill>
-                  <a:srgbClr val="F3EEE3"/>
-                </a:solidFill>
-                <a:latin typeface="Be Vietnam Pro" pitchFamily="34" charset="0"/>
-                <a:ea typeface="Be Vietnam Pro" pitchFamily="34" charset="-122"/>
-                <a:cs typeface="Be Vietnam Pro" pitchFamily="34" charset="-120"/>
-              </a:rPr>
-              <a:t> kế</a:t>
-            </a:r>
-            <a:r>
-              <a:rPr lang="en-US" sz="2100" dirty="0" spc="-1" kern="0">
-                <a:solidFill>
-                  <a:srgbClr val="F3EEE3"/>
-                </a:solidFill>
-                <a:latin typeface="Be Vietnam Pro" pitchFamily="34" charset="0"/>
-                <a:ea typeface="Be Vietnam Pro" pitchFamily="34" charset="-122"/>
-                <a:cs typeface="Be Vietnam Pro" pitchFamily="34" charset="-120"/>
-              </a:rPr>
-              <a:t> mới.</a:t>
+              <a:t> do</a:t>
+            </a:r>
+            <a:r>
+              <a:rPr lang="en-US" sz="2100" dirty="0" spc="5" kern="0">
+                <a:solidFill>
+                  <a:srgbClr val="F3EEE3"/>
+                </a:solidFill>
+                <a:latin typeface="Be Vietnam Pro" pitchFamily="34" charset="0"/>
+                <a:ea typeface="Be Vietnam Pro" pitchFamily="34" charset="-122"/>
+                <a:cs typeface="Be Vietnam Pro" pitchFamily="34" charset="-120"/>
+              </a:rPr>
+              <a:t> người</a:t>
+            </a:r>
+            <a:r>
+              <a:rPr lang="en-US" sz="2100" dirty="0" spc="0" kern="0">
+                <a:solidFill>
+                  <a:srgbClr val="F3EEE3"/>
+                </a:solidFill>
+                <a:latin typeface="Be Vietnam Pro" pitchFamily="34" charset="0"/>
+                <a:ea typeface="Be Vietnam Pro" pitchFamily="34" charset="-122"/>
+                <a:cs typeface="Be Vietnam Pro" pitchFamily="34" charset="-120"/>
+              </a:rPr>
+              <a:t> biên</a:t>
+            </a:r>
+            <a:r>
+              <a:rPr lang="en-US" sz="2100" dirty="0" spc="-7" kern="0">
+                <a:solidFill>
+                  <a:srgbClr val="F3EEE3"/>
+                </a:solidFill>
+                <a:latin typeface="Be Vietnam Pro" pitchFamily="34" charset="0"/>
+                <a:ea typeface="Be Vietnam Pro" pitchFamily="34" charset="-122"/>
+                <a:cs typeface="Be Vietnam Pro" pitchFamily="34" charset="-120"/>
+              </a:rPr>
+              <a:t> soạn chạy.</a:t>
             </a:r>
             <a:endParaRPr lang="en-US" sz="2100" dirty="0"/>
           </a:p>

--- a/system-design-101/vi/lessons/sd-10-025/slides/sd-10-025.pptx
+++ b/system-design-101/vi/lessons/sd-10-025/slides/sd-10-025.pptx
@@ -15187,7 +15187,51 @@
                 <a:ea typeface="Be Vietnam Pro" pitchFamily="34" charset="-122"/>
                 <a:cs typeface="Be Vietnam Pro" pitchFamily="34" charset="-120"/>
               </a:rPr>
-              <a:t> ảnh,</a:t>
+              <a:t> ảnh</a:t>
+            </a:r>
+            <a:r>
+              <a:rPr lang="en-US" sz="2550" dirty="0" spc="-2" kern="0">
+                <a:solidFill>
+                  <a:srgbClr val="14161C"/>
+                </a:solidFill>
+                <a:latin typeface="Be Vietnam Pro" pitchFamily="34" charset="0"/>
+                <a:ea typeface="Be Vietnam Pro" pitchFamily="34" charset="-122"/>
+                <a:cs typeface="Be Vietnam Pro" pitchFamily="34" charset="-120"/>
+              </a:rPr>
+              <a:t> bằng</a:t>
+            </a:r>
+            <a:r>
+              <a:rPr lang="en-US" sz="2550" dirty="0" spc="2" kern="0">
+                <a:solidFill>
+                  <a:srgbClr val="14161C"/>
+                </a:solidFill>
+                <a:latin typeface="Be Vietnam Pro" pitchFamily="34" charset="0"/>
+                <a:ea typeface="Be Vietnam Pro" pitchFamily="34" charset="-122"/>
+                <a:cs typeface="Be Vietnam Pro" pitchFamily="34" charset="-120"/>
+              </a:rPr>
+              <a:t> mã</a:t>
+            </a:r>
+            <a:r>
+              <a:rPr lang="en-US" sz="2550" dirty="0" spc="8" kern="0">
+                <a:solidFill>
+                  <a:srgbClr val="14161C"/>
+                </a:solidFill>
+                <a:latin typeface="Be Vietnam Pro" pitchFamily="34" charset="0"/>
+                <a:ea typeface="Be Vietnam Pro" pitchFamily="34" charset="-122"/>
+                <a:cs typeface="Be Vietnam Pro" pitchFamily="34" charset="-120"/>
+              </a:rPr>
+              <a:t> Python</a:t>
+            </a:r>
+            <a:r>
+              <a:rPr lang="en-US" sz="2550" dirty="0" spc="1" kern="0">
+                <a:solidFill>
+                  <a:srgbClr val="14161C"/>
+                </a:solidFill>
+                <a:latin typeface="Be Vietnam Pro" pitchFamily="34" charset="0"/>
+                <a:ea typeface="Be Vietnam Pro" pitchFamily="34" charset="-122"/>
+                <a:cs typeface="Be Vietnam Pro" pitchFamily="34" charset="-120"/>
+              </a:rPr>
+              <a:t> thuần,</a:t>
             </a:r>
             <a:r>
               <a:rPr lang="en-US" sz="2550" dirty="0" spc="7" kern="0">
@@ -15212,7 +15256,7 @@
               <a:t> hết một</a:t>
             </a:r>
             <a:r>
-              <a:rPr lang="en-US" sz="2550" dirty="0" spc="1" kern="0">
+              <a:rPr lang="en-US" sz="2550" dirty="0" spc="0" kern="0">
                 <a:solidFill>
                   <a:srgbClr val="14161C"/>
                 </a:solidFill>
